--- a/doc/designDoc.pptx
+++ b/doc/designDoc.pptx
@@ -5,13 +5,14 @@
     <p:sldMasterId id="2147483648" r:id="rId1"/>
   </p:sldMasterIdLst>
   <p:notesMasterIdLst>
-    <p:notesMasterId r:id="rId6"/>
+    <p:notesMasterId r:id="rId7"/>
   </p:notesMasterIdLst>
   <p:sldIdLst>
-    <p:sldId id="256" r:id="rId2"/>
-    <p:sldId id="257" r:id="rId3"/>
-    <p:sldId id="258" r:id="rId4"/>
-    <p:sldId id="259" r:id="rId5"/>
+    <p:sldId id="260" r:id="rId2"/>
+    <p:sldId id="256" r:id="rId3"/>
+    <p:sldId id="257" r:id="rId4"/>
+    <p:sldId id="258" r:id="rId5"/>
+    <p:sldId id="259" r:id="rId6"/>
   </p:sldIdLst>
   <p:sldSz cx="12192000" cy="6858000"/>
   <p:notesSz cx="6858000" cy="9144000"/>
@@ -200,7 +201,7 @@
           <a:p>
             <a:fld id="{D869F5A2-FB33-43AA-9FB4-F58392D514B0}" type="datetimeFigureOut">
               <a:rPr lang="en-SG" smtClean="0"/>
-              <a:t>7/5/2023</a:t>
+              <a:t>27/3/2026</a:t>
             </a:fld>
             <a:endParaRPr lang="en-SG"/>
           </a:p>
@@ -533,7 +534,7 @@
           <a:p>
             <a:fld id="{9D096D9A-D7DA-4E78-940A-EAFDA1F803BC}" type="slidenum">
               <a:rPr lang="en-SG" smtClean="0"/>
-              <a:t>2</a:t>
+              <a:t>3</a:t>
             </a:fld>
             <a:endParaRPr lang="en-SG"/>
           </a:p>
@@ -617,7 +618,7 @@
           <a:p>
             <a:fld id="{9D096D9A-D7DA-4E78-940A-EAFDA1F803BC}" type="slidenum">
               <a:rPr lang="en-SG" smtClean="0"/>
-              <a:t>3</a:t>
+              <a:t>4</a:t>
             </a:fld>
             <a:endParaRPr lang="en-SG"/>
           </a:p>
@@ -785,7 +786,7 @@
           <a:p>
             <a:fld id="{7E4C12AF-1699-436B-92E4-CBB1E278C05C}" type="datetimeFigureOut">
               <a:rPr lang="en-SG" smtClean="0"/>
-              <a:t>7/5/2023</a:t>
+              <a:t>27/3/2026</a:t>
             </a:fld>
             <a:endParaRPr lang="en-SG"/>
           </a:p>
@@ -985,7 +986,7 @@
           <a:p>
             <a:fld id="{7E4C12AF-1699-436B-92E4-CBB1E278C05C}" type="datetimeFigureOut">
               <a:rPr lang="en-SG" smtClean="0"/>
-              <a:t>7/5/2023</a:t>
+              <a:t>27/3/2026</a:t>
             </a:fld>
             <a:endParaRPr lang="en-SG"/>
           </a:p>
@@ -1195,7 +1196,7 @@
           <a:p>
             <a:fld id="{7E4C12AF-1699-436B-92E4-CBB1E278C05C}" type="datetimeFigureOut">
               <a:rPr lang="en-SG" smtClean="0"/>
-              <a:t>7/5/2023</a:t>
+              <a:t>27/3/2026</a:t>
             </a:fld>
             <a:endParaRPr lang="en-SG"/>
           </a:p>
@@ -1395,7 +1396,7 @@
           <a:p>
             <a:fld id="{7E4C12AF-1699-436B-92E4-CBB1E278C05C}" type="datetimeFigureOut">
               <a:rPr lang="en-SG" smtClean="0"/>
-              <a:t>7/5/2023</a:t>
+              <a:t>27/3/2026</a:t>
             </a:fld>
             <a:endParaRPr lang="en-SG"/>
           </a:p>
@@ -1671,7 +1672,7 @@
           <a:p>
             <a:fld id="{7E4C12AF-1699-436B-92E4-CBB1E278C05C}" type="datetimeFigureOut">
               <a:rPr lang="en-SG" smtClean="0"/>
-              <a:t>7/5/2023</a:t>
+              <a:t>27/3/2026</a:t>
             </a:fld>
             <a:endParaRPr lang="en-SG"/>
           </a:p>
@@ -1939,7 +1940,7 @@
           <a:p>
             <a:fld id="{7E4C12AF-1699-436B-92E4-CBB1E278C05C}" type="datetimeFigureOut">
               <a:rPr lang="en-SG" smtClean="0"/>
-              <a:t>7/5/2023</a:t>
+              <a:t>27/3/2026</a:t>
             </a:fld>
             <a:endParaRPr lang="en-SG"/>
           </a:p>
@@ -2354,7 +2355,7 @@
           <a:p>
             <a:fld id="{7E4C12AF-1699-436B-92E4-CBB1E278C05C}" type="datetimeFigureOut">
               <a:rPr lang="en-SG" smtClean="0"/>
-              <a:t>7/5/2023</a:t>
+              <a:t>27/3/2026</a:t>
             </a:fld>
             <a:endParaRPr lang="en-SG"/>
           </a:p>
@@ -2496,7 +2497,7 @@
           <a:p>
             <a:fld id="{7E4C12AF-1699-436B-92E4-CBB1E278C05C}" type="datetimeFigureOut">
               <a:rPr lang="en-SG" smtClean="0"/>
-              <a:t>7/5/2023</a:t>
+              <a:t>27/3/2026</a:t>
             </a:fld>
             <a:endParaRPr lang="en-SG"/>
           </a:p>
@@ -2609,7 +2610,7 @@
           <a:p>
             <a:fld id="{7E4C12AF-1699-436B-92E4-CBB1E278C05C}" type="datetimeFigureOut">
               <a:rPr lang="en-SG" smtClean="0"/>
-              <a:t>7/5/2023</a:t>
+              <a:t>27/3/2026</a:t>
             </a:fld>
             <a:endParaRPr lang="en-SG"/>
           </a:p>
@@ -2922,7 +2923,7 @@
           <a:p>
             <a:fld id="{7E4C12AF-1699-436B-92E4-CBB1E278C05C}" type="datetimeFigureOut">
               <a:rPr lang="en-SG" smtClean="0"/>
-              <a:t>7/5/2023</a:t>
+              <a:t>27/3/2026</a:t>
             </a:fld>
             <a:endParaRPr lang="en-SG"/>
           </a:p>
@@ -3211,7 +3212,7 @@
           <a:p>
             <a:fld id="{7E4C12AF-1699-436B-92E4-CBB1E278C05C}" type="datetimeFigureOut">
               <a:rPr lang="en-SG" smtClean="0"/>
-              <a:t>7/5/2023</a:t>
+              <a:t>27/3/2026</a:t>
             </a:fld>
             <a:endParaRPr lang="en-SG"/>
           </a:p>
@@ -3454,7 +3455,7 @@
           <a:p>
             <a:fld id="{7E4C12AF-1699-436B-92E4-CBB1E278C05C}" type="datetimeFigureOut">
               <a:rPr lang="en-SG" smtClean="0"/>
-              <a:t>7/5/2023</a:t>
+              <a:t>27/3/2026</a:t>
             </a:fld>
             <a:endParaRPr lang="en-SG"/>
           </a:p>
@@ -3871,3055 +3872,267 @@
           <a:chExt cx="0" cy="0"/>
         </a:xfrm>
       </p:grpSpPr>
-      <p:sp>
-        <p:nvSpPr>
-          <p:cNvPr id="80" name="Rectangle 79">
-            <a:extLst>
-              <a:ext uri="{FF2B5EF4-FFF2-40B4-BE49-F238E27FC236}">
-                <a16:creationId xmlns:a16="http://schemas.microsoft.com/office/drawing/2014/main" id="{4E82B5E4-07AF-7068-5823-87791F31B149}"/>
-              </a:ext>
-            </a:extLst>
-          </p:cNvPr>
-          <p:cNvSpPr/>
-          <p:nvPr/>
-        </p:nvSpPr>
-        <p:spPr>
-          <a:xfrm>
-            <a:off x="1075174" y="2120204"/>
-            <a:ext cx="6702250" cy="4239649"/>
-          </a:xfrm>
-          <a:prstGeom prst="rect">
-            <a:avLst/>
-          </a:prstGeom>
-          <a:ln>
+      <p:pic>
+        <p:nvPicPr>
+          <p:cNvPr id="5" name="Picture 4">
+            <a:extLst>
+              <a:ext uri="{FF2B5EF4-FFF2-40B4-BE49-F238E27FC236}">
+                <a16:creationId xmlns:a16="http://schemas.microsoft.com/office/drawing/2014/main" id="{05892620-2A7D-BDAD-80C4-D28655F98756}"/>
+              </a:ext>
+            </a:extLst>
+          </p:cNvPr>
+          <p:cNvPicPr>
+            <a:picLocks noChangeAspect="1"/>
+          </p:cNvPicPr>
+          <p:nvPr/>
+        </p:nvPicPr>
+        <p:blipFill>
+          <a:blip r:embed="rId2">
+            <a:extLst>
+              <a:ext uri="{28A0092B-C50C-407E-A947-70E740481C1C}">
+                <a14:useLocalDpi xmlns:a14="http://schemas.microsoft.com/office/drawing/2010/main" val="0"/>
+              </a:ext>
+            </a:extLst>
+          </a:blip>
+          <a:srcRect b="23137"/>
+          <a:stretch>
+            <a:fillRect/>
+          </a:stretch>
+        </p:blipFill>
+        <p:spPr>
+          <a:xfrm>
+            <a:off x="926951" y="793376"/>
+            <a:ext cx="4572000" cy="5271247"/>
+          </a:xfrm>
+          <a:prstGeom prst="rect">
+            <a:avLst/>
+          </a:prstGeom>
+        </p:spPr>
+      </p:pic>
+      <p:sp>
+        <p:nvSpPr>
+          <p:cNvPr id="6" name="TextBox 5">
+            <a:extLst>
+              <a:ext uri="{FF2B5EF4-FFF2-40B4-BE49-F238E27FC236}">
+                <a16:creationId xmlns:a16="http://schemas.microsoft.com/office/drawing/2014/main" id="{59DC92D8-DEF6-4777-1E08-228670E5FF09}"/>
+              </a:ext>
+            </a:extLst>
+          </p:cNvPr>
+          <p:cNvSpPr txBox="1"/>
+          <p:nvPr/>
+        </p:nvSpPr>
+        <p:spPr>
+          <a:xfrm>
+            <a:off x="5498951" y="814891"/>
+            <a:ext cx="5925670" cy="5249731"/>
+          </a:xfrm>
+          <a:prstGeom prst="rect">
+            <a:avLst/>
+          </a:prstGeom>
+          <a:noFill/>
+          <a:ln w="19050">
             <a:solidFill>
               <a:schemeClr val="tx1"/>
             </a:solidFill>
           </a:ln>
         </p:spPr>
-        <p:style>
-          <a:lnRef idx="2">
-            <a:schemeClr val="accent6"/>
-          </a:lnRef>
-          <a:fillRef idx="1">
-            <a:schemeClr val="lt1"/>
-          </a:fillRef>
-          <a:effectRef idx="0">
-            <a:schemeClr val="accent6"/>
-          </a:effectRef>
-          <a:fontRef idx="minor">
-            <a:schemeClr val="dk1"/>
-          </a:fontRef>
-        </p:style>
-        <p:txBody>
-          <a:bodyPr rtlCol="0" anchor="ctr"/>
-          <a:lstStyle/>
-          <a:p>
-            <a:pPr algn="ctr"/>
-            <a:endParaRPr lang="en-SG" dirty="0"/>
-          </a:p>
-        </p:txBody>
-      </p:sp>
-      <p:sp>
-        <p:nvSpPr>
-          <p:cNvPr id="39" name="Rectangle 38">
-            <a:extLst>
-              <a:ext uri="{FF2B5EF4-FFF2-40B4-BE49-F238E27FC236}">
-                <a16:creationId xmlns:a16="http://schemas.microsoft.com/office/drawing/2014/main" id="{06599061-FD6D-E1A7-2C65-6FE39DF6B75A}"/>
-              </a:ext>
-            </a:extLst>
-          </p:cNvPr>
-          <p:cNvSpPr/>
-          <p:nvPr/>
-        </p:nvSpPr>
-        <p:spPr>
-          <a:xfrm>
-            <a:off x="3088533" y="2255855"/>
-            <a:ext cx="4365578" cy="2348016"/>
-          </a:xfrm>
-          <a:prstGeom prst="rect">
-            <a:avLst/>
-          </a:prstGeom>
-          <a:ln w="28575">
-            <a:solidFill>
-              <a:srgbClr val="0070C0"/>
-            </a:solidFill>
-            <a:prstDash val="sysDot"/>
-          </a:ln>
-        </p:spPr>
-        <p:style>
-          <a:lnRef idx="2">
-            <a:schemeClr val="accent6"/>
-          </a:lnRef>
-          <a:fillRef idx="1">
-            <a:schemeClr val="lt1"/>
-          </a:fillRef>
-          <a:effectRef idx="0">
-            <a:schemeClr val="accent6"/>
-          </a:effectRef>
-          <a:fontRef idx="minor">
-            <a:schemeClr val="dk1"/>
-          </a:fontRef>
-        </p:style>
-        <p:txBody>
-          <a:bodyPr rtlCol="0" anchor="ctr"/>
-          <a:lstStyle/>
-          <a:p>
-            <a:pPr algn="ctr"/>
-            <a:endParaRPr lang="en-SG" dirty="0"/>
-          </a:p>
-        </p:txBody>
-      </p:sp>
-      <p:sp>
-        <p:nvSpPr>
-          <p:cNvPr id="4" name="Rectangle 3">
-            <a:extLst>
-              <a:ext uri="{FF2B5EF4-FFF2-40B4-BE49-F238E27FC236}">
-                <a16:creationId xmlns:a16="http://schemas.microsoft.com/office/drawing/2014/main" id="{16E92E2E-563A-F8C4-E579-81AAA3B59D0E}"/>
-              </a:ext>
-            </a:extLst>
-          </p:cNvPr>
-          <p:cNvSpPr/>
-          <p:nvPr/>
-        </p:nvSpPr>
-        <p:spPr>
-          <a:xfrm>
-            <a:off x="1266850" y="2255855"/>
-            <a:ext cx="1446963" cy="381838"/>
-          </a:xfrm>
-          <a:prstGeom prst="rect">
-            <a:avLst/>
-          </a:prstGeom>
-        </p:spPr>
-        <p:style>
-          <a:lnRef idx="2">
-            <a:schemeClr val="accent1">
-              <a:shade val="50000"/>
-            </a:schemeClr>
-          </a:lnRef>
-          <a:fillRef idx="1">
-            <a:schemeClr val="accent1"/>
-          </a:fillRef>
-          <a:effectRef idx="0">
-            <a:schemeClr val="accent1"/>
-          </a:effectRef>
-          <a:fontRef idx="minor">
-            <a:schemeClr val="lt1"/>
-          </a:fontRef>
-        </p:style>
-        <p:txBody>
-          <a:bodyPr rtlCol="0" anchor="ctr"/>
-          <a:lstStyle/>
-          <a:p>
-            <a:pPr algn="ctr"/>
-            <a:r>
-              <a:rPr lang="en-US" sz="1400" dirty="0"/>
-              <a:t>Prober Agent </a:t>
-            </a:r>
-            <a:endParaRPr lang="en-SG" sz="1400" dirty="0"/>
-          </a:p>
-        </p:txBody>
-      </p:sp>
-      <p:sp>
-        <p:nvSpPr>
-          <p:cNvPr id="5" name="Rectangle 4">
-            <a:extLst>
-              <a:ext uri="{FF2B5EF4-FFF2-40B4-BE49-F238E27FC236}">
-                <a16:creationId xmlns:a16="http://schemas.microsoft.com/office/drawing/2014/main" id="{71CA713F-A113-B76C-8C6D-99FC3284BB63}"/>
-              </a:ext>
-            </a:extLst>
-          </p:cNvPr>
-          <p:cNvSpPr/>
-          <p:nvPr/>
-        </p:nvSpPr>
-        <p:spPr>
-          <a:xfrm>
-            <a:off x="4431323" y="572759"/>
-            <a:ext cx="4170065" cy="1306286"/>
-          </a:xfrm>
-          <a:prstGeom prst="rect">
-            <a:avLst/>
-          </a:prstGeom>
-        </p:spPr>
-        <p:style>
-          <a:lnRef idx="2">
-            <a:schemeClr val="accent6"/>
-          </a:lnRef>
-          <a:fillRef idx="1">
-            <a:schemeClr val="lt1"/>
-          </a:fillRef>
-          <a:effectRef idx="0">
-            <a:schemeClr val="accent6"/>
-          </a:effectRef>
-          <a:fontRef idx="minor">
-            <a:schemeClr val="dk1"/>
-          </a:fontRef>
-        </p:style>
-        <p:txBody>
-          <a:bodyPr rtlCol="0" anchor="ctr"/>
-          <a:lstStyle/>
-          <a:p>
-            <a:pPr algn="ctr"/>
-            <a:endParaRPr lang="en-SG"/>
-          </a:p>
-        </p:txBody>
-      </p:sp>
-      <p:sp>
-        <p:nvSpPr>
-          <p:cNvPr id="6" name="Rectangle 5">
-            <a:extLst>
-              <a:ext uri="{FF2B5EF4-FFF2-40B4-BE49-F238E27FC236}">
-                <a16:creationId xmlns:a16="http://schemas.microsoft.com/office/drawing/2014/main" id="{F5281419-A8AD-A68D-6D1A-CA369DF681F3}"/>
-              </a:ext>
-            </a:extLst>
-          </p:cNvPr>
-          <p:cNvSpPr/>
-          <p:nvPr/>
-        </p:nvSpPr>
-        <p:spPr>
-          <a:xfrm>
-            <a:off x="4543529" y="879232"/>
-            <a:ext cx="1274467" cy="316524"/>
-          </a:xfrm>
-          <a:prstGeom prst="rect">
-            <a:avLst/>
-          </a:prstGeom>
-          <a:solidFill>
-            <a:schemeClr val="accent6">
-              <a:lumMod val="75000"/>
-            </a:schemeClr>
-          </a:solidFill>
-        </p:spPr>
-        <p:style>
-          <a:lnRef idx="2">
-            <a:schemeClr val="accent1">
-              <a:shade val="50000"/>
-            </a:schemeClr>
-          </a:lnRef>
-          <a:fillRef idx="1">
-            <a:schemeClr val="accent1"/>
-          </a:fillRef>
-          <a:effectRef idx="0">
-            <a:schemeClr val="accent1"/>
-          </a:effectRef>
-          <a:fontRef idx="minor">
-            <a:schemeClr val="lt1"/>
-          </a:fontRef>
-        </p:style>
-        <p:txBody>
-          <a:bodyPr rtlCol="0" anchor="ctr"/>
-          <a:lstStyle/>
-          <a:p>
-            <a:pPr algn="ctr"/>
-            <a:r>
-              <a:rPr lang="en-US" sz="1400" dirty="0"/>
-              <a:t>NTP time fetch</a:t>
-            </a:r>
-            <a:endParaRPr lang="en-SG" sz="1400" dirty="0"/>
-          </a:p>
-        </p:txBody>
-      </p:sp>
-      <p:sp>
-        <p:nvSpPr>
-          <p:cNvPr id="7" name="Rectangle 6">
-            <a:extLst>
-              <a:ext uri="{FF2B5EF4-FFF2-40B4-BE49-F238E27FC236}">
-                <a16:creationId xmlns:a16="http://schemas.microsoft.com/office/drawing/2014/main" id="{E457D2DE-E44D-6C0A-61B3-D542D104071C}"/>
-              </a:ext>
-            </a:extLst>
-          </p:cNvPr>
-          <p:cNvSpPr/>
-          <p:nvPr/>
-        </p:nvSpPr>
-        <p:spPr>
-          <a:xfrm>
-            <a:off x="5979606" y="879232"/>
-            <a:ext cx="571919" cy="316524"/>
-          </a:xfrm>
-          <a:prstGeom prst="rect">
-            <a:avLst/>
-          </a:prstGeom>
-          <a:solidFill>
-            <a:schemeClr val="accent6">
-              <a:lumMod val="75000"/>
-            </a:schemeClr>
-          </a:solidFill>
-        </p:spPr>
-        <p:style>
-          <a:lnRef idx="2">
-            <a:schemeClr val="accent1">
-              <a:shade val="50000"/>
-            </a:schemeClr>
-          </a:lnRef>
-          <a:fillRef idx="1">
-            <a:schemeClr val="accent1"/>
-          </a:fillRef>
-          <a:effectRef idx="0">
-            <a:schemeClr val="accent1"/>
-          </a:effectRef>
-          <a:fontRef idx="minor">
-            <a:schemeClr val="lt1"/>
-          </a:fontRef>
-        </p:style>
-        <p:txBody>
-          <a:bodyPr rtlCol="0" anchor="ctr"/>
-          <a:lstStyle/>
-          <a:p>
-            <a:pPr algn="ctr"/>
-            <a:r>
-              <a:rPr lang="en-US" sz="1400" dirty="0"/>
-              <a:t>ping</a:t>
-            </a:r>
-            <a:endParaRPr lang="en-SG" sz="1400" dirty="0"/>
-          </a:p>
-        </p:txBody>
-      </p:sp>
-      <p:sp>
-        <p:nvSpPr>
-          <p:cNvPr id="8" name="Rectangle 7">
-            <a:extLst>
-              <a:ext uri="{FF2B5EF4-FFF2-40B4-BE49-F238E27FC236}">
-                <a16:creationId xmlns:a16="http://schemas.microsoft.com/office/drawing/2014/main" id="{2F99FDEE-4894-BC1A-8AC4-A09D655DB7C9}"/>
-              </a:ext>
-            </a:extLst>
-          </p:cNvPr>
-          <p:cNvSpPr/>
-          <p:nvPr/>
-        </p:nvSpPr>
-        <p:spPr>
-          <a:xfrm>
-            <a:off x="6713135" y="879232"/>
-            <a:ext cx="571919" cy="316524"/>
-          </a:xfrm>
-          <a:prstGeom prst="rect">
-            <a:avLst/>
-          </a:prstGeom>
-          <a:solidFill>
-            <a:schemeClr val="accent6">
-              <a:lumMod val="75000"/>
-            </a:schemeClr>
-          </a:solidFill>
-        </p:spPr>
-        <p:style>
-          <a:lnRef idx="2">
-            <a:schemeClr val="accent1">
-              <a:shade val="50000"/>
-            </a:schemeClr>
-          </a:lnRef>
-          <a:fillRef idx="1">
-            <a:schemeClr val="accent1"/>
-          </a:fillRef>
-          <a:effectRef idx="0">
-            <a:schemeClr val="accent1"/>
-          </a:effectRef>
-          <a:fontRef idx="minor">
-            <a:schemeClr val="lt1"/>
-          </a:fontRef>
-        </p:style>
-        <p:txBody>
-          <a:bodyPr rtlCol="0" anchor="ctr"/>
-          <a:lstStyle/>
-          <a:p>
-            <a:pPr algn="ctr"/>
-            <a:r>
-              <a:rPr lang="en-US" sz="1400" dirty="0"/>
-              <a:t>FTP</a:t>
-            </a:r>
-            <a:endParaRPr lang="en-SG" sz="1400" dirty="0"/>
-          </a:p>
-        </p:txBody>
-      </p:sp>
-      <p:sp>
-        <p:nvSpPr>
-          <p:cNvPr id="9" name="Rectangle 8">
-            <a:extLst>
-              <a:ext uri="{FF2B5EF4-FFF2-40B4-BE49-F238E27FC236}">
-                <a16:creationId xmlns:a16="http://schemas.microsoft.com/office/drawing/2014/main" id="{1FE60CD1-011C-DF92-4EE9-AF0336D05767}"/>
-              </a:ext>
-            </a:extLst>
-          </p:cNvPr>
-          <p:cNvSpPr/>
-          <p:nvPr/>
-        </p:nvSpPr>
-        <p:spPr>
-          <a:xfrm>
-            <a:off x="7622530" y="879232"/>
-            <a:ext cx="818105" cy="316524"/>
-          </a:xfrm>
-          <a:prstGeom prst="rect">
-            <a:avLst/>
-          </a:prstGeom>
-          <a:solidFill>
-            <a:schemeClr val="accent6">
-              <a:lumMod val="75000"/>
-            </a:schemeClr>
-          </a:solidFill>
-        </p:spPr>
-        <p:style>
-          <a:lnRef idx="2">
-            <a:schemeClr val="accent1">
-              <a:shade val="50000"/>
-            </a:schemeClr>
-          </a:lnRef>
-          <a:fillRef idx="1">
-            <a:schemeClr val="accent1"/>
-          </a:fillRef>
-          <a:effectRef idx="0">
-            <a:schemeClr val="accent1"/>
-          </a:effectRef>
-          <a:fontRef idx="minor">
-            <a:schemeClr val="lt1"/>
-          </a:fontRef>
-        </p:style>
-        <p:txBody>
-          <a:bodyPr rtlCol="0" anchor="ctr"/>
-          <a:lstStyle/>
-          <a:p>
-            <a:pPr algn="ctr"/>
-            <a:r>
-              <a:rPr lang="en-US" sz="1400" dirty="0"/>
-              <a:t>NMAP</a:t>
-            </a:r>
-            <a:endParaRPr lang="en-SG" sz="1400" dirty="0"/>
-          </a:p>
-        </p:txBody>
-      </p:sp>
-      <p:sp>
-        <p:nvSpPr>
-          <p:cNvPr id="10" name="TextBox 9">
-            <a:extLst>
-              <a:ext uri="{FF2B5EF4-FFF2-40B4-BE49-F238E27FC236}">
-                <a16:creationId xmlns:a16="http://schemas.microsoft.com/office/drawing/2014/main" id="{BFD41933-3369-9DAA-D432-CF39EF1224D0}"/>
-              </a:ext>
-            </a:extLst>
-          </p:cNvPr>
-          <p:cNvSpPr txBox="1"/>
-          <p:nvPr/>
-        </p:nvSpPr>
-        <p:spPr>
-          <a:xfrm>
-            <a:off x="7322344" y="910613"/>
-            <a:ext cx="347472" cy="369332"/>
-          </a:xfrm>
-          <a:prstGeom prst="rect">
-            <a:avLst/>
-          </a:prstGeom>
-          <a:noFill/>
-        </p:spPr>
         <p:txBody>
           <a:bodyPr wrap="square" rtlCol="0">
             <a:spAutoFit/>
           </a:bodyPr>
           <a:lstStyle/>
           <a:p>
-            <a:r>
-              <a:rPr lang="en-SG" dirty="0"/>
-              <a:t>…</a:t>
-            </a:r>
-          </a:p>
-        </p:txBody>
-      </p:sp>
-      <p:sp>
-        <p:nvSpPr>
-          <p:cNvPr id="11" name="Rectangle 10">
-            <a:extLst>
-              <a:ext uri="{FF2B5EF4-FFF2-40B4-BE49-F238E27FC236}">
-                <a16:creationId xmlns:a16="http://schemas.microsoft.com/office/drawing/2014/main" id="{FA750F18-FE39-5E1D-C734-D52E601AC876}"/>
-              </a:ext>
-            </a:extLst>
-          </p:cNvPr>
-          <p:cNvSpPr/>
-          <p:nvPr/>
-        </p:nvSpPr>
-        <p:spPr>
-          <a:xfrm>
-            <a:off x="4543529" y="1436078"/>
-            <a:ext cx="818105" cy="316524"/>
-          </a:xfrm>
-          <a:prstGeom prst="rect">
-            <a:avLst/>
-          </a:prstGeom>
-          <a:solidFill>
-            <a:schemeClr val="accent6">
-              <a:lumMod val="75000"/>
-            </a:schemeClr>
-          </a:solidFill>
-        </p:spPr>
-        <p:style>
-          <a:lnRef idx="2">
-            <a:schemeClr val="accent1">
-              <a:shade val="50000"/>
-            </a:schemeClr>
-          </a:lnRef>
-          <a:fillRef idx="1">
-            <a:schemeClr val="accent1"/>
-          </a:fillRef>
-          <a:effectRef idx="0">
-            <a:schemeClr val="accent1"/>
-          </a:effectRef>
-          <a:fontRef idx="minor">
-            <a:schemeClr val="lt1"/>
-          </a:fontRef>
-        </p:style>
-        <p:txBody>
-          <a:bodyPr rtlCol="0" anchor="ctr"/>
-          <a:lstStyle/>
-          <a:p>
-            <a:pPr algn="ctr"/>
-            <a:r>
-              <a:rPr lang="en-US" sz="1400" dirty="0"/>
-              <a:t>http curl</a:t>
-            </a:r>
-            <a:endParaRPr lang="en-SG" sz="1400" dirty="0"/>
-          </a:p>
-        </p:txBody>
-      </p:sp>
-      <p:sp>
-        <p:nvSpPr>
-          <p:cNvPr id="12" name="Rectangle 11">
-            <a:extLst>
-              <a:ext uri="{FF2B5EF4-FFF2-40B4-BE49-F238E27FC236}">
-                <a16:creationId xmlns:a16="http://schemas.microsoft.com/office/drawing/2014/main" id="{6F06B7D2-DEF8-16BB-1E15-8FEF8B735E1E}"/>
-              </a:ext>
-            </a:extLst>
-          </p:cNvPr>
-          <p:cNvSpPr/>
-          <p:nvPr/>
-        </p:nvSpPr>
-        <p:spPr>
-          <a:xfrm>
-            <a:off x="5492678" y="1436078"/>
-            <a:ext cx="973856" cy="316524"/>
-          </a:xfrm>
-          <a:prstGeom prst="rect">
-            <a:avLst/>
-          </a:prstGeom>
-          <a:solidFill>
-            <a:schemeClr val="accent6">
-              <a:lumMod val="75000"/>
-            </a:schemeClr>
-          </a:solidFill>
-        </p:spPr>
-        <p:style>
-          <a:lnRef idx="2">
-            <a:schemeClr val="accent1">
-              <a:shade val="50000"/>
-            </a:schemeClr>
-          </a:lnRef>
-          <a:fillRef idx="1">
-            <a:schemeClr val="accent1"/>
-          </a:fillRef>
-          <a:effectRef idx="0">
-            <a:schemeClr val="accent1"/>
-          </a:effectRef>
-          <a:fontRef idx="minor">
-            <a:schemeClr val="lt1"/>
-          </a:fontRef>
-        </p:style>
-        <p:txBody>
-          <a:bodyPr rtlCol="0" anchor="ctr"/>
-          <a:lstStyle/>
-          <a:p>
-            <a:pPr algn="ctr"/>
-            <a:r>
-              <a:rPr lang="en-US" sz="1400" dirty="0"/>
-              <a:t>https curl</a:t>
-            </a:r>
-            <a:endParaRPr lang="en-SG" sz="1400" dirty="0"/>
-          </a:p>
-        </p:txBody>
-      </p:sp>
-      <p:sp>
-        <p:nvSpPr>
-          <p:cNvPr id="13" name="Rectangle 12">
-            <a:extLst>
-              <a:ext uri="{FF2B5EF4-FFF2-40B4-BE49-F238E27FC236}">
-                <a16:creationId xmlns:a16="http://schemas.microsoft.com/office/drawing/2014/main" id="{93B5A5E1-7BB4-D87D-AC1A-48E6CB3ED30C}"/>
-              </a:ext>
-            </a:extLst>
-          </p:cNvPr>
-          <p:cNvSpPr/>
-          <p:nvPr/>
-        </p:nvSpPr>
-        <p:spPr>
-          <a:xfrm>
-            <a:off x="6845652" y="1411807"/>
-            <a:ext cx="571919" cy="316524"/>
-          </a:xfrm>
-          <a:prstGeom prst="rect">
-            <a:avLst/>
-          </a:prstGeom>
-          <a:solidFill>
-            <a:schemeClr val="accent6">
-              <a:lumMod val="75000"/>
-            </a:schemeClr>
-          </a:solidFill>
-        </p:spPr>
-        <p:style>
-          <a:lnRef idx="2">
-            <a:schemeClr val="accent1">
-              <a:shade val="50000"/>
-            </a:schemeClr>
-          </a:lnRef>
-          <a:fillRef idx="1">
-            <a:schemeClr val="accent1"/>
-          </a:fillRef>
-          <a:effectRef idx="0">
-            <a:schemeClr val="accent1"/>
-          </a:effectRef>
-          <a:fontRef idx="minor">
-            <a:schemeClr val="lt1"/>
-          </a:fontRef>
-        </p:style>
-        <p:txBody>
-          <a:bodyPr rtlCol="0" anchor="ctr"/>
-          <a:lstStyle/>
-          <a:p>
-            <a:pPr algn="ctr"/>
-            <a:r>
-              <a:rPr lang="en-US" sz="1400" dirty="0" err="1"/>
-              <a:t>ssh</a:t>
-            </a:r>
-            <a:endParaRPr lang="en-SG" sz="1400" dirty="0"/>
-          </a:p>
-        </p:txBody>
-      </p:sp>
-      <p:sp>
-        <p:nvSpPr>
-          <p:cNvPr id="14" name="TextBox 13">
-            <a:extLst>
-              <a:ext uri="{FF2B5EF4-FFF2-40B4-BE49-F238E27FC236}">
-                <a16:creationId xmlns:a16="http://schemas.microsoft.com/office/drawing/2014/main" id="{296EEF9B-853D-F9BE-436C-246B4DF2E639}"/>
-              </a:ext>
-            </a:extLst>
-          </p:cNvPr>
-          <p:cNvSpPr txBox="1"/>
-          <p:nvPr/>
-        </p:nvSpPr>
-        <p:spPr>
-          <a:xfrm>
-            <a:off x="6498180" y="1433121"/>
-            <a:ext cx="347472" cy="369332"/>
-          </a:xfrm>
-          <a:prstGeom prst="rect">
-            <a:avLst/>
-          </a:prstGeom>
-          <a:noFill/>
-        </p:spPr>
-        <p:txBody>
-          <a:bodyPr wrap="square" rtlCol="0">
-            <a:spAutoFit/>
-          </a:bodyPr>
-          <a:lstStyle/>
-          <a:p>
-            <a:r>
-              <a:rPr lang="en-SG" dirty="0"/>
-              <a:t>…</a:t>
-            </a:r>
-          </a:p>
-        </p:txBody>
-      </p:sp>
-      <p:cxnSp>
-        <p:nvCxnSpPr>
-          <p:cNvPr id="16" name="Straight Arrow Connector 15">
-            <a:extLst>
-              <a:ext uri="{FF2B5EF4-FFF2-40B4-BE49-F238E27FC236}">
-                <a16:creationId xmlns:a16="http://schemas.microsoft.com/office/drawing/2014/main" id="{6DB2076E-46A1-59A8-1E54-4E355DC96593}"/>
-              </a:ext>
-            </a:extLst>
-          </p:cNvPr>
-          <p:cNvCxnSpPr>
-            <a:stCxn id="6" idx="2"/>
-          </p:cNvCxnSpPr>
-          <p:nvPr/>
-        </p:nvCxnSpPr>
-        <p:spPr>
-          <a:xfrm flipH="1">
-            <a:off x="5180762" y="1195756"/>
-            <a:ext cx="1" cy="1306286"/>
-          </a:xfrm>
-          <a:prstGeom prst="straightConnector1">
-            <a:avLst/>
-          </a:prstGeom>
-          <a:ln>
-            <a:tailEnd type="triangle"/>
-          </a:ln>
-        </p:spPr>
-        <p:style>
-          <a:lnRef idx="1">
-            <a:schemeClr val="accent1"/>
-          </a:lnRef>
-          <a:fillRef idx="0">
-            <a:schemeClr val="accent1"/>
-          </a:fillRef>
-          <a:effectRef idx="0">
-            <a:schemeClr val="accent1"/>
-          </a:effectRef>
-          <a:fontRef idx="minor">
-            <a:schemeClr val="tx1"/>
-          </a:fontRef>
-        </p:style>
-      </p:cxnSp>
-      <p:cxnSp>
-        <p:nvCxnSpPr>
-          <p:cNvPr id="18" name="Straight Arrow Connector 17">
-            <a:extLst>
-              <a:ext uri="{FF2B5EF4-FFF2-40B4-BE49-F238E27FC236}">
-                <a16:creationId xmlns:a16="http://schemas.microsoft.com/office/drawing/2014/main" id="{A13B95B4-64CF-0B6C-A5D9-D072B3A1457A}"/>
-              </a:ext>
-            </a:extLst>
-          </p:cNvPr>
-          <p:cNvCxnSpPr/>
-          <p:nvPr/>
-        </p:nvCxnSpPr>
-        <p:spPr>
-          <a:xfrm flipH="1">
-            <a:off x="5492678" y="1195756"/>
-            <a:ext cx="772887" cy="1306286"/>
-          </a:xfrm>
-          <a:prstGeom prst="straightConnector1">
-            <a:avLst/>
-          </a:prstGeom>
-          <a:ln>
-            <a:tailEnd type="triangle"/>
-          </a:ln>
-        </p:spPr>
-        <p:style>
-          <a:lnRef idx="1">
-            <a:schemeClr val="accent1"/>
-          </a:lnRef>
-          <a:fillRef idx="0">
-            <a:schemeClr val="accent1"/>
-          </a:fillRef>
-          <a:effectRef idx="0">
-            <a:schemeClr val="accent1"/>
-          </a:effectRef>
-          <a:fontRef idx="minor">
-            <a:schemeClr val="tx1"/>
-          </a:fontRef>
-        </p:style>
-      </p:cxnSp>
-      <p:cxnSp>
-        <p:nvCxnSpPr>
-          <p:cNvPr id="20" name="Straight Arrow Connector 19">
-            <a:extLst>
-              <a:ext uri="{FF2B5EF4-FFF2-40B4-BE49-F238E27FC236}">
-                <a16:creationId xmlns:a16="http://schemas.microsoft.com/office/drawing/2014/main" id="{D7867838-E64E-EA5C-BA62-25C070F28F46}"/>
-              </a:ext>
-            </a:extLst>
-          </p:cNvPr>
-          <p:cNvCxnSpPr>
-            <a:stCxn id="9" idx="2"/>
-          </p:cNvCxnSpPr>
-          <p:nvPr/>
-        </p:nvCxnSpPr>
-        <p:spPr>
-          <a:xfrm flipH="1">
-            <a:off x="5879121" y="1195756"/>
-            <a:ext cx="2152462" cy="1286190"/>
-          </a:xfrm>
-          <a:prstGeom prst="straightConnector1">
-            <a:avLst/>
-          </a:prstGeom>
-          <a:ln>
-            <a:tailEnd type="triangle"/>
-          </a:ln>
-        </p:spPr>
-        <p:style>
-          <a:lnRef idx="1">
-            <a:schemeClr val="accent1"/>
-          </a:lnRef>
-          <a:fillRef idx="0">
-            <a:schemeClr val="accent1"/>
-          </a:fillRef>
-          <a:effectRef idx="0">
-            <a:schemeClr val="accent1"/>
-          </a:effectRef>
-          <a:fontRef idx="minor">
-            <a:schemeClr val="tx1"/>
-          </a:fontRef>
-        </p:style>
-      </p:cxnSp>
-      <p:sp>
-        <p:nvSpPr>
-          <p:cNvPr id="21" name="Rectangle 20">
-            <a:extLst>
-              <a:ext uri="{FF2B5EF4-FFF2-40B4-BE49-F238E27FC236}">
-                <a16:creationId xmlns:a16="http://schemas.microsoft.com/office/drawing/2014/main" id="{D0A637ED-B5A5-B303-A4AE-2A4803520D74}"/>
-              </a:ext>
-            </a:extLst>
-          </p:cNvPr>
-          <p:cNvSpPr/>
-          <p:nvPr/>
-        </p:nvSpPr>
-        <p:spPr>
-          <a:xfrm>
-            <a:off x="4771709" y="2547260"/>
-            <a:ext cx="2032005" cy="316524"/>
-          </a:xfrm>
-          <a:prstGeom prst="rect">
-            <a:avLst/>
-          </a:prstGeom>
-        </p:spPr>
-        <p:style>
-          <a:lnRef idx="2">
-            <a:schemeClr val="accent1">
-              <a:shade val="50000"/>
-            </a:schemeClr>
-          </a:lnRef>
-          <a:fillRef idx="1">
-            <a:schemeClr val="accent1"/>
-          </a:fillRef>
-          <a:effectRef idx="0">
-            <a:schemeClr val="accent1"/>
-          </a:effectRef>
-          <a:fontRef idx="minor">
-            <a:schemeClr val="lt1"/>
-          </a:fontRef>
-        </p:style>
-        <p:txBody>
-          <a:bodyPr rtlCol="0" anchor="ctr"/>
-          <a:lstStyle/>
-          <a:p>
-            <a:pPr algn="ctr"/>
-            <a:r>
-              <a:rPr lang="en-US" sz="1400" dirty="0"/>
-              <a:t>NTP service probe action</a:t>
-            </a:r>
-            <a:endParaRPr lang="en-SG" sz="1400" dirty="0"/>
-          </a:p>
-        </p:txBody>
-      </p:sp>
-      <p:cxnSp>
-        <p:nvCxnSpPr>
-          <p:cNvPr id="23" name="Straight Arrow Connector 22">
-            <a:extLst>
-              <a:ext uri="{FF2B5EF4-FFF2-40B4-BE49-F238E27FC236}">
-                <a16:creationId xmlns:a16="http://schemas.microsoft.com/office/drawing/2014/main" id="{17489C62-C3B7-9328-DFD7-90560C2A4C12}"/>
-              </a:ext>
-            </a:extLst>
-          </p:cNvPr>
-          <p:cNvCxnSpPr/>
-          <p:nvPr/>
-        </p:nvCxnSpPr>
-        <p:spPr>
-          <a:xfrm>
-            <a:off x="4672484" y="1752602"/>
-            <a:ext cx="0" cy="1623646"/>
-          </a:xfrm>
-          <a:prstGeom prst="straightConnector1">
-            <a:avLst/>
-          </a:prstGeom>
-          <a:ln>
-            <a:tailEnd type="triangle"/>
-          </a:ln>
-        </p:spPr>
-        <p:style>
-          <a:lnRef idx="1">
-            <a:schemeClr val="accent1"/>
-          </a:lnRef>
-          <a:fillRef idx="0">
-            <a:schemeClr val="accent1"/>
-          </a:fillRef>
-          <a:effectRef idx="0">
-            <a:schemeClr val="accent1"/>
-          </a:effectRef>
-          <a:fontRef idx="minor">
-            <a:schemeClr val="tx1"/>
-          </a:fontRef>
-        </p:style>
-      </p:cxnSp>
-      <p:cxnSp>
-        <p:nvCxnSpPr>
-          <p:cNvPr id="25" name="Straight Arrow Connector 24">
-            <a:extLst>
-              <a:ext uri="{FF2B5EF4-FFF2-40B4-BE49-F238E27FC236}">
-                <a16:creationId xmlns:a16="http://schemas.microsoft.com/office/drawing/2014/main" id="{6245B563-BE69-8620-A05E-B6260D12991C}"/>
-              </a:ext>
-            </a:extLst>
-          </p:cNvPr>
-          <p:cNvCxnSpPr/>
-          <p:nvPr/>
-        </p:nvCxnSpPr>
-        <p:spPr>
-          <a:xfrm flipH="1">
-            <a:off x="5361634" y="1195756"/>
-            <a:ext cx="903931" cy="2080009"/>
-          </a:xfrm>
-          <a:prstGeom prst="straightConnector1">
-            <a:avLst/>
-          </a:prstGeom>
-          <a:ln>
-            <a:tailEnd type="triangle"/>
-          </a:ln>
-        </p:spPr>
-        <p:style>
-          <a:lnRef idx="1">
-            <a:schemeClr val="accent1"/>
-          </a:lnRef>
-          <a:fillRef idx="0">
-            <a:schemeClr val="accent1"/>
-          </a:fillRef>
-          <a:effectRef idx="0">
-            <a:schemeClr val="accent1"/>
-          </a:effectRef>
-          <a:fontRef idx="minor">
-            <a:schemeClr val="tx1"/>
-          </a:fontRef>
-        </p:style>
-      </p:cxnSp>
-      <p:cxnSp>
-        <p:nvCxnSpPr>
-          <p:cNvPr id="26" name="Straight Arrow Connector 25">
-            <a:extLst>
-              <a:ext uri="{FF2B5EF4-FFF2-40B4-BE49-F238E27FC236}">
-                <a16:creationId xmlns:a16="http://schemas.microsoft.com/office/drawing/2014/main" id="{C7B0F537-2124-BF52-B676-DC0295123C93}"/>
-              </a:ext>
-            </a:extLst>
-          </p:cNvPr>
-          <p:cNvCxnSpPr>
-            <a:cxnSpLocks/>
-          </p:cNvCxnSpPr>
-          <p:nvPr/>
-        </p:nvCxnSpPr>
-        <p:spPr>
-          <a:xfrm flipH="1">
-            <a:off x="6249039" y="1195755"/>
-            <a:ext cx="1814190" cy="2180493"/>
-          </a:xfrm>
-          <a:prstGeom prst="straightConnector1">
-            <a:avLst/>
-          </a:prstGeom>
-          <a:ln>
-            <a:tailEnd type="triangle"/>
-          </a:ln>
-        </p:spPr>
-        <p:style>
-          <a:lnRef idx="1">
-            <a:schemeClr val="accent1"/>
-          </a:lnRef>
-          <a:fillRef idx="0">
-            <a:schemeClr val="accent1"/>
-          </a:fillRef>
-          <a:effectRef idx="0">
-            <a:schemeClr val="accent1"/>
-          </a:effectRef>
-          <a:fontRef idx="minor">
-            <a:schemeClr val="tx1"/>
-          </a:fontRef>
-        </p:style>
-      </p:cxnSp>
-      <p:sp>
-        <p:nvSpPr>
-          <p:cNvPr id="28" name="Rectangle 27">
-            <a:extLst>
-              <a:ext uri="{FF2B5EF4-FFF2-40B4-BE49-F238E27FC236}">
-                <a16:creationId xmlns:a16="http://schemas.microsoft.com/office/drawing/2014/main" id="{7DBFF9A7-A29A-1B98-E506-35E3323417D1}"/>
-              </a:ext>
-            </a:extLst>
-          </p:cNvPr>
-          <p:cNvSpPr/>
-          <p:nvPr/>
-        </p:nvSpPr>
-        <p:spPr>
-          <a:xfrm>
-            <a:off x="4629443" y="3417671"/>
-            <a:ext cx="2344112" cy="316524"/>
-          </a:xfrm>
-          <a:prstGeom prst="rect">
-            <a:avLst/>
-          </a:prstGeom>
-        </p:spPr>
-        <p:style>
-          <a:lnRef idx="2">
-            <a:schemeClr val="accent1">
-              <a:shade val="50000"/>
-            </a:schemeClr>
-          </a:lnRef>
-          <a:fillRef idx="1">
-            <a:schemeClr val="accent1"/>
-          </a:fillRef>
-          <a:effectRef idx="0">
-            <a:schemeClr val="accent1"/>
-          </a:effectRef>
-          <a:fontRef idx="minor">
-            <a:schemeClr val="lt1"/>
-          </a:fontRef>
-        </p:style>
-        <p:txBody>
-          <a:bodyPr rtlCol="0" anchor="ctr"/>
-          <a:lstStyle/>
-          <a:p>
-            <a:pPr algn="ctr"/>
-            <a:r>
-              <a:rPr lang="en-US" sz="1400" dirty="0"/>
-              <a:t>Web service probe action</a:t>
-            </a:r>
-            <a:endParaRPr lang="en-SG" sz="1400" dirty="0"/>
-          </a:p>
-        </p:txBody>
-      </p:sp>
-      <p:sp>
-        <p:nvSpPr>
-          <p:cNvPr id="29" name="TextBox 28">
-            <a:extLst>
-              <a:ext uri="{FF2B5EF4-FFF2-40B4-BE49-F238E27FC236}">
-                <a16:creationId xmlns:a16="http://schemas.microsoft.com/office/drawing/2014/main" id="{79443446-6CE7-9615-6C25-426C6D12BFBE}"/>
-              </a:ext>
-            </a:extLst>
-          </p:cNvPr>
-          <p:cNvSpPr txBox="1"/>
-          <p:nvPr/>
-        </p:nvSpPr>
-        <p:spPr>
-          <a:xfrm>
-            <a:off x="4466171" y="544788"/>
-            <a:ext cx="2724999" cy="276999"/>
-          </a:xfrm>
-          <a:prstGeom prst="rect">
-            <a:avLst/>
-          </a:prstGeom>
-          <a:noFill/>
-        </p:spPr>
-        <p:txBody>
-          <a:bodyPr wrap="square" rtlCol="0">
-            <a:spAutoFit/>
-          </a:bodyPr>
-          <a:lstStyle/>
-          <a:p>
-            <a:r>
-              <a:rPr lang="en-US" sz="1200" b="1" dirty="0"/>
-              <a:t>Network service Probe function repo</a:t>
-            </a:r>
-            <a:endParaRPr lang="en-SG" sz="1200" b="1" dirty="0"/>
-          </a:p>
-        </p:txBody>
-      </p:sp>
-      <p:sp>
-        <p:nvSpPr>
-          <p:cNvPr id="30" name="Rectangle 29">
-            <a:extLst>
-              <a:ext uri="{FF2B5EF4-FFF2-40B4-BE49-F238E27FC236}">
-                <a16:creationId xmlns:a16="http://schemas.microsoft.com/office/drawing/2014/main" id="{436454B0-8729-3820-DD08-CD7D47D2E994}"/>
-              </a:ext>
-            </a:extLst>
-          </p:cNvPr>
-          <p:cNvSpPr/>
-          <p:nvPr/>
-        </p:nvSpPr>
-        <p:spPr>
-          <a:xfrm>
-            <a:off x="8858701" y="594990"/>
-            <a:ext cx="3089065" cy="1306286"/>
-          </a:xfrm>
-          <a:prstGeom prst="rect">
-            <a:avLst/>
-          </a:prstGeom>
-        </p:spPr>
-        <p:style>
-          <a:lnRef idx="2">
-            <a:schemeClr val="accent6"/>
-          </a:lnRef>
-          <a:fillRef idx="1">
-            <a:schemeClr val="lt1"/>
-          </a:fillRef>
-          <a:effectRef idx="0">
-            <a:schemeClr val="accent6"/>
-          </a:effectRef>
-          <a:fontRef idx="minor">
-            <a:schemeClr val="dk1"/>
-          </a:fontRef>
-        </p:style>
-        <p:txBody>
-          <a:bodyPr rtlCol="0" anchor="ctr"/>
-          <a:lstStyle/>
-          <a:p>
-            <a:pPr algn="ctr"/>
-            <a:endParaRPr lang="en-SG"/>
-          </a:p>
-        </p:txBody>
-      </p:sp>
-      <p:sp>
-        <p:nvSpPr>
-          <p:cNvPr id="31" name="TextBox 30">
-            <a:extLst>
-              <a:ext uri="{FF2B5EF4-FFF2-40B4-BE49-F238E27FC236}">
-                <a16:creationId xmlns:a16="http://schemas.microsoft.com/office/drawing/2014/main" id="{D9EB95F3-F6EB-7FFA-A7E1-8B6DCA678B8D}"/>
-              </a:ext>
-            </a:extLst>
-          </p:cNvPr>
-          <p:cNvSpPr txBox="1"/>
-          <p:nvPr/>
-        </p:nvSpPr>
-        <p:spPr>
-          <a:xfrm>
-            <a:off x="8948860" y="544788"/>
-            <a:ext cx="2337544" cy="276999"/>
-          </a:xfrm>
-          <a:prstGeom prst="rect">
-            <a:avLst/>
-          </a:prstGeom>
-          <a:noFill/>
-        </p:spPr>
-        <p:txBody>
-          <a:bodyPr wrap="square" rtlCol="0">
-            <a:spAutoFit/>
-          </a:bodyPr>
-          <a:lstStyle/>
-          <a:p>
-            <a:r>
-              <a:rPr lang="en-US" sz="1200" b="1" dirty="0"/>
-              <a:t>Local service Probe function repo </a:t>
-            </a:r>
-            <a:endParaRPr lang="en-SG" sz="1200" b="1" dirty="0"/>
-          </a:p>
-        </p:txBody>
-      </p:sp>
-      <p:sp>
-        <p:nvSpPr>
-          <p:cNvPr id="32" name="Rectangle 31">
-            <a:extLst>
-              <a:ext uri="{FF2B5EF4-FFF2-40B4-BE49-F238E27FC236}">
-                <a16:creationId xmlns:a16="http://schemas.microsoft.com/office/drawing/2014/main" id="{95C6D793-B671-971F-8930-E16204BFFC1A}"/>
-              </a:ext>
-            </a:extLst>
-          </p:cNvPr>
-          <p:cNvSpPr/>
-          <p:nvPr/>
-        </p:nvSpPr>
-        <p:spPr>
-          <a:xfrm>
-            <a:off x="9121282" y="882359"/>
-            <a:ext cx="571919" cy="316524"/>
-          </a:xfrm>
-          <a:prstGeom prst="rect">
-            <a:avLst/>
-          </a:prstGeom>
-          <a:solidFill>
-            <a:schemeClr val="accent6">
-              <a:lumMod val="75000"/>
-            </a:schemeClr>
-          </a:solidFill>
-        </p:spPr>
-        <p:style>
-          <a:lnRef idx="2">
-            <a:schemeClr val="accent1">
-              <a:shade val="50000"/>
-            </a:schemeClr>
-          </a:lnRef>
-          <a:fillRef idx="1">
-            <a:schemeClr val="accent1"/>
-          </a:fillRef>
-          <a:effectRef idx="0">
-            <a:schemeClr val="accent1"/>
-          </a:effectRef>
-          <a:fontRef idx="minor">
-            <a:schemeClr val="lt1"/>
-          </a:fontRef>
-        </p:style>
-        <p:txBody>
-          <a:bodyPr rtlCol="0" anchor="ctr"/>
-          <a:lstStyle/>
-          <a:p>
-            <a:pPr algn="ctr"/>
-            <a:r>
-              <a:rPr lang="en-US" sz="1400" dirty="0"/>
-              <a:t>CPU</a:t>
-            </a:r>
-            <a:endParaRPr lang="en-SG" sz="1400" dirty="0"/>
-          </a:p>
-        </p:txBody>
-      </p:sp>
-      <p:sp>
-        <p:nvSpPr>
-          <p:cNvPr id="33" name="Rectangle 32">
-            <a:extLst>
-              <a:ext uri="{FF2B5EF4-FFF2-40B4-BE49-F238E27FC236}">
-                <a16:creationId xmlns:a16="http://schemas.microsoft.com/office/drawing/2014/main" id="{F6DF0705-65C1-B8D1-0F5D-D2A2CB265B22}"/>
-              </a:ext>
-            </a:extLst>
-          </p:cNvPr>
-          <p:cNvSpPr/>
-          <p:nvPr/>
-        </p:nvSpPr>
-        <p:spPr>
-          <a:xfrm>
-            <a:off x="9865623" y="882359"/>
-            <a:ext cx="571919" cy="316524"/>
-          </a:xfrm>
-          <a:prstGeom prst="rect">
-            <a:avLst/>
-          </a:prstGeom>
-          <a:solidFill>
-            <a:schemeClr val="accent6">
-              <a:lumMod val="75000"/>
-            </a:schemeClr>
-          </a:solidFill>
-        </p:spPr>
-        <p:style>
-          <a:lnRef idx="2">
-            <a:schemeClr val="accent1">
-              <a:shade val="50000"/>
-            </a:schemeClr>
-          </a:lnRef>
-          <a:fillRef idx="1">
-            <a:schemeClr val="accent1"/>
-          </a:fillRef>
-          <a:effectRef idx="0">
-            <a:schemeClr val="accent1"/>
-          </a:effectRef>
-          <a:fontRef idx="minor">
-            <a:schemeClr val="lt1"/>
-          </a:fontRef>
-        </p:style>
-        <p:txBody>
-          <a:bodyPr rtlCol="0" anchor="ctr"/>
-          <a:lstStyle/>
-          <a:p>
-            <a:pPr algn="ctr"/>
-            <a:r>
-              <a:rPr lang="en-US" sz="1400" dirty="0"/>
-              <a:t>RAM</a:t>
-            </a:r>
-            <a:endParaRPr lang="en-SG" sz="1400" dirty="0"/>
-          </a:p>
-        </p:txBody>
-      </p:sp>
-      <p:sp>
-        <p:nvSpPr>
-          <p:cNvPr id="34" name="Rectangle 33">
-            <a:extLst>
-              <a:ext uri="{FF2B5EF4-FFF2-40B4-BE49-F238E27FC236}">
-                <a16:creationId xmlns:a16="http://schemas.microsoft.com/office/drawing/2014/main" id="{6D169258-68CD-5701-E244-2D790A33513C}"/>
-              </a:ext>
-            </a:extLst>
-          </p:cNvPr>
-          <p:cNvSpPr/>
-          <p:nvPr/>
-        </p:nvSpPr>
-        <p:spPr>
-          <a:xfrm>
-            <a:off x="10583312" y="875630"/>
-            <a:ext cx="571919" cy="316524"/>
-          </a:xfrm>
-          <a:prstGeom prst="rect">
-            <a:avLst/>
-          </a:prstGeom>
-          <a:solidFill>
-            <a:schemeClr val="accent6">
-              <a:lumMod val="75000"/>
-            </a:schemeClr>
-          </a:solidFill>
-        </p:spPr>
-        <p:style>
-          <a:lnRef idx="2">
-            <a:schemeClr val="accent1">
-              <a:shade val="50000"/>
-            </a:schemeClr>
-          </a:lnRef>
-          <a:fillRef idx="1">
-            <a:schemeClr val="accent1"/>
-          </a:fillRef>
-          <a:effectRef idx="0">
-            <a:schemeClr val="accent1"/>
-          </a:effectRef>
-          <a:fontRef idx="minor">
-            <a:schemeClr val="lt1"/>
-          </a:fontRef>
-        </p:style>
-        <p:txBody>
-          <a:bodyPr rtlCol="0" anchor="ctr"/>
-          <a:lstStyle/>
-          <a:p>
-            <a:pPr algn="ctr"/>
-            <a:r>
-              <a:rPr lang="en-US" sz="1400" dirty="0"/>
-              <a:t>File</a:t>
-            </a:r>
-            <a:endParaRPr lang="en-SG" sz="1400" dirty="0"/>
-          </a:p>
-        </p:txBody>
-      </p:sp>
-      <p:sp>
-        <p:nvSpPr>
-          <p:cNvPr id="35" name="Rectangle 34">
-            <a:extLst>
-              <a:ext uri="{FF2B5EF4-FFF2-40B4-BE49-F238E27FC236}">
-                <a16:creationId xmlns:a16="http://schemas.microsoft.com/office/drawing/2014/main" id="{6063466B-0AAF-B8B7-79F6-3482841443C1}"/>
-              </a:ext>
-            </a:extLst>
-          </p:cNvPr>
-          <p:cNvSpPr/>
-          <p:nvPr/>
-        </p:nvSpPr>
-        <p:spPr>
-          <a:xfrm>
-            <a:off x="11286404" y="882359"/>
-            <a:ext cx="571919" cy="316524"/>
-          </a:xfrm>
-          <a:prstGeom prst="rect">
-            <a:avLst/>
-          </a:prstGeom>
-          <a:solidFill>
-            <a:schemeClr val="accent6">
-              <a:lumMod val="75000"/>
-            </a:schemeClr>
-          </a:solidFill>
-        </p:spPr>
-        <p:style>
-          <a:lnRef idx="2">
-            <a:schemeClr val="accent1">
-              <a:shade val="50000"/>
-            </a:schemeClr>
-          </a:lnRef>
-          <a:fillRef idx="1">
-            <a:schemeClr val="accent1"/>
-          </a:fillRef>
-          <a:effectRef idx="0">
-            <a:schemeClr val="accent1"/>
-          </a:effectRef>
-          <a:fontRef idx="minor">
-            <a:schemeClr val="lt1"/>
-          </a:fontRef>
-        </p:style>
-        <p:txBody>
-          <a:bodyPr rtlCol="0" anchor="ctr"/>
-          <a:lstStyle/>
-          <a:p>
-            <a:pPr algn="ctr"/>
-            <a:r>
-              <a:rPr lang="en-US" sz="1400" dirty="0"/>
-              <a:t>File</a:t>
-            </a:r>
-            <a:endParaRPr lang="en-SG" sz="1400" dirty="0"/>
-          </a:p>
-        </p:txBody>
-      </p:sp>
-      <p:sp>
-        <p:nvSpPr>
-          <p:cNvPr id="36" name="Rectangle 35">
-            <a:extLst>
-              <a:ext uri="{FF2B5EF4-FFF2-40B4-BE49-F238E27FC236}">
-                <a16:creationId xmlns:a16="http://schemas.microsoft.com/office/drawing/2014/main" id="{BBEC0305-742E-5E92-5B60-64D33EBE8CA7}"/>
-              </a:ext>
-            </a:extLst>
-          </p:cNvPr>
-          <p:cNvSpPr/>
-          <p:nvPr/>
-        </p:nvSpPr>
-        <p:spPr>
-          <a:xfrm>
-            <a:off x="9051827" y="1380702"/>
-            <a:ext cx="896785" cy="316524"/>
-          </a:xfrm>
-          <a:prstGeom prst="rect">
-            <a:avLst/>
-          </a:prstGeom>
-          <a:solidFill>
-            <a:schemeClr val="accent6">
-              <a:lumMod val="75000"/>
-            </a:schemeClr>
-          </a:solidFill>
-        </p:spPr>
-        <p:style>
-          <a:lnRef idx="2">
-            <a:schemeClr val="accent1">
-              <a:shade val="50000"/>
-            </a:schemeClr>
-          </a:lnRef>
-          <a:fillRef idx="1">
-            <a:schemeClr val="accent1"/>
-          </a:fillRef>
-          <a:effectRef idx="0">
-            <a:schemeClr val="accent1"/>
-          </a:effectRef>
-          <a:fontRef idx="minor">
-            <a:schemeClr val="lt1"/>
-          </a:fontRef>
-        </p:style>
-        <p:txBody>
-          <a:bodyPr rtlCol="0" anchor="ctr"/>
-          <a:lstStyle/>
-          <a:p>
-            <a:pPr algn="ctr"/>
-            <a:r>
-              <a:rPr lang="en-US" sz="1400" dirty="0"/>
-              <a:t>Processes </a:t>
-            </a:r>
-            <a:endParaRPr lang="en-SG" sz="1400" dirty="0"/>
-          </a:p>
-        </p:txBody>
-      </p:sp>
-      <p:sp>
-        <p:nvSpPr>
-          <p:cNvPr id="37" name="Rectangle 36">
-            <a:extLst>
-              <a:ext uri="{FF2B5EF4-FFF2-40B4-BE49-F238E27FC236}">
-                <a16:creationId xmlns:a16="http://schemas.microsoft.com/office/drawing/2014/main" id="{191B9AD0-4DAD-904E-7250-F7919C29401A}"/>
-              </a:ext>
-            </a:extLst>
-          </p:cNvPr>
-          <p:cNvSpPr/>
-          <p:nvPr/>
-        </p:nvSpPr>
-        <p:spPr>
-          <a:xfrm>
-            <a:off x="10110431" y="1380702"/>
-            <a:ext cx="673637" cy="316524"/>
-          </a:xfrm>
-          <a:prstGeom prst="rect">
-            <a:avLst/>
-          </a:prstGeom>
-          <a:solidFill>
-            <a:schemeClr val="accent6">
-              <a:lumMod val="75000"/>
-            </a:schemeClr>
-          </a:solidFill>
-        </p:spPr>
-        <p:style>
-          <a:lnRef idx="2">
-            <a:schemeClr val="accent1">
-              <a:shade val="50000"/>
-            </a:schemeClr>
-          </a:lnRef>
-          <a:fillRef idx="1">
-            <a:schemeClr val="accent1"/>
-          </a:fillRef>
-          <a:effectRef idx="0">
-            <a:schemeClr val="accent1"/>
-          </a:effectRef>
-          <a:fontRef idx="minor">
-            <a:schemeClr val="lt1"/>
-          </a:fontRef>
-        </p:style>
-        <p:txBody>
-          <a:bodyPr rtlCol="0" anchor="ctr"/>
-          <a:lstStyle/>
-          <a:p>
-            <a:pPr algn="ctr"/>
-            <a:r>
-              <a:rPr lang="en-US" sz="1400" dirty="0"/>
-              <a:t>User  </a:t>
-            </a:r>
-            <a:endParaRPr lang="en-SG" sz="1400" dirty="0"/>
-          </a:p>
-        </p:txBody>
-      </p:sp>
-      <p:sp>
-        <p:nvSpPr>
-          <p:cNvPr id="38" name="Rectangle 37">
-            <a:extLst>
-              <a:ext uri="{FF2B5EF4-FFF2-40B4-BE49-F238E27FC236}">
-                <a16:creationId xmlns:a16="http://schemas.microsoft.com/office/drawing/2014/main" id="{603CAD76-F6C0-D0A8-1852-1FBD636387D6}"/>
-              </a:ext>
-            </a:extLst>
-          </p:cNvPr>
-          <p:cNvSpPr/>
-          <p:nvPr/>
-        </p:nvSpPr>
-        <p:spPr>
-          <a:xfrm>
-            <a:off x="10993184" y="1380702"/>
-            <a:ext cx="851753" cy="339354"/>
-          </a:xfrm>
-          <a:prstGeom prst="rect">
-            <a:avLst/>
-          </a:prstGeom>
-          <a:solidFill>
-            <a:schemeClr val="accent6">
-              <a:lumMod val="75000"/>
-            </a:schemeClr>
-          </a:solidFill>
-        </p:spPr>
-        <p:style>
-          <a:lnRef idx="2">
-            <a:schemeClr val="accent1">
-              <a:shade val="50000"/>
-            </a:schemeClr>
-          </a:lnRef>
-          <a:fillRef idx="1">
-            <a:schemeClr val="accent1"/>
-          </a:fillRef>
-          <a:effectRef idx="0">
-            <a:schemeClr val="accent1"/>
-          </a:effectRef>
-          <a:fontRef idx="minor">
-            <a:schemeClr val="lt1"/>
-          </a:fontRef>
-        </p:style>
-        <p:txBody>
-          <a:bodyPr rtlCol="0" anchor="ctr"/>
-          <a:lstStyle/>
-          <a:p>
-            <a:pPr algn="ctr"/>
-            <a:r>
-              <a:rPr lang="en-US" sz="1400" dirty="0"/>
-              <a:t>System time   </a:t>
-            </a:r>
-            <a:endParaRPr lang="en-SG" sz="1400" dirty="0"/>
-          </a:p>
-        </p:txBody>
-      </p:sp>
-      <p:sp>
-        <p:nvSpPr>
-          <p:cNvPr id="40" name="TextBox 39">
-            <a:extLst>
-              <a:ext uri="{FF2B5EF4-FFF2-40B4-BE49-F238E27FC236}">
-                <a16:creationId xmlns:a16="http://schemas.microsoft.com/office/drawing/2014/main" id="{2CC3D678-E612-52D0-415E-B18622FF1207}"/>
-              </a:ext>
-            </a:extLst>
-          </p:cNvPr>
-          <p:cNvSpPr txBox="1"/>
-          <p:nvPr/>
-        </p:nvSpPr>
-        <p:spPr>
-          <a:xfrm>
-            <a:off x="5534866" y="3588939"/>
-            <a:ext cx="347472" cy="369332"/>
-          </a:xfrm>
-          <a:prstGeom prst="rect">
-            <a:avLst/>
-          </a:prstGeom>
-          <a:noFill/>
-        </p:spPr>
-        <p:txBody>
-          <a:bodyPr wrap="square" rtlCol="0">
-            <a:spAutoFit/>
-          </a:bodyPr>
-          <a:lstStyle/>
-          <a:p>
-            <a:r>
-              <a:rPr lang="en-SG" dirty="0"/>
-              <a:t>…</a:t>
-            </a:r>
-          </a:p>
-        </p:txBody>
-      </p:sp>
-      <p:sp>
-        <p:nvSpPr>
-          <p:cNvPr id="41" name="Rectangle 40">
-            <a:extLst>
-              <a:ext uri="{FF2B5EF4-FFF2-40B4-BE49-F238E27FC236}">
-                <a16:creationId xmlns:a16="http://schemas.microsoft.com/office/drawing/2014/main" id="{2BCBEA27-944D-1CEE-722A-CA3F2CB3C34D}"/>
-              </a:ext>
-            </a:extLst>
-          </p:cNvPr>
-          <p:cNvSpPr/>
-          <p:nvPr/>
-        </p:nvSpPr>
-        <p:spPr>
-          <a:xfrm>
-            <a:off x="4641543" y="4131214"/>
-            <a:ext cx="2344112" cy="316524"/>
-          </a:xfrm>
-          <a:prstGeom prst="rect">
-            <a:avLst/>
-          </a:prstGeom>
-        </p:spPr>
-        <p:style>
-          <a:lnRef idx="2">
-            <a:schemeClr val="accent1">
-              <a:shade val="50000"/>
-            </a:schemeClr>
-          </a:lnRef>
-          <a:fillRef idx="1">
-            <a:schemeClr val="accent1"/>
-          </a:fillRef>
-          <a:effectRef idx="0">
-            <a:schemeClr val="accent1"/>
-          </a:effectRef>
-          <a:fontRef idx="minor">
-            <a:schemeClr val="lt1"/>
-          </a:fontRef>
-        </p:style>
-        <p:txBody>
-          <a:bodyPr rtlCol="0" anchor="ctr"/>
-          <a:lstStyle/>
-          <a:p>
-            <a:pPr algn="ctr"/>
-            <a:r>
-              <a:rPr lang="en-US" sz="1400" dirty="0"/>
-              <a:t>Email service probe action</a:t>
-            </a:r>
-            <a:endParaRPr lang="en-SG" sz="1400" dirty="0"/>
-          </a:p>
-        </p:txBody>
-      </p:sp>
-      <p:sp>
-        <p:nvSpPr>
-          <p:cNvPr id="42" name="Rectangle 41">
-            <a:extLst>
-              <a:ext uri="{FF2B5EF4-FFF2-40B4-BE49-F238E27FC236}">
-                <a16:creationId xmlns:a16="http://schemas.microsoft.com/office/drawing/2014/main" id="{DDD5E9F4-D16D-B33A-DD26-E2E00B854C00}"/>
-              </a:ext>
-            </a:extLst>
-          </p:cNvPr>
-          <p:cNvSpPr/>
-          <p:nvPr/>
-        </p:nvSpPr>
-        <p:spPr>
-          <a:xfrm>
-            <a:off x="7622312" y="1421233"/>
-            <a:ext cx="788389" cy="316524"/>
-          </a:xfrm>
-          <a:prstGeom prst="rect">
-            <a:avLst/>
-          </a:prstGeom>
-          <a:solidFill>
-            <a:schemeClr val="accent6">
-              <a:lumMod val="75000"/>
-            </a:schemeClr>
-          </a:solidFill>
-        </p:spPr>
-        <p:style>
-          <a:lnRef idx="2">
-            <a:schemeClr val="accent1">
-              <a:shade val="50000"/>
-            </a:schemeClr>
-          </a:lnRef>
-          <a:fillRef idx="1">
-            <a:schemeClr val="accent1"/>
-          </a:fillRef>
-          <a:effectRef idx="0">
-            <a:schemeClr val="accent1"/>
-          </a:effectRef>
-          <a:fontRef idx="minor">
-            <a:schemeClr val="lt1"/>
-          </a:fontRef>
-        </p:style>
-        <p:txBody>
-          <a:bodyPr rtlCol="0" anchor="ctr"/>
-          <a:lstStyle/>
-          <a:p>
-            <a:pPr algn="ctr"/>
-            <a:r>
-              <a:rPr lang="en-US" sz="1400" dirty="0"/>
-              <a:t>SMTP</a:t>
-            </a:r>
-            <a:endParaRPr lang="en-SG" sz="1400" dirty="0"/>
-          </a:p>
-        </p:txBody>
-      </p:sp>
-      <p:cxnSp>
-        <p:nvCxnSpPr>
-          <p:cNvPr id="45" name="Straight Arrow Connector 44">
-            <a:extLst>
-              <a:ext uri="{FF2B5EF4-FFF2-40B4-BE49-F238E27FC236}">
-                <a16:creationId xmlns:a16="http://schemas.microsoft.com/office/drawing/2014/main" id="{FB0A7C23-87DA-69A4-694F-581C7BA06FF0}"/>
-              </a:ext>
-            </a:extLst>
-          </p:cNvPr>
-          <p:cNvCxnSpPr/>
-          <p:nvPr/>
-        </p:nvCxnSpPr>
-        <p:spPr>
-          <a:xfrm flipH="1">
-            <a:off x="6803714" y="1752602"/>
-            <a:ext cx="1227869" cy="2378612"/>
-          </a:xfrm>
-          <a:prstGeom prst="straightConnector1">
-            <a:avLst/>
-          </a:prstGeom>
-          <a:ln>
-            <a:tailEnd type="triangle"/>
-          </a:ln>
-        </p:spPr>
-        <p:style>
-          <a:lnRef idx="1">
-            <a:schemeClr val="accent1"/>
-          </a:lnRef>
-          <a:fillRef idx="0">
-            <a:schemeClr val="accent1"/>
-          </a:fillRef>
-          <a:effectRef idx="0">
-            <a:schemeClr val="accent1"/>
-          </a:effectRef>
-          <a:fontRef idx="minor">
-            <a:schemeClr val="tx1"/>
-          </a:fontRef>
-        </p:style>
-      </p:cxnSp>
-      <p:cxnSp>
-        <p:nvCxnSpPr>
-          <p:cNvPr id="46" name="Straight Arrow Connector 45">
-            <a:extLst>
-              <a:ext uri="{FF2B5EF4-FFF2-40B4-BE49-F238E27FC236}">
-                <a16:creationId xmlns:a16="http://schemas.microsoft.com/office/drawing/2014/main" id="{B3C986BD-54AB-D32D-BBB9-BE89EA7C9215}"/>
-              </a:ext>
-            </a:extLst>
-          </p:cNvPr>
-          <p:cNvCxnSpPr>
-            <a:cxnSpLocks/>
-            <a:stCxn id="13" idx="2"/>
-          </p:cNvCxnSpPr>
-          <p:nvPr/>
-        </p:nvCxnSpPr>
-        <p:spPr>
-          <a:xfrm flipH="1">
-            <a:off x="6597578" y="1728331"/>
-            <a:ext cx="534034" cy="2378612"/>
-          </a:xfrm>
-          <a:prstGeom prst="straightConnector1">
-            <a:avLst/>
-          </a:prstGeom>
-          <a:ln>
-            <a:tailEnd type="triangle"/>
-          </a:ln>
-        </p:spPr>
-        <p:style>
-          <a:lnRef idx="1">
-            <a:schemeClr val="accent1"/>
-          </a:lnRef>
-          <a:fillRef idx="0">
-            <a:schemeClr val="accent1"/>
-          </a:fillRef>
-          <a:effectRef idx="0">
-            <a:schemeClr val="accent1"/>
-          </a:effectRef>
-          <a:fontRef idx="minor">
-            <a:schemeClr val="tx1"/>
-          </a:fontRef>
-        </p:style>
-      </p:cxnSp>
-      <p:cxnSp>
-        <p:nvCxnSpPr>
-          <p:cNvPr id="49" name="Straight Arrow Connector 48">
-            <a:extLst>
-              <a:ext uri="{FF2B5EF4-FFF2-40B4-BE49-F238E27FC236}">
-                <a16:creationId xmlns:a16="http://schemas.microsoft.com/office/drawing/2014/main" id="{5E7B1DB6-B03F-286E-D611-59D75808F434}"/>
-              </a:ext>
-            </a:extLst>
-          </p:cNvPr>
-          <p:cNvCxnSpPr>
-            <a:cxnSpLocks/>
-            <a:stCxn id="12" idx="2"/>
-          </p:cNvCxnSpPr>
-          <p:nvPr/>
-        </p:nvCxnSpPr>
-        <p:spPr>
-          <a:xfrm flipH="1">
-            <a:off x="5833448" y="1752602"/>
-            <a:ext cx="146158" cy="2354341"/>
-          </a:xfrm>
-          <a:prstGeom prst="straightConnector1">
-            <a:avLst/>
-          </a:prstGeom>
-          <a:ln>
-            <a:tailEnd type="triangle"/>
-          </a:ln>
-        </p:spPr>
-        <p:style>
-          <a:lnRef idx="1">
-            <a:schemeClr val="accent1"/>
-          </a:lnRef>
-          <a:fillRef idx="0">
-            <a:schemeClr val="accent1"/>
-          </a:fillRef>
-          <a:effectRef idx="0">
-            <a:schemeClr val="accent1"/>
-          </a:effectRef>
-          <a:fontRef idx="minor">
-            <a:schemeClr val="tx1"/>
-          </a:fontRef>
-        </p:style>
-      </p:cxnSp>
-      <p:sp>
-        <p:nvSpPr>
-          <p:cNvPr id="52" name="TextBox 51">
-            <a:extLst>
-              <a:ext uri="{FF2B5EF4-FFF2-40B4-BE49-F238E27FC236}">
-                <a16:creationId xmlns:a16="http://schemas.microsoft.com/office/drawing/2014/main" id="{3678D1AD-6AC1-13F6-A87C-4F7B780E370D}"/>
-              </a:ext>
-            </a:extLst>
-          </p:cNvPr>
-          <p:cNvSpPr txBox="1"/>
-          <p:nvPr/>
-        </p:nvSpPr>
-        <p:spPr>
-          <a:xfrm>
-            <a:off x="3244571" y="2967990"/>
-            <a:ext cx="908957" cy="307777"/>
-          </a:xfrm>
-          <a:prstGeom prst="rect">
-            <a:avLst/>
-          </a:prstGeom>
-          <a:noFill/>
-          <a:ln>
-            <a:solidFill>
-              <a:schemeClr val="tx1"/>
-            </a:solidFill>
-          </a:ln>
-        </p:spPr>
-        <p:txBody>
-          <a:bodyPr wrap="square" rtlCol="0">
-            <a:spAutoFit/>
-          </a:bodyPr>
-          <a:lstStyle/>
-          <a:p>
-            <a:r>
-              <a:rPr lang="en-US" sz="1400" dirty="0"/>
-              <a:t>Target IP</a:t>
-            </a:r>
-            <a:endParaRPr lang="en-SG" sz="1400" dirty="0"/>
-          </a:p>
-        </p:txBody>
-      </p:sp>
-      <p:sp>
-        <p:nvSpPr>
-          <p:cNvPr id="53" name="TextBox 52">
-            <a:extLst>
-              <a:ext uri="{FF2B5EF4-FFF2-40B4-BE49-F238E27FC236}">
-                <a16:creationId xmlns:a16="http://schemas.microsoft.com/office/drawing/2014/main" id="{F9E899E3-2B5E-ECE0-D37C-D0649296BFE2}"/>
-              </a:ext>
-            </a:extLst>
-          </p:cNvPr>
-          <p:cNvSpPr txBox="1"/>
-          <p:nvPr/>
-        </p:nvSpPr>
-        <p:spPr>
-          <a:xfrm>
-            <a:off x="3218951" y="3435051"/>
-            <a:ext cx="1247219" cy="523220"/>
-          </a:xfrm>
-          <a:prstGeom prst="rect">
-            <a:avLst/>
-          </a:prstGeom>
-          <a:noFill/>
-          <a:ln>
-            <a:solidFill>
-              <a:schemeClr val="tx1"/>
-            </a:solidFill>
-          </a:ln>
-        </p:spPr>
-        <p:txBody>
-          <a:bodyPr wrap="square" rtlCol="0">
-            <a:spAutoFit/>
-          </a:bodyPr>
-          <a:lstStyle/>
-          <a:p>
-            <a:r>
-              <a:rPr lang="en-US" sz="1400" dirty="0"/>
-              <a:t>Prober config profile</a:t>
-            </a:r>
-            <a:endParaRPr lang="en-SG" sz="1400" dirty="0"/>
-          </a:p>
-        </p:txBody>
-      </p:sp>
-      <p:sp>
-        <p:nvSpPr>
-          <p:cNvPr id="54" name="TextBox 53">
-            <a:extLst>
-              <a:ext uri="{FF2B5EF4-FFF2-40B4-BE49-F238E27FC236}">
-                <a16:creationId xmlns:a16="http://schemas.microsoft.com/office/drawing/2014/main" id="{7AD9E224-6DF1-A01C-E9AF-10D675DAC6FE}"/>
-              </a:ext>
-            </a:extLst>
-          </p:cNvPr>
-          <p:cNvSpPr txBox="1"/>
-          <p:nvPr/>
-        </p:nvSpPr>
-        <p:spPr>
-          <a:xfrm>
-            <a:off x="3088533" y="2235760"/>
-            <a:ext cx="978483" cy="523220"/>
-          </a:xfrm>
-          <a:prstGeom prst="rect">
-            <a:avLst/>
-          </a:prstGeom>
-          <a:noFill/>
-        </p:spPr>
-        <p:txBody>
-          <a:bodyPr wrap="square" rtlCol="0">
-            <a:spAutoFit/>
-          </a:bodyPr>
-          <a:lstStyle/>
-          <a:p>
-            <a:r>
-              <a:rPr lang="en-US" sz="1400" b="1" dirty="0"/>
-              <a:t>Network Prober</a:t>
-            </a:r>
-            <a:r>
-              <a:rPr lang="en-US" sz="1400" dirty="0"/>
+            <a:pPr marL="285750" indent="-285750" algn="just">
+              <a:lnSpc>
+                <a:spcPct val="150000"/>
+              </a:lnSpc>
+              <a:buFont typeface="Arial" panose="020B0604020202020204" pitchFamily="34" charset="0"/>
+              <a:buChar char="•"/>
+            </a:pPr>
+            <a:r>
+              <a:rPr lang="en-US" sz="1600" b="1" dirty="0"/>
+              <a:t>Used by the </a:t>
+            </a:r>
+            <a:r>
+              <a:rPr lang="en-US" sz="1600" b="1" dirty="0">
+                <a:solidFill>
+                  <a:schemeClr val="bg1"/>
+                </a:solidFill>
+                <a:highlight>
+                  <a:srgbClr val="000000"/>
+                </a:highlight>
+              </a:rPr>
+              <a:t>Black/Judgment-Team</a:t>
+            </a:r>
+            <a:r>
+              <a:rPr lang="en-US" sz="1600" b="1" dirty="0">
+                <a:solidFill>
+                  <a:schemeClr val="bg1"/>
+                </a:solidFill>
+              </a:rPr>
               <a:t> </a:t>
             </a:r>
-            <a:endParaRPr lang="en-SG" sz="1400" dirty="0"/>
-          </a:p>
-        </p:txBody>
-      </p:sp>
-      <p:sp>
-        <p:nvSpPr>
-          <p:cNvPr id="55" name="Arrow: Right 54">
-            <a:extLst>
-              <a:ext uri="{FF2B5EF4-FFF2-40B4-BE49-F238E27FC236}">
-                <a16:creationId xmlns:a16="http://schemas.microsoft.com/office/drawing/2014/main" id="{52FE5EA9-8A51-A854-F11F-8BEFB98E2672}"/>
-              </a:ext>
-            </a:extLst>
-          </p:cNvPr>
-          <p:cNvSpPr/>
-          <p:nvPr/>
-        </p:nvSpPr>
-        <p:spPr>
-          <a:xfrm>
-            <a:off x="7496080" y="3275765"/>
-            <a:ext cx="2222390" cy="159286"/>
-          </a:xfrm>
-          <a:prstGeom prst="rightArrow">
-            <a:avLst/>
-          </a:prstGeom>
-        </p:spPr>
-        <p:style>
-          <a:lnRef idx="2">
-            <a:schemeClr val="accent1">
-              <a:shade val="50000"/>
-            </a:schemeClr>
-          </a:lnRef>
-          <a:fillRef idx="1">
-            <a:schemeClr val="accent1"/>
-          </a:fillRef>
-          <a:effectRef idx="0">
-            <a:schemeClr val="accent1"/>
-          </a:effectRef>
-          <a:fontRef idx="minor">
-            <a:schemeClr val="lt1"/>
-          </a:fontRef>
-        </p:style>
-        <p:txBody>
-          <a:bodyPr rtlCol="0" anchor="ctr"/>
-          <a:lstStyle/>
-          <a:p>
-            <a:pPr algn="ctr"/>
-            <a:endParaRPr lang="en-SG"/>
-          </a:p>
-        </p:txBody>
-      </p:sp>
-      <p:sp>
-        <p:nvSpPr>
-          <p:cNvPr id="56" name="Rectangle 55">
-            <a:extLst>
-              <a:ext uri="{FF2B5EF4-FFF2-40B4-BE49-F238E27FC236}">
-                <a16:creationId xmlns:a16="http://schemas.microsoft.com/office/drawing/2014/main" id="{9F2E183C-4E34-F5B7-6A40-A8F41421FF0B}"/>
-              </a:ext>
-            </a:extLst>
-          </p:cNvPr>
-          <p:cNvSpPr/>
-          <p:nvPr/>
-        </p:nvSpPr>
-        <p:spPr>
-          <a:xfrm>
-            <a:off x="3088533" y="4944662"/>
-            <a:ext cx="4365578" cy="354118"/>
-          </a:xfrm>
-          <a:prstGeom prst="rect">
-            <a:avLst/>
-          </a:prstGeom>
-          <a:ln w="28575">
-            <a:solidFill>
-              <a:srgbClr val="0070C0"/>
-            </a:solidFill>
-            <a:prstDash val="sysDot"/>
-          </a:ln>
-        </p:spPr>
-        <p:style>
-          <a:lnRef idx="2">
-            <a:schemeClr val="accent6"/>
-          </a:lnRef>
-          <a:fillRef idx="1">
-            <a:schemeClr val="lt1"/>
-          </a:fillRef>
-          <a:effectRef idx="0">
-            <a:schemeClr val="accent6"/>
-          </a:effectRef>
-          <a:fontRef idx="minor">
-            <a:schemeClr val="dk1"/>
-          </a:fontRef>
-        </p:style>
-        <p:txBody>
-          <a:bodyPr rtlCol="0" anchor="ctr"/>
-          <a:lstStyle/>
-          <a:p>
-            <a:pPr algn="ctr"/>
-            <a:endParaRPr lang="en-SG" dirty="0"/>
-          </a:p>
-        </p:txBody>
-      </p:sp>
-      <p:sp>
-        <p:nvSpPr>
-          <p:cNvPr id="57" name="TextBox 56">
-            <a:extLst>
-              <a:ext uri="{FF2B5EF4-FFF2-40B4-BE49-F238E27FC236}">
-                <a16:creationId xmlns:a16="http://schemas.microsoft.com/office/drawing/2014/main" id="{076871B3-1338-5771-2EF5-D23BCA2372C1}"/>
-              </a:ext>
-            </a:extLst>
-          </p:cNvPr>
-          <p:cNvSpPr txBox="1"/>
-          <p:nvPr/>
-        </p:nvSpPr>
-        <p:spPr>
-          <a:xfrm>
-            <a:off x="5187394" y="4525944"/>
-            <a:ext cx="347472" cy="369332"/>
-          </a:xfrm>
-          <a:prstGeom prst="rect">
-            <a:avLst/>
-          </a:prstGeom>
-          <a:noFill/>
-        </p:spPr>
-        <p:txBody>
-          <a:bodyPr wrap="square" rtlCol="0">
-            <a:spAutoFit/>
-          </a:bodyPr>
-          <a:lstStyle/>
-          <a:p>
-            <a:r>
-              <a:rPr lang="en-SG" dirty="0"/>
-              <a:t>…</a:t>
-            </a:r>
-          </a:p>
-        </p:txBody>
-      </p:sp>
-      <p:sp>
-        <p:nvSpPr>
-          <p:cNvPr id="58" name="TextBox 57">
-            <a:extLst>
-              <a:ext uri="{FF2B5EF4-FFF2-40B4-BE49-F238E27FC236}">
-                <a16:creationId xmlns:a16="http://schemas.microsoft.com/office/drawing/2014/main" id="{0B7CC534-6C0B-F50A-AEE5-F81E952E95D5}"/>
-              </a:ext>
-            </a:extLst>
-          </p:cNvPr>
-          <p:cNvSpPr txBox="1"/>
-          <p:nvPr/>
-        </p:nvSpPr>
-        <p:spPr>
-          <a:xfrm>
-            <a:off x="3091446" y="4952444"/>
-            <a:ext cx="1771956" cy="307777"/>
-          </a:xfrm>
-          <a:prstGeom prst="rect">
-            <a:avLst/>
-          </a:prstGeom>
-          <a:noFill/>
-        </p:spPr>
-        <p:txBody>
-          <a:bodyPr wrap="square" rtlCol="0">
-            <a:spAutoFit/>
-          </a:bodyPr>
-          <a:lstStyle/>
-          <a:p>
-            <a:r>
-              <a:rPr lang="en-US" sz="1400" b="1" dirty="0"/>
-              <a:t>Network Probers</a:t>
-            </a:r>
-            <a:r>
-              <a:rPr lang="en-US" sz="1400" dirty="0"/>
-              <a:t> </a:t>
-            </a:r>
-            <a:endParaRPr lang="en-SG" sz="1400" dirty="0"/>
-          </a:p>
-        </p:txBody>
-      </p:sp>
-      <p:sp>
-        <p:nvSpPr>
-          <p:cNvPr id="59" name="Arrow: Right 58">
-            <a:extLst>
-              <a:ext uri="{FF2B5EF4-FFF2-40B4-BE49-F238E27FC236}">
-                <a16:creationId xmlns:a16="http://schemas.microsoft.com/office/drawing/2014/main" id="{E06BCA21-745E-A088-AEA0-26EAB835CC68}"/>
-              </a:ext>
-            </a:extLst>
-          </p:cNvPr>
-          <p:cNvSpPr/>
-          <p:nvPr/>
-        </p:nvSpPr>
-        <p:spPr>
-          <a:xfrm>
-            <a:off x="7517923" y="5019154"/>
-            <a:ext cx="2200547" cy="159286"/>
-          </a:xfrm>
-          <a:prstGeom prst="rightArrow">
-            <a:avLst/>
-          </a:prstGeom>
-        </p:spPr>
-        <p:style>
-          <a:lnRef idx="2">
-            <a:schemeClr val="accent1">
-              <a:shade val="50000"/>
-            </a:schemeClr>
-          </a:lnRef>
-          <a:fillRef idx="1">
-            <a:schemeClr val="accent1"/>
-          </a:fillRef>
-          <a:effectRef idx="0">
-            <a:schemeClr val="accent1"/>
-          </a:effectRef>
-          <a:fontRef idx="minor">
-            <a:schemeClr val="lt1"/>
-          </a:fontRef>
-        </p:style>
-        <p:txBody>
-          <a:bodyPr rtlCol="0" anchor="ctr"/>
-          <a:lstStyle/>
-          <a:p>
-            <a:pPr algn="ctr"/>
-            <a:endParaRPr lang="en-SG"/>
-          </a:p>
-        </p:txBody>
-      </p:sp>
-      <p:sp>
-        <p:nvSpPr>
-          <p:cNvPr id="60" name="Arrow: Right 59">
-            <a:extLst>
-              <a:ext uri="{FF2B5EF4-FFF2-40B4-BE49-F238E27FC236}">
-                <a16:creationId xmlns:a16="http://schemas.microsoft.com/office/drawing/2014/main" id="{BECD5DD0-2D31-F6E3-1063-4C9EE0A07792}"/>
-              </a:ext>
-            </a:extLst>
-          </p:cNvPr>
-          <p:cNvSpPr/>
-          <p:nvPr/>
-        </p:nvSpPr>
-        <p:spPr>
-          <a:xfrm>
-            <a:off x="7496080" y="4949140"/>
-            <a:ext cx="1987686" cy="159286"/>
-          </a:xfrm>
-          <a:prstGeom prst="rightArrow">
-            <a:avLst/>
-          </a:prstGeom>
-        </p:spPr>
-        <p:style>
-          <a:lnRef idx="2">
-            <a:schemeClr val="accent1">
-              <a:shade val="50000"/>
-            </a:schemeClr>
-          </a:lnRef>
-          <a:fillRef idx="1">
-            <a:schemeClr val="accent1"/>
-          </a:fillRef>
-          <a:effectRef idx="0">
-            <a:schemeClr val="accent1"/>
-          </a:effectRef>
-          <a:fontRef idx="minor">
-            <a:schemeClr val="lt1"/>
-          </a:fontRef>
-        </p:style>
-        <p:txBody>
-          <a:bodyPr rtlCol="0" anchor="ctr"/>
-          <a:lstStyle/>
-          <a:p>
-            <a:pPr algn="ctr"/>
-            <a:endParaRPr lang="en-SG"/>
-          </a:p>
-        </p:txBody>
-      </p:sp>
-      <p:pic>
-        <p:nvPicPr>
-          <p:cNvPr id="61" name="Picture 60">
-            <a:extLst>
-              <a:ext uri="{FF2B5EF4-FFF2-40B4-BE49-F238E27FC236}">
-                <a16:creationId xmlns:a16="http://schemas.microsoft.com/office/drawing/2014/main" id="{94BF1788-9B52-EB57-1795-844AB8A603DC}"/>
-              </a:ext>
-            </a:extLst>
-          </p:cNvPr>
-          <p:cNvPicPr>
-            <a:picLocks noChangeAspect="1"/>
-          </p:cNvPicPr>
-          <p:nvPr/>
-        </p:nvPicPr>
-        <p:blipFill>
-          <a:blip r:embed="rId2"/>
-          <a:stretch>
-            <a:fillRect/>
-          </a:stretch>
-        </p:blipFill>
-        <p:spPr>
-          <a:xfrm>
-            <a:off x="9817628" y="3125357"/>
-            <a:ext cx="585606" cy="428417"/>
-          </a:xfrm>
-          <a:prstGeom prst="rect">
-            <a:avLst/>
-          </a:prstGeom>
-          <a:ln w="3175">
-            <a:solidFill>
-              <a:schemeClr val="tx1"/>
-            </a:solidFill>
-          </a:ln>
-        </p:spPr>
-      </p:pic>
-      <p:pic>
-        <p:nvPicPr>
-          <p:cNvPr id="62" name="Picture 61">
-            <a:extLst>
-              <a:ext uri="{FF2B5EF4-FFF2-40B4-BE49-F238E27FC236}">
-                <a16:creationId xmlns:a16="http://schemas.microsoft.com/office/drawing/2014/main" id="{68C7BFC3-8536-DDFE-D598-A15EB73240DD}"/>
-              </a:ext>
-            </a:extLst>
-          </p:cNvPr>
-          <p:cNvPicPr>
-            <a:picLocks noChangeAspect="1"/>
-          </p:cNvPicPr>
-          <p:nvPr/>
-        </p:nvPicPr>
-        <p:blipFill>
-          <a:blip r:embed="rId2"/>
-          <a:stretch>
-            <a:fillRect/>
-          </a:stretch>
-        </p:blipFill>
-        <p:spPr>
-          <a:xfrm>
-            <a:off x="9865623" y="4834208"/>
-            <a:ext cx="585606" cy="428417"/>
-          </a:xfrm>
-          <a:prstGeom prst="rect">
-            <a:avLst/>
-          </a:prstGeom>
-          <a:ln w="3175">
-            <a:solidFill>
-              <a:schemeClr val="tx1"/>
-            </a:solidFill>
-          </a:ln>
-        </p:spPr>
-      </p:pic>
-      <p:sp>
-        <p:nvSpPr>
-          <p:cNvPr id="63" name="Rectangle 62">
-            <a:extLst>
-              <a:ext uri="{FF2B5EF4-FFF2-40B4-BE49-F238E27FC236}">
-                <a16:creationId xmlns:a16="http://schemas.microsoft.com/office/drawing/2014/main" id="{F21CE164-8006-C42F-6280-E32569831164}"/>
-              </a:ext>
-            </a:extLst>
-          </p:cNvPr>
-          <p:cNvSpPr/>
-          <p:nvPr/>
-        </p:nvSpPr>
-        <p:spPr>
-          <a:xfrm>
-            <a:off x="3099574" y="5499610"/>
-            <a:ext cx="4365578" cy="317380"/>
-          </a:xfrm>
-          <a:prstGeom prst="rect">
-            <a:avLst/>
-          </a:prstGeom>
-          <a:ln w="28575">
-            <a:solidFill>
-              <a:schemeClr val="accent6">
-                <a:lumMod val="75000"/>
-              </a:schemeClr>
-            </a:solidFill>
-            <a:prstDash val="sysDot"/>
-          </a:ln>
-        </p:spPr>
-        <p:style>
-          <a:lnRef idx="2">
-            <a:schemeClr val="accent6"/>
-          </a:lnRef>
-          <a:fillRef idx="1">
-            <a:schemeClr val="lt1"/>
-          </a:fillRef>
-          <a:effectRef idx="0">
-            <a:schemeClr val="accent6"/>
-          </a:effectRef>
-          <a:fontRef idx="minor">
-            <a:schemeClr val="dk1"/>
-          </a:fontRef>
-        </p:style>
-        <p:txBody>
-          <a:bodyPr rtlCol="0" anchor="ctr"/>
-          <a:lstStyle/>
-          <a:p>
-            <a:pPr algn="ctr"/>
-            <a:endParaRPr lang="en-SG" dirty="0"/>
-          </a:p>
-        </p:txBody>
-      </p:sp>
-      <p:sp>
-        <p:nvSpPr>
-          <p:cNvPr id="64" name="TextBox 63">
-            <a:extLst>
-              <a:ext uri="{FF2B5EF4-FFF2-40B4-BE49-F238E27FC236}">
-                <a16:creationId xmlns:a16="http://schemas.microsoft.com/office/drawing/2014/main" id="{AA040866-DBBB-1EE9-EC47-3D60296DA27C}"/>
-              </a:ext>
-            </a:extLst>
-          </p:cNvPr>
-          <p:cNvSpPr txBox="1"/>
-          <p:nvPr/>
-        </p:nvSpPr>
-        <p:spPr>
-          <a:xfrm>
-            <a:off x="3099574" y="5500845"/>
-            <a:ext cx="1675694" cy="307777"/>
-          </a:xfrm>
-          <a:prstGeom prst="rect">
-            <a:avLst/>
-          </a:prstGeom>
-          <a:noFill/>
-        </p:spPr>
-        <p:txBody>
-          <a:bodyPr wrap="square" rtlCol="0">
-            <a:spAutoFit/>
-          </a:bodyPr>
-          <a:lstStyle/>
-          <a:p>
-            <a:r>
-              <a:rPr lang="en-US" sz="1400" b="1" dirty="0"/>
-              <a:t>Local Prober</a:t>
-            </a:r>
-            <a:r>
-              <a:rPr lang="en-US" sz="1400" dirty="0"/>
-              <a:t> </a:t>
-            </a:r>
-            <a:endParaRPr lang="en-SG" sz="1400" dirty="0"/>
-          </a:p>
-        </p:txBody>
-      </p:sp>
-      <p:cxnSp>
-        <p:nvCxnSpPr>
-          <p:cNvPr id="65" name="Straight Arrow Connector 64">
-            <a:extLst>
-              <a:ext uri="{FF2B5EF4-FFF2-40B4-BE49-F238E27FC236}">
-                <a16:creationId xmlns:a16="http://schemas.microsoft.com/office/drawing/2014/main" id="{5EF203BE-AE06-858C-47F6-A6D18AC62FCE}"/>
-              </a:ext>
-            </a:extLst>
-          </p:cNvPr>
-          <p:cNvCxnSpPr>
-            <a:cxnSpLocks/>
-          </p:cNvCxnSpPr>
-          <p:nvPr/>
-        </p:nvCxnSpPr>
-        <p:spPr>
-          <a:xfrm flipH="1">
-            <a:off x="6962263" y="1674478"/>
-            <a:ext cx="2365265" cy="4026956"/>
-          </a:xfrm>
-          <a:prstGeom prst="straightConnector1">
-            <a:avLst/>
-          </a:prstGeom>
-          <a:ln>
-            <a:solidFill>
-              <a:schemeClr val="accent6">
-                <a:lumMod val="75000"/>
-              </a:schemeClr>
-            </a:solidFill>
-            <a:tailEnd type="triangle"/>
-          </a:ln>
-        </p:spPr>
-        <p:style>
-          <a:lnRef idx="1">
-            <a:schemeClr val="accent1"/>
-          </a:lnRef>
-          <a:fillRef idx="0">
-            <a:schemeClr val="accent1"/>
-          </a:fillRef>
-          <a:effectRef idx="0">
-            <a:schemeClr val="accent1"/>
-          </a:effectRef>
-          <a:fontRef idx="minor">
-            <a:schemeClr val="tx1"/>
-          </a:fontRef>
-        </p:style>
-      </p:cxnSp>
-      <p:cxnSp>
-        <p:nvCxnSpPr>
-          <p:cNvPr id="67" name="Straight Arrow Connector 66">
-            <a:extLst>
-              <a:ext uri="{FF2B5EF4-FFF2-40B4-BE49-F238E27FC236}">
-                <a16:creationId xmlns:a16="http://schemas.microsoft.com/office/drawing/2014/main" id="{8373DAC7-7198-12F7-67C2-A864A4EEC9D9}"/>
-              </a:ext>
-            </a:extLst>
-          </p:cNvPr>
-          <p:cNvCxnSpPr>
-            <a:cxnSpLocks/>
-          </p:cNvCxnSpPr>
-          <p:nvPr/>
-        </p:nvCxnSpPr>
-        <p:spPr>
-          <a:xfrm flipH="1">
-            <a:off x="7181858" y="1694335"/>
-            <a:ext cx="3275837" cy="4007099"/>
-          </a:xfrm>
-          <a:prstGeom prst="straightConnector1">
-            <a:avLst/>
-          </a:prstGeom>
-          <a:ln>
-            <a:solidFill>
-              <a:schemeClr val="accent6">
-                <a:lumMod val="75000"/>
-              </a:schemeClr>
-            </a:solidFill>
-            <a:tailEnd type="triangle"/>
-          </a:ln>
-        </p:spPr>
-        <p:style>
-          <a:lnRef idx="1">
-            <a:schemeClr val="accent1"/>
-          </a:lnRef>
-          <a:fillRef idx="0">
-            <a:schemeClr val="accent1"/>
-          </a:fillRef>
-          <a:effectRef idx="0">
-            <a:schemeClr val="accent1"/>
-          </a:effectRef>
-          <a:fontRef idx="minor">
-            <a:schemeClr val="tx1"/>
-          </a:fontRef>
-        </p:style>
-      </p:cxnSp>
-      <p:sp>
-        <p:nvSpPr>
-          <p:cNvPr id="79" name="Rectangle 78">
-            <a:extLst>
-              <a:ext uri="{FF2B5EF4-FFF2-40B4-BE49-F238E27FC236}">
-                <a16:creationId xmlns:a16="http://schemas.microsoft.com/office/drawing/2014/main" id="{0B20E767-E9B1-652A-8487-940F38220C4D}"/>
-              </a:ext>
-            </a:extLst>
-          </p:cNvPr>
-          <p:cNvSpPr/>
-          <p:nvPr/>
-        </p:nvSpPr>
-        <p:spPr>
-          <a:xfrm>
-            <a:off x="1266850" y="3148646"/>
-            <a:ext cx="1446963" cy="381838"/>
-          </a:xfrm>
-          <a:prstGeom prst="rect">
-            <a:avLst/>
-          </a:prstGeom>
-        </p:spPr>
-        <p:style>
-          <a:lnRef idx="2">
-            <a:schemeClr val="accent1">
-              <a:shade val="50000"/>
-            </a:schemeClr>
-          </a:lnRef>
-          <a:fillRef idx="1">
-            <a:schemeClr val="accent1"/>
-          </a:fillRef>
-          <a:effectRef idx="0">
-            <a:schemeClr val="accent1"/>
-          </a:effectRef>
-          <a:fontRef idx="minor">
-            <a:schemeClr val="lt1"/>
-          </a:fontRef>
-        </p:style>
-        <p:txBody>
-          <a:bodyPr rtlCol="0" anchor="ctr"/>
-          <a:lstStyle/>
-          <a:p>
-            <a:pPr algn="ctr"/>
-            <a:r>
-              <a:rPr lang="en-US" sz="1400" dirty="0"/>
-              <a:t>Data manager</a:t>
-            </a:r>
-            <a:endParaRPr lang="en-SG" sz="1400" dirty="0"/>
-          </a:p>
-        </p:txBody>
-      </p:sp>
-      <p:sp>
-        <p:nvSpPr>
-          <p:cNvPr id="81" name="TextBox 80">
-            <a:extLst>
-              <a:ext uri="{FF2B5EF4-FFF2-40B4-BE49-F238E27FC236}">
-                <a16:creationId xmlns:a16="http://schemas.microsoft.com/office/drawing/2014/main" id="{9D32850A-B07C-9E0B-8FEF-21D37A711156}"/>
-              </a:ext>
-            </a:extLst>
-          </p:cNvPr>
-          <p:cNvSpPr txBox="1"/>
-          <p:nvPr/>
-        </p:nvSpPr>
-        <p:spPr>
-          <a:xfrm>
-            <a:off x="9692794" y="2808340"/>
-            <a:ext cx="939095" cy="261610"/>
-          </a:xfrm>
-          <a:prstGeom prst="rect">
-            <a:avLst/>
-          </a:prstGeom>
-          <a:noFill/>
-        </p:spPr>
-        <p:txBody>
-          <a:bodyPr wrap="square" rtlCol="0">
-            <a:spAutoFit/>
-          </a:bodyPr>
-          <a:lstStyle/>
-          <a:p>
-            <a:r>
-              <a:rPr lang="en-US" sz="1100" dirty="0"/>
-              <a:t>Target Node</a:t>
-            </a:r>
-            <a:endParaRPr lang="en-SG" sz="1100" dirty="0"/>
-          </a:p>
-        </p:txBody>
-      </p:sp>
-      <p:sp>
-        <p:nvSpPr>
-          <p:cNvPr id="82" name="TextBox 81">
-            <a:extLst>
-              <a:ext uri="{FF2B5EF4-FFF2-40B4-BE49-F238E27FC236}">
-                <a16:creationId xmlns:a16="http://schemas.microsoft.com/office/drawing/2014/main" id="{DAE6C275-6353-0212-A8FA-2EAD35A5BDB7}"/>
-              </a:ext>
-            </a:extLst>
-          </p:cNvPr>
-          <p:cNvSpPr txBox="1"/>
-          <p:nvPr/>
-        </p:nvSpPr>
-        <p:spPr>
-          <a:xfrm>
-            <a:off x="9674949" y="4517684"/>
-            <a:ext cx="939095" cy="261610"/>
-          </a:xfrm>
-          <a:prstGeom prst="rect">
-            <a:avLst/>
-          </a:prstGeom>
-          <a:noFill/>
-        </p:spPr>
-        <p:txBody>
-          <a:bodyPr wrap="square" rtlCol="0">
-            <a:spAutoFit/>
-          </a:bodyPr>
-          <a:lstStyle/>
-          <a:p>
-            <a:r>
-              <a:rPr lang="en-US" sz="1100" dirty="0"/>
-              <a:t>Target Node</a:t>
-            </a:r>
-            <a:endParaRPr lang="en-SG" sz="1100" dirty="0"/>
-          </a:p>
-        </p:txBody>
-      </p:sp>
-      <p:cxnSp>
-        <p:nvCxnSpPr>
-          <p:cNvPr id="88" name="Straight Arrow Connector 87">
-            <a:extLst>
-              <a:ext uri="{FF2B5EF4-FFF2-40B4-BE49-F238E27FC236}">
-                <a16:creationId xmlns:a16="http://schemas.microsoft.com/office/drawing/2014/main" id="{DD9BE514-3572-BAE4-E2F9-0A2466CBAC15}"/>
-              </a:ext>
-            </a:extLst>
-          </p:cNvPr>
-          <p:cNvCxnSpPr>
-            <a:stCxn id="4" idx="2"/>
-          </p:cNvCxnSpPr>
-          <p:nvPr/>
-        </p:nvCxnSpPr>
-        <p:spPr>
-          <a:xfrm flipH="1">
-            <a:off x="1990331" y="2637693"/>
-            <a:ext cx="1" cy="484185"/>
-          </a:xfrm>
-          <a:prstGeom prst="straightConnector1">
-            <a:avLst/>
-          </a:prstGeom>
-          <a:ln w="19050">
-            <a:headEnd type="triangle"/>
-            <a:tailEnd type="triangle"/>
-          </a:ln>
-        </p:spPr>
-        <p:style>
-          <a:lnRef idx="1">
-            <a:schemeClr val="accent1"/>
-          </a:lnRef>
-          <a:fillRef idx="0">
-            <a:schemeClr val="accent1"/>
-          </a:fillRef>
-          <a:effectRef idx="0">
-            <a:schemeClr val="accent1"/>
-          </a:effectRef>
-          <a:fontRef idx="minor">
-            <a:schemeClr val="tx1"/>
-          </a:fontRef>
-        </p:style>
-      </p:cxnSp>
-      <p:sp>
-        <p:nvSpPr>
-          <p:cNvPr id="89" name="Rectangle 88">
-            <a:extLst>
-              <a:ext uri="{FF2B5EF4-FFF2-40B4-BE49-F238E27FC236}">
-                <a16:creationId xmlns:a16="http://schemas.microsoft.com/office/drawing/2014/main" id="{8E3B1EF6-7EC7-DD10-A767-272BA51418E2}"/>
-              </a:ext>
-            </a:extLst>
-          </p:cNvPr>
-          <p:cNvSpPr/>
-          <p:nvPr/>
-        </p:nvSpPr>
-        <p:spPr>
-          <a:xfrm>
-            <a:off x="72336" y="572759"/>
-            <a:ext cx="1375397" cy="353867"/>
-          </a:xfrm>
-          <a:prstGeom prst="rect">
-            <a:avLst/>
-          </a:prstGeom>
-        </p:spPr>
-        <p:style>
-          <a:lnRef idx="2">
-            <a:schemeClr val="accent1">
-              <a:shade val="50000"/>
-            </a:schemeClr>
-          </a:lnRef>
-          <a:fillRef idx="1">
-            <a:schemeClr val="accent1"/>
-          </a:fillRef>
-          <a:effectRef idx="0">
-            <a:schemeClr val="accent1"/>
-          </a:effectRef>
-          <a:fontRef idx="minor">
-            <a:schemeClr val="lt1"/>
-          </a:fontRef>
-        </p:style>
-        <p:txBody>
-          <a:bodyPr rtlCol="0" anchor="ctr"/>
-          <a:lstStyle/>
-          <a:p>
-            <a:pPr algn="ctr"/>
-            <a:r>
-              <a:rPr lang="en-US" sz="1400" dirty="0"/>
-              <a:t>Prober Agent </a:t>
-            </a:r>
-            <a:endParaRPr lang="en-SG" sz="1400" dirty="0"/>
-          </a:p>
-        </p:txBody>
-      </p:sp>
-      <p:cxnSp>
-        <p:nvCxnSpPr>
-          <p:cNvPr id="94" name="Straight Arrow Connector 93">
-            <a:extLst>
-              <a:ext uri="{FF2B5EF4-FFF2-40B4-BE49-F238E27FC236}">
-                <a16:creationId xmlns:a16="http://schemas.microsoft.com/office/drawing/2014/main" id="{92DD0C0A-48EA-B920-C1C9-0DEAFBE4CA58}"/>
-              </a:ext>
-            </a:extLst>
-          </p:cNvPr>
-          <p:cNvCxnSpPr>
-            <a:cxnSpLocks/>
-            <a:endCxn id="79" idx="3"/>
-          </p:cNvCxnSpPr>
-          <p:nvPr/>
-        </p:nvCxnSpPr>
-        <p:spPr>
-          <a:xfrm flipH="1">
-            <a:off x="2713813" y="3331488"/>
-            <a:ext cx="348539" cy="8077"/>
-          </a:xfrm>
-          <a:prstGeom prst="straightConnector1">
-            <a:avLst/>
-          </a:prstGeom>
-          <a:ln w="19050">
-            <a:tailEnd type="triangle"/>
-          </a:ln>
-        </p:spPr>
-        <p:style>
-          <a:lnRef idx="1">
-            <a:schemeClr val="accent1"/>
-          </a:lnRef>
-          <a:fillRef idx="0">
-            <a:schemeClr val="accent1"/>
-          </a:fillRef>
-          <a:effectRef idx="0">
-            <a:schemeClr val="accent1"/>
-          </a:effectRef>
-          <a:fontRef idx="minor">
-            <a:schemeClr val="tx1"/>
-          </a:fontRef>
-        </p:style>
-      </p:cxnSp>
-      <p:cxnSp>
-        <p:nvCxnSpPr>
-          <p:cNvPr id="96" name="Straight Arrow Connector 95">
-            <a:extLst>
-              <a:ext uri="{FF2B5EF4-FFF2-40B4-BE49-F238E27FC236}">
-                <a16:creationId xmlns:a16="http://schemas.microsoft.com/office/drawing/2014/main" id="{F3EAE48F-A8C0-F426-6CD7-371B9122A696}"/>
-              </a:ext>
-            </a:extLst>
-          </p:cNvPr>
-          <p:cNvCxnSpPr>
-            <a:cxnSpLocks/>
-          </p:cNvCxnSpPr>
-          <p:nvPr/>
-        </p:nvCxnSpPr>
-        <p:spPr>
-          <a:xfrm flipH="1" flipV="1">
-            <a:off x="2605278" y="3619310"/>
-            <a:ext cx="457074" cy="1329830"/>
-          </a:xfrm>
-          <a:prstGeom prst="straightConnector1">
-            <a:avLst/>
-          </a:prstGeom>
-          <a:ln w="19050">
-            <a:tailEnd type="triangle"/>
-          </a:ln>
-        </p:spPr>
-        <p:style>
-          <a:lnRef idx="1">
-            <a:schemeClr val="accent1"/>
-          </a:lnRef>
-          <a:fillRef idx="0">
-            <a:schemeClr val="accent1"/>
-          </a:fillRef>
-          <a:effectRef idx="0">
-            <a:schemeClr val="accent1"/>
-          </a:effectRef>
-          <a:fontRef idx="minor">
-            <a:schemeClr val="tx1"/>
-          </a:fontRef>
-        </p:style>
-      </p:cxnSp>
-      <p:cxnSp>
-        <p:nvCxnSpPr>
-          <p:cNvPr id="98" name="Straight Arrow Connector 97">
-            <a:extLst>
-              <a:ext uri="{FF2B5EF4-FFF2-40B4-BE49-F238E27FC236}">
-                <a16:creationId xmlns:a16="http://schemas.microsoft.com/office/drawing/2014/main" id="{FCE36348-ACD4-E216-FCA4-3205DB156DC8}"/>
-              </a:ext>
-            </a:extLst>
-          </p:cNvPr>
-          <p:cNvCxnSpPr>
-            <a:cxnSpLocks/>
-          </p:cNvCxnSpPr>
-          <p:nvPr/>
-        </p:nvCxnSpPr>
-        <p:spPr>
-          <a:xfrm flipH="1" flipV="1">
-            <a:off x="2325648" y="3580724"/>
-            <a:ext cx="736704" cy="2095945"/>
-          </a:xfrm>
-          <a:prstGeom prst="straightConnector1">
-            <a:avLst/>
-          </a:prstGeom>
-          <a:ln w="19050">
-            <a:tailEnd type="triangle"/>
-          </a:ln>
-        </p:spPr>
-        <p:style>
-          <a:lnRef idx="1">
-            <a:schemeClr val="accent1"/>
-          </a:lnRef>
-          <a:fillRef idx="0">
-            <a:schemeClr val="accent1"/>
-          </a:fillRef>
-          <a:effectRef idx="0">
-            <a:schemeClr val="accent1"/>
-          </a:effectRef>
-          <a:fontRef idx="minor">
-            <a:schemeClr val="tx1"/>
-          </a:fontRef>
-        </p:style>
-      </p:cxnSp>
-      <p:sp>
-        <p:nvSpPr>
-          <p:cNvPr id="100" name="Rectangle 99">
-            <a:extLst>
-              <a:ext uri="{FF2B5EF4-FFF2-40B4-BE49-F238E27FC236}">
-                <a16:creationId xmlns:a16="http://schemas.microsoft.com/office/drawing/2014/main" id="{082B08D1-0C82-EF10-41C7-8152BD582C57}"/>
-              </a:ext>
-            </a:extLst>
-          </p:cNvPr>
-          <p:cNvSpPr/>
-          <p:nvPr/>
-        </p:nvSpPr>
-        <p:spPr>
-          <a:xfrm>
-            <a:off x="3081756" y="5964105"/>
-            <a:ext cx="4365578" cy="354118"/>
-          </a:xfrm>
-          <a:prstGeom prst="rect">
-            <a:avLst/>
-          </a:prstGeom>
-          <a:ln w="28575">
-            <a:solidFill>
-              <a:schemeClr val="tx1"/>
-            </a:solidFill>
-            <a:prstDash val="sysDot"/>
-          </a:ln>
-        </p:spPr>
-        <p:style>
-          <a:lnRef idx="2">
-            <a:schemeClr val="accent6"/>
-          </a:lnRef>
-          <a:fillRef idx="1">
-            <a:schemeClr val="lt1"/>
-          </a:fillRef>
-          <a:effectRef idx="0">
-            <a:schemeClr val="accent6"/>
-          </a:effectRef>
-          <a:fontRef idx="minor">
-            <a:schemeClr val="dk1"/>
-          </a:fontRef>
-        </p:style>
-        <p:txBody>
-          <a:bodyPr rtlCol="0" anchor="ctr"/>
-          <a:lstStyle/>
-          <a:p>
-            <a:pPr algn="ctr"/>
-            <a:endParaRPr lang="en-SG" dirty="0"/>
-          </a:p>
-        </p:txBody>
-      </p:sp>
-      <p:sp>
-        <p:nvSpPr>
-          <p:cNvPr id="101" name="TextBox 100">
-            <a:extLst>
-              <a:ext uri="{FF2B5EF4-FFF2-40B4-BE49-F238E27FC236}">
-                <a16:creationId xmlns:a16="http://schemas.microsoft.com/office/drawing/2014/main" id="{2FAE8B73-8A89-3780-7F25-BD1747D3E7D5}"/>
-              </a:ext>
-            </a:extLst>
-          </p:cNvPr>
-          <p:cNvSpPr txBox="1"/>
-          <p:nvPr/>
-        </p:nvSpPr>
-        <p:spPr>
-          <a:xfrm>
-            <a:off x="3080790" y="5986514"/>
-            <a:ext cx="1675694" cy="307777"/>
-          </a:xfrm>
-          <a:prstGeom prst="rect">
-            <a:avLst/>
-          </a:prstGeom>
-          <a:noFill/>
-        </p:spPr>
-        <p:txBody>
-          <a:bodyPr wrap="square" rtlCol="0">
-            <a:spAutoFit/>
-          </a:bodyPr>
-          <a:lstStyle/>
-          <a:p>
-            <a:r>
-              <a:rPr lang="en-US" sz="1400" b="1"/>
-              <a:t>Children Probers</a:t>
-            </a:r>
-            <a:r>
-              <a:rPr lang="en-US" sz="1400"/>
-              <a:t> </a:t>
-            </a:r>
-            <a:endParaRPr lang="en-SG" sz="1400" dirty="0"/>
-          </a:p>
-        </p:txBody>
-      </p:sp>
-      <p:sp>
-        <p:nvSpPr>
-          <p:cNvPr id="102" name="Rectangle 101">
-            <a:extLst>
-              <a:ext uri="{FF2B5EF4-FFF2-40B4-BE49-F238E27FC236}">
-                <a16:creationId xmlns:a16="http://schemas.microsoft.com/office/drawing/2014/main" id="{2CE16D98-4228-C43B-A90E-88F4829AE731}"/>
-              </a:ext>
-            </a:extLst>
-          </p:cNvPr>
-          <p:cNvSpPr/>
-          <p:nvPr/>
-        </p:nvSpPr>
-        <p:spPr>
-          <a:xfrm>
-            <a:off x="10015132" y="5541708"/>
-            <a:ext cx="1375397" cy="353867"/>
-          </a:xfrm>
-          <a:prstGeom prst="rect">
-            <a:avLst/>
-          </a:prstGeom>
-        </p:spPr>
-        <p:style>
-          <a:lnRef idx="2">
-            <a:schemeClr val="accent1">
-              <a:shade val="50000"/>
-            </a:schemeClr>
-          </a:lnRef>
-          <a:fillRef idx="1">
-            <a:schemeClr val="accent1"/>
-          </a:fillRef>
-          <a:effectRef idx="0">
-            <a:schemeClr val="accent1"/>
-          </a:effectRef>
-          <a:fontRef idx="minor">
-            <a:schemeClr val="lt1"/>
-          </a:fontRef>
-        </p:style>
-        <p:txBody>
-          <a:bodyPr rtlCol="0" anchor="ctr"/>
-          <a:lstStyle/>
-          <a:p>
-            <a:pPr algn="ctr"/>
-            <a:r>
-              <a:rPr lang="en-US" sz="1400" dirty="0"/>
-              <a:t>Prober Agent </a:t>
-            </a:r>
-            <a:endParaRPr lang="en-SG" sz="1400" dirty="0"/>
-          </a:p>
-        </p:txBody>
-      </p:sp>
-      <p:cxnSp>
-        <p:nvCxnSpPr>
-          <p:cNvPr id="107" name="Connector: Elbow 106">
-            <a:extLst>
-              <a:ext uri="{FF2B5EF4-FFF2-40B4-BE49-F238E27FC236}">
-                <a16:creationId xmlns:a16="http://schemas.microsoft.com/office/drawing/2014/main" id="{068A992E-0405-3383-BD15-287712559BDA}"/>
-              </a:ext>
-            </a:extLst>
-          </p:cNvPr>
-          <p:cNvCxnSpPr>
-            <a:stCxn id="89" idx="2"/>
-            <a:endCxn id="79" idx="1"/>
-          </p:cNvCxnSpPr>
-          <p:nvPr/>
-        </p:nvCxnSpPr>
-        <p:spPr>
-          <a:xfrm rot="16200000" flipH="1">
-            <a:off x="-193027" y="1879687"/>
-            <a:ext cx="2412939" cy="506815"/>
-          </a:xfrm>
-          <a:prstGeom prst="bentConnector2">
-            <a:avLst/>
-          </a:prstGeom>
-          <a:ln w="19050">
-            <a:tailEnd type="triangle"/>
-          </a:ln>
-        </p:spPr>
-        <p:style>
-          <a:lnRef idx="1">
-            <a:schemeClr val="accent1"/>
-          </a:lnRef>
-          <a:fillRef idx="0">
-            <a:schemeClr val="accent1"/>
-          </a:fillRef>
-          <a:effectRef idx="0">
-            <a:schemeClr val="accent1"/>
-          </a:effectRef>
-          <a:fontRef idx="minor">
-            <a:schemeClr val="tx1"/>
-          </a:fontRef>
-        </p:style>
-      </p:cxnSp>
-      <p:sp>
-        <p:nvSpPr>
-          <p:cNvPr id="111" name="Rectangle 110">
-            <a:extLst>
-              <a:ext uri="{FF2B5EF4-FFF2-40B4-BE49-F238E27FC236}">
-                <a16:creationId xmlns:a16="http://schemas.microsoft.com/office/drawing/2014/main" id="{51889168-AB71-A601-DD26-50622F27AA69}"/>
-              </a:ext>
-            </a:extLst>
-          </p:cNvPr>
-          <p:cNvSpPr/>
-          <p:nvPr/>
-        </p:nvSpPr>
-        <p:spPr>
-          <a:xfrm>
-            <a:off x="10015132" y="6141164"/>
-            <a:ext cx="1375397" cy="353867"/>
-          </a:xfrm>
-          <a:prstGeom prst="rect">
-            <a:avLst/>
-          </a:prstGeom>
-        </p:spPr>
-        <p:style>
-          <a:lnRef idx="2">
-            <a:schemeClr val="accent1">
-              <a:shade val="50000"/>
-            </a:schemeClr>
-          </a:lnRef>
-          <a:fillRef idx="1">
-            <a:schemeClr val="accent1"/>
-          </a:fillRef>
-          <a:effectRef idx="0">
-            <a:schemeClr val="accent1"/>
-          </a:effectRef>
-          <a:fontRef idx="minor">
-            <a:schemeClr val="lt1"/>
-          </a:fontRef>
-        </p:style>
-        <p:txBody>
-          <a:bodyPr rtlCol="0" anchor="ctr"/>
-          <a:lstStyle/>
-          <a:p>
-            <a:pPr algn="ctr"/>
-            <a:r>
-              <a:rPr lang="en-US" sz="1400" dirty="0"/>
-              <a:t>Prober Agent </a:t>
-            </a:r>
-            <a:endParaRPr lang="en-SG" sz="1400" dirty="0"/>
-          </a:p>
-        </p:txBody>
-      </p:sp>
-      <p:cxnSp>
-        <p:nvCxnSpPr>
-          <p:cNvPr id="114" name="Straight Arrow Connector 113">
-            <a:extLst>
-              <a:ext uri="{FF2B5EF4-FFF2-40B4-BE49-F238E27FC236}">
-                <a16:creationId xmlns:a16="http://schemas.microsoft.com/office/drawing/2014/main" id="{2AD91286-57FF-2905-34F5-E390C34536AF}"/>
-              </a:ext>
-            </a:extLst>
-          </p:cNvPr>
-          <p:cNvCxnSpPr>
-            <a:cxnSpLocks/>
-            <a:endCxn id="102" idx="1"/>
-          </p:cNvCxnSpPr>
-          <p:nvPr/>
-        </p:nvCxnSpPr>
-        <p:spPr>
-          <a:xfrm flipV="1">
-            <a:off x="7465152" y="5718642"/>
-            <a:ext cx="2549980" cy="361909"/>
-          </a:xfrm>
-          <a:prstGeom prst="straightConnector1">
-            <a:avLst/>
-          </a:prstGeom>
-          <a:ln w="19050">
-            <a:tailEnd type="triangle"/>
-          </a:ln>
-        </p:spPr>
-        <p:style>
-          <a:lnRef idx="1">
-            <a:schemeClr val="accent1"/>
-          </a:lnRef>
-          <a:fillRef idx="0">
-            <a:schemeClr val="accent1"/>
-          </a:fillRef>
-          <a:effectRef idx="0">
-            <a:schemeClr val="accent1"/>
-          </a:effectRef>
-          <a:fontRef idx="minor">
-            <a:schemeClr val="tx1"/>
-          </a:fontRef>
-        </p:style>
-      </p:cxnSp>
-      <p:cxnSp>
-        <p:nvCxnSpPr>
-          <p:cNvPr id="118" name="Straight Arrow Connector 117">
-            <a:extLst>
-              <a:ext uri="{FF2B5EF4-FFF2-40B4-BE49-F238E27FC236}">
-                <a16:creationId xmlns:a16="http://schemas.microsoft.com/office/drawing/2014/main" id="{28060197-1D10-362B-E2BE-88D5EEF7A6C1}"/>
-              </a:ext>
-            </a:extLst>
-          </p:cNvPr>
-          <p:cNvCxnSpPr>
-            <a:cxnSpLocks/>
-            <a:endCxn id="111" idx="1"/>
-          </p:cNvCxnSpPr>
-          <p:nvPr/>
-        </p:nvCxnSpPr>
-        <p:spPr>
-          <a:xfrm>
-            <a:off x="7465152" y="6196886"/>
-            <a:ext cx="2549980" cy="121212"/>
-          </a:xfrm>
-          <a:prstGeom prst="straightConnector1">
-            <a:avLst/>
-          </a:prstGeom>
-          <a:ln w="19050">
-            <a:tailEnd type="triangle"/>
-          </a:ln>
-        </p:spPr>
-        <p:style>
-          <a:lnRef idx="1">
-            <a:schemeClr val="accent1"/>
-          </a:lnRef>
-          <a:fillRef idx="0">
-            <a:schemeClr val="accent1"/>
-          </a:fillRef>
-          <a:effectRef idx="0">
-            <a:schemeClr val="accent1"/>
-          </a:effectRef>
-          <a:fontRef idx="minor">
-            <a:schemeClr val="tx1"/>
-          </a:fontRef>
-        </p:style>
-      </p:cxnSp>
+            <a:r>
+              <a:rPr lang="en-US" sz="1600" b="1" dirty="0"/>
+              <a:t>to monitor the whole exercise progress, each teams’ state/score, the availability of the resource and the defense progress.  </a:t>
+            </a:r>
+          </a:p>
+          <a:p>
+            <a:pPr marL="285750" indent="-285750" algn="just">
+              <a:lnSpc>
+                <a:spcPct val="150000"/>
+              </a:lnSpc>
+              <a:buFont typeface="Arial" panose="020B0604020202020204" pitchFamily="34" charset="0"/>
+              <a:buChar char="•"/>
+            </a:pPr>
+            <a:r>
+              <a:rPr lang="en-US" sz="1600" b="1" dirty="0"/>
+              <a:t>Used by the </a:t>
+            </a:r>
+            <a:r>
+              <a:rPr lang="en-US" sz="1600" b="1" dirty="0">
+                <a:solidFill>
+                  <a:schemeClr val="bg1"/>
+                </a:solidFill>
+                <a:highlight>
+                  <a:srgbClr val="008000"/>
+                </a:highlight>
+              </a:rPr>
+              <a:t>Green-Team</a:t>
+            </a:r>
+            <a:r>
+              <a:rPr lang="en-US" sz="1600" b="1" dirty="0"/>
+              <a:t> to prepare, test and do debug work for building and supporting the exercise environment. </a:t>
+            </a:r>
+          </a:p>
+          <a:p>
+            <a:pPr marL="285750" indent="-285750" algn="just">
+              <a:lnSpc>
+                <a:spcPct val="150000"/>
+              </a:lnSpc>
+              <a:buFont typeface="Arial" panose="020B0604020202020204" pitchFamily="34" charset="0"/>
+              <a:buChar char="•"/>
+            </a:pPr>
+            <a:r>
+              <a:rPr lang="en-US" sz="1600" b="1" dirty="0"/>
+              <a:t>Used by the </a:t>
+            </a:r>
+            <a:r>
+              <a:rPr lang="en-US" sz="1600" b="1" dirty="0">
+                <a:solidFill>
+                  <a:schemeClr val="bg1"/>
+                </a:solidFill>
+                <a:highlight>
+                  <a:srgbClr val="000080"/>
+                </a:highlight>
+              </a:rPr>
+              <a:t>Blue-Team</a:t>
+            </a:r>
+            <a:r>
+              <a:rPr lang="en-US" sz="1600" b="1" dirty="0"/>
+              <a:t> to check and monitor the real time state of the exercise environment they are working on. </a:t>
+            </a:r>
+          </a:p>
+          <a:p>
+            <a:pPr marL="285750" indent="-285750" algn="just">
+              <a:lnSpc>
+                <a:spcPct val="150000"/>
+              </a:lnSpc>
+              <a:buFont typeface="Arial" panose="020B0604020202020204" pitchFamily="34" charset="0"/>
+              <a:buChar char="•"/>
+            </a:pPr>
+            <a:r>
+              <a:rPr lang="en-US" sz="1600" b="1" dirty="0"/>
+              <a:t>Used by the </a:t>
+            </a:r>
+            <a:r>
+              <a:rPr lang="en-US" sz="1600" b="1" dirty="0">
+                <a:solidFill>
+                  <a:schemeClr val="bg1"/>
+                </a:solidFill>
+                <a:highlight>
+                  <a:srgbClr val="FF0000"/>
+                </a:highlight>
+              </a:rPr>
+              <a:t>Red-Team</a:t>
+            </a:r>
+            <a:r>
+              <a:rPr lang="en-US" sz="1600" b="1" dirty="0"/>
+              <a:t> to report the attack state to judgement team and check the attack influence. </a:t>
+            </a:r>
+          </a:p>
+          <a:p>
+            <a:pPr marL="285750" indent="-285750" algn="just">
+              <a:lnSpc>
+                <a:spcPct val="150000"/>
+              </a:lnSpc>
+              <a:buFont typeface="Arial" panose="020B0604020202020204" pitchFamily="34" charset="0"/>
+              <a:buChar char="•"/>
+            </a:pPr>
+            <a:r>
+              <a:rPr lang="en-US" sz="1600" b="1" dirty="0"/>
+              <a:t>Used by the </a:t>
+            </a:r>
+            <a:r>
+              <a:rPr lang="en-US" sz="1600" b="1" dirty="0">
+                <a:highlight>
+                  <a:srgbClr val="FFFF00"/>
+                </a:highlight>
+              </a:rPr>
+              <a:t>Yellow-Team</a:t>
+            </a:r>
+            <a:r>
+              <a:rPr lang="en-US" sz="1600" b="1" dirty="0"/>
+              <a:t> to simulate the behavior of normal users.</a:t>
+            </a:r>
+          </a:p>
+          <a:p>
+            <a:pPr marL="285750" indent="-285750" algn="just">
+              <a:lnSpc>
+                <a:spcPct val="150000"/>
+              </a:lnSpc>
+              <a:buFont typeface="Arial" panose="020B0604020202020204" pitchFamily="34" charset="0"/>
+              <a:buChar char="•"/>
+            </a:pPr>
+            <a:r>
+              <a:rPr lang="en-US" sz="1600" b="1" dirty="0"/>
+              <a:t>Used by the </a:t>
+            </a:r>
+            <a:r>
+              <a:rPr lang="en-US" sz="1600" b="1" dirty="0">
+                <a:solidFill>
+                  <a:schemeClr val="bg1"/>
+                </a:solidFill>
+                <a:highlight>
+                  <a:srgbClr val="800080"/>
+                </a:highlight>
+              </a:rPr>
+              <a:t>Purple-Team</a:t>
+            </a:r>
+            <a:r>
+              <a:rPr lang="en-US" sz="1600" b="1" dirty="0"/>
+              <a:t> to record the cyber exercise event timeline and archive the event logs. </a:t>
+            </a:r>
+          </a:p>
+          <a:p>
+            <a:pPr marL="285750" indent="-285750" algn="just">
+              <a:lnSpc>
+                <a:spcPct val="150000"/>
+              </a:lnSpc>
+              <a:buFont typeface="Arial" panose="020B0604020202020204" pitchFamily="34" charset="0"/>
+              <a:buChar char="•"/>
+            </a:pPr>
+            <a:r>
+              <a:rPr lang="en-US" sz="1600" b="1" dirty="0"/>
+              <a:t>Auto detect and record the red team attack and defense action.</a:t>
+            </a:r>
+          </a:p>
+        </p:txBody>
+      </p:sp>
     </p:spTree>
     <p:extLst>
       <p:ext uri="{BB962C8B-B14F-4D97-AF65-F5344CB8AC3E}">
-        <p14:creationId xmlns:p14="http://schemas.microsoft.com/office/powerpoint/2010/main" val="48349409"/>
+        <p14:creationId xmlns:p14="http://schemas.microsoft.com/office/powerpoint/2010/main" val="3454258037"/>
       </p:ext>
     </p:extLst>
   </p:cSld>
@@ -6948,6 +4161,3081 @@
       </p:grpSpPr>
       <p:sp>
         <p:nvSpPr>
+          <p:cNvPr id="80" name="Rectangle 79">
+            <a:extLst>
+              <a:ext uri="{FF2B5EF4-FFF2-40B4-BE49-F238E27FC236}">
+                <a16:creationId xmlns:a16="http://schemas.microsoft.com/office/drawing/2014/main" id="{4E82B5E4-07AF-7068-5823-87791F31B149}"/>
+              </a:ext>
+            </a:extLst>
+          </p:cNvPr>
+          <p:cNvSpPr/>
+          <p:nvPr/>
+        </p:nvSpPr>
+        <p:spPr>
+          <a:xfrm>
+            <a:off x="1075174" y="2120204"/>
+            <a:ext cx="6702250" cy="4239649"/>
+          </a:xfrm>
+          <a:prstGeom prst="rect">
+            <a:avLst/>
+          </a:prstGeom>
+          <a:ln>
+            <a:solidFill>
+              <a:schemeClr val="tx1"/>
+            </a:solidFill>
+          </a:ln>
+        </p:spPr>
+        <p:style>
+          <a:lnRef idx="2">
+            <a:schemeClr val="accent6"/>
+          </a:lnRef>
+          <a:fillRef idx="1">
+            <a:schemeClr val="lt1"/>
+          </a:fillRef>
+          <a:effectRef idx="0">
+            <a:schemeClr val="accent6"/>
+          </a:effectRef>
+          <a:fontRef idx="minor">
+            <a:schemeClr val="dk1"/>
+          </a:fontRef>
+        </p:style>
+        <p:txBody>
+          <a:bodyPr rtlCol="0" anchor="ctr"/>
+          <a:lstStyle/>
+          <a:p>
+            <a:pPr algn="ctr"/>
+            <a:endParaRPr lang="en-SG" dirty="0"/>
+          </a:p>
+        </p:txBody>
+      </p:sp>
+      <p:sp>
+        <p:nvSpPr>
+          <p:cNvPr id="39" name="Rectangle 38">
+            <a:extLst>
+              <a:ext uri="{FF2B5EF4-FFF2-40B4-BE49-F238E27FC236}">
+                <a16:creationId xmlns:a16="http://schemas.microsoft.com/office/drawing/2014/main" id="{06599061-FD6D-E1A7-2C65-6FE39DF6B75A}"/>
+              </a:ext>
+            </a:extLst>
+          </p:cNvPr>
+          <p:cNvSpPr/>
+          <p:nvPr/>
+        </p:nvSpPr>
+        <p:spPr>
+          <a:xfrm>
+            <a:off x="3088533" y="2255855"/>
+            <a:ext cx="4365578" cy="2348016"/>
+          </a:xfrm>
+          <a:prstGeom prst="rect">
+            <a:avLst/>
+          </a:prstGeom>
+          <a:ln w="28575">
+            <a:solidFill>
+              <a:srgbClr val="0070C0"/>
+            </a:solidFill>
+            <a:prstDash val="sysDot"/>
+          </a:ln>
+        </p:spPr>
+        <p:style>
+          <a:lnRef idx="2">
+            <a:schemeClr val="accent6"/>
+          </a:lnRef>
+          <a:fillRef idx="1">
+            <a:schemeClr val="lt1"/>
+          </a:fillRef>
+          <a:effectRef idx="0">
+            <a:schemeClr val="accent6"/>
+          </a:effectRef>
+          <a:fontRef idx="minor">
+            <a:schemeClr val="dk1"/>
+          </a:fontRef>
+        </p:style>
+        <p:txBody>
+          <a:bodyPr rtlCol="0" anchor="ctr"/>
+          <a:lstStyle/>
+          <a:p>
+            <a:pPr algn="ctr"/>
+            <a:endParaRPr lang="en-SG" dirty="0"/>
+          </a:p>
+        </p:txBody>
+      </p:sp>
+      <p:sp>
+        <p:nvSpPr>
+          <p:cNvPr id="4" name="Rectangle 3">
+            <a:extLst>
+              <a:ext uri="{FF2B5EF4-FFF2-40B4-BE49-F238E27FC236}">
+                <a16:creationId xmlns:a16="http://schemas.microsoft.com/office/drawing/2014/main" id="{16E92E2E-563A-F8C4-E579-81AAA3B59D0E}"/>
+              </a:ext>
+            </a:extLst>
+          </p:cNvPr>
+          <p:cNvSpPr/>
+          <p:nvPr/>
+        </p:nvSpPr>
+        <p:spPr>
+          <a:xfrm>
+            <a:off x="1266850" y="2255855"/>
+            <a:ext cx="1446963" cy="381838"/>
+          </a:xfrm>
+          <a:prstGeom prst="rect">
+            <a:avLst/>
+          </a:prstGeom>
+        </p:spPr>
+        <p:style>
+          <a:lnRef idx="2">
+            <a:schemeClr val="accent1">
+              <a:shade val="50000"/>
+            </a:schemeClr>
+          </a:lnRef>
+          <a:fillRef idx="1">
+            <a:schemeClr val="accent1"/>
+          </a:fillRef>
+          <a:effectRef idx="0">
+            <a:schemeClr val="accent1"/>
+          </a:effectRef>
+          <a:fontRef idx="minor">
+            <a:schemeClr val="lt1"/>
+          </a:fontRef>
+        </p:style>
+        <p:txBody>
+          <a:bodyPr rtlCol="0" anchor="ctr"/>
+          <a:lstStyle/>
+          <a:p>
+            <a:pPr algn="ctr"/>
+            <a:r>
+              <a:rPr lang="en-US" sz="1400" dirty="0"/>
+              <a:t>Prober Agent </a:t>
+            </a:r>
+            <a:endParaRPr lang="en-SG" sz="1400" dirty="0"/>
+          </a:p>
+        </p:txBody>
+      </p:sp>
+      <p:sp>
+        <p:nvSpPr>
+          <p:cNvPr id="5" name="Rectangle 4">
+            <a:extLst>
+              <a:ext uri="{FF2B5EF4-FFF2-40B4-BE49-F238E27FC236}">
+                <a16:creationId xmlns:a16="http://schemas.microsoft.com/office/drawing/2014/main" id="{71CA713F-A113-B76C-8C6D-99FC3284BB63}"/>
+              </a:ext>
+            </a:extLst>
+          </p:cNvPr>
+          <p:cNvSpPr/>
+          <p:nvPr/>
+        </p:nvSpPr>
+        <p:spPr>
+          <a:xfrm>
+            <a:off x="4431323" y="572759"/>
+            <a:ext cx="4170065" cy="1306286"/>
+          </a:xfrm>
+          <a:prstGeom prst="rect">
+            <a:avLst/>
+          </a:prstGeom>
+        </p:spPr>
+        <p:style>
+          <a:lnRef idx="2">
+            <a:schemeClr val="accent6"/>
+          </a:lnRef>
+          <a:fillRef idx="1">
+            <a:schemeClr val="lt1"/>
+          </a:fillRef>
+          <a:effectRef idx="0">
+            <a:schemeClr val="accent6"/>
+          </a:effectRef>
+          <a:fontRef idx="minor">
+            <a:schemeClr val="dk1"/>
+          </a:fontRef>
+        </p:style>
+        <p:txBody>
+          <a:bodyPr rtlCol="0" anchor="ctr"/>
+          <a:lstStyle/>
+          <a:p>
+            <a:pPr algn="ctr"/>
+            <a:endParaRPr lang="en-SG"/>
+          </a:p>
+        </p:txBody>
+      </p:sp>
+      <p:sp>
+        <p:nvSpPr>
+          <p:cNvPr id="6" name="Rectangle 5">
+            <a:extLst>
+              <a:ext uri="{FF2B5EF4-FFF2-40B4-BE49-F238E27FC236}">
+                <a16:creationId xmlns:a16="http://schemas.microsoft.com/office/drawing/2014/main" id="{F5281419-A8AD-A68D-6D1A-CA369DF681F3}"/>
+              </a:ext>
+            </a:extLst>
+          </p:cNvPr>
+          <p:cNvSpPr/>
+          <p:nvPr/>
+        </p:nvSpPr>
+        <p:spPr>
+          <a:xfrm>
+            <a:off x="4543529" y="879232"/>
+            <a:ext cx="1274467" cy="316524"/>
+          </a:xfrm>
+          <a:prstGeom prst="rect">
+            <a:avLst/>
+          </a:prstGeom>
+          <a:solidFill>
+            <a:schemeClr val="accent6">
+              <a:lumMod val="75000"/>
+            </a:schemeClr>
+          </a:solidFill>
+        </p:spPr>
+        <p:style>
+          <a:lnRef idx="2">
+            <a:schemeClr val="accent1">
+              <a:shade val="50000"/>
+            </a:schemeClr>
+          </a:lnRef>
+          <a:fillRef idx="1">
+            <a:schemeClr val="accent1"/>
+          </a:fillRef>
+          <a:effectRef idx="0">
+            <a:schemeClr val="accent1"/>
+          </a:effectRef>
+          <a:fontRef idx="minor">
+            <a:schemeClr val="lt1"/>
+          </a:fontRef>
+        </p:style>
+        <p:txBody>
+          <a:bodyPr rtlCol="0" anchor="ctr"/>
+          <a:lstStyle/>
+          <a:p>
+            <a:pPr algn="ctr"/>
+            <a:r>
+              <a:rPr lang="en-US" sz="1400" dirty="0"/>
+              <a:t>NTP time fetch</a:t>
+            </a:r>
+            <a:endParaRPr lang="en-SG" sz="1400" dirty="0"/>
+          </a:p>
+        </p:txBody>
+      </p:sp>
+      <p:sp>
+        <p:nvSpPr>
+          <p:cNvPr id="7" name="Rectangle 6">
+            <a:extLst>
+              <a:ext uri="{FF2B5EF4-FFF2-40B4-BE49-F238E27FC236}">
+                <a16:creationId xmlns:a16="http://schemas.microsoft.com/office/drawing/2014/main" id="{E457D2DE-E44D-6C0A-61B3-D542D104071C}"/>
+              </a:ext>
+            </a:extLst>
+          </p:cNvPr>
+          <p:cNvSpPr/>
+          <p:nvPr/>
+        </p:nvSpPr>
+        <p:spPr>
+          <a:xfrm>
+            <a:off x="5979606" y="879232"/>
+            <a:ext cx="571919" cy="316524"/>
+          </a:xfrm>
+          <a:prstGeom prst="rect">
+            <a:avLst/>
+          </a:prstGeom>
+          <a:solidFill>
+            <a:schemeClr val="accent6">
+              <a:lumMod val="75000"/>
+            </a:schemeClr>
+          </a:solidFill>
+        </p:spPr>
+        <p:style>
+          <a:lnRef idx="2">
+            <a:schemeClr val="accent1">
+              <a:shade val="50000"/>
+            </a:schemeClr>
+          </a:lnRef>
+          <a:fillRef idx="1">
+            <a:schemeClr val="accent1"/>
+          </a:fillRef>
+          <a:effectRef idx="0">
+            <a:schemeClr val="accent1"/>
+          </a:effectRef>
+          <a:fontRef idx="minor">
+            <a:schemeClr val="lt1"/>
+          </a:fontRef>
+        </p:style>
+        <p:txBody>
+          <a:bodyPr rtlCol="0" anchor="ctr"/>
+          <a:lstStyle/>
+          <a:p>
+            <a:pPr algn="ctr"/>
+            <a:r>
+              <a:rPr lang="en-US" sz="1400" dirty="0"/>
+              <a:t>ping</a:t>
+            </a:r>
+            <a:endParaRPr lang="en-SG" sz="1400" dirty="0"/>
+          </a:p>
+        </p:txBody>
+      </p:sp>
+      <p:sp>
+        <p:nvSpPr>
+          <p:cNvPr id="8" name="Rectangle 7">
+            <a:extLst>
+              <a:ext uri="{FF2B5EF4-FFF2-40B4-BE49-F238E27FC236}">
+                <a16:creationId xmlns:a16="http://schemas.microsoft.com/office/drawing/2014/main" id="{2F99FDEE-4894-BC1A-8AC4-A09D655DB7C9}"/>
+              </a:ext>
+            </a:extLst>
+          </p:cNvPr>
+          <p:cNvSpPr/>
+          <p:nvPr/>
+        </p:nvSpPr>
+        <p:spPr>
+          <a:xfrm>
+            <a:off x="6713135" y="879232"/>
+            <a:ext cx="571919" cy="316524"/>
+          </a:xfrm>
+          <a:prstGeom prst="rect">
+            <a:avLst/>
+          </a:prstGeom>
+          <a:solidFill>
+            <a:schemeClr val="accent6">
+              <a:lumMod val="75000"/>
+            </a:schemeClr>
+          </a:solidFill>
+        </p:spPr>
+        <p:style>
+          <a:lnRef idx="2">
+            <a:schemeClr val="accent1">
+              <a:shade val="50000"/>
+            </a:schemeClr>
+          </a:lnRef>
+          <a:fillRef idx="1">
+            <a:schemeClr val="accent1"/>
+          </a:fillRef>
+          <a:effectRef idx="0">
+            <a:schemeClr val="accent1"/>
+          </a:effectRef>
+          <a:fontRef idx="minor">
+            <a:schemeClr val="lt1"/>
+          </a:fontRef>
+        </p:style>
+        <p:txBody>
+          <a:bodyPr rtlCol="0" anchor="ctr"/>
+          <a:lstStyle/>
+          <a:p>
+            <a:pPr algn="ctr"/>
+            <a:r>
+              <a:rPr lang="en-US" sz="1400" dirty="0"/>
+              <a:t>FTP</a:t>
+            </a:r>
+            <a:endParaRPr lang="en-SG" sz="1400" dirty="0"/>
+          </a:p>
+        </p:txBody>
+      </p:sp>
+      <p:sp>
+        <p:nvSpPr>
+          <p:cNvPr id="9" name="Rectangle 8">
+            <a:extLst>
+              <a:ext uri="{FF2B5EF4-FFF2-40B4-BE49-F238E27FC236}">
+                <a16:creationId xmlns:a16="http://schemas.microsoft.com/office/drawing/2014/main" id="{1FE60CD1-011C-DF92-4EE9-AF0336D05767}"/>
+              </a:ext>
+            </a:extLst>
+          </p:cNvPr>
+          <p:cNvSpPr/>
+          <p:nvPr/>
+        </p:nvSpPr>
+        <p:spPr>
+          <a:xfrm>
+            <a:off x="7622530" y="879232"/>
+            <a:ext cx="818105" cy="316524"/>
+          </a:xfrm>
+          <a:prstGeom prst="rect">
+            <a:avLst/>
+          </a:prstGeom>
+          <a:solidFill>
+            <a:schemeClr val="accent6">
+              <a:lumMod val="75000"/>
+            </a:schemeClr>
+          </a:solidFill>
+        </p:spPr>
+        <p:style>
+          <a:lnRef idx="2">
+            <a:schemeClr val="accent1">
+              <a:shade val="50000"/>
+            </a:schemeClr>
+          </a:lnRef>
+          <a:fillRef idx="1">
+            <a:schemeClr val="accent1"/>
+          </a:fillRef>
+          <a:effectRef idx="0">
+            <a:schemeClr val="accent1"/>
+          </a:effectRef>
+          <a:fontRef idx="minor">
+            <a:schemeClr val="lt1"/>
+          </a:fontRef>
+        </p:style>
+        <p:txBody>
+          <a:bodyPr rtlCol="0" anchor="ctr"/>
+          <a:lstStyle/>
+          <a:p>
+            <a:pPr algn="ctr"/>
+            <a:r>
+              <a:rPr lang="en-US" sz="1400" dirty="0"/>
+              <a:t>NMAP</a:t>
+            </a:r>
+            <a:endParaRPr lang="en-SG" sz="1400" dirty="0"/>
+          </a:p>
+        </p:txBody>
+      </p:sp>
+      <p:sp>
+        <p:nvSpPr>
+          <p:cNvPr id="10" name="TextBox 9">
+            <a:extLst>
+              <a:ext uri="{FF2B5EF4-FFF2-40B4-BE49-F238E27FC236}">
+                <a16:creationId xmlns:a16="http://schemas.microsoft.com/office/drawing/2014/main" id="{BFD41933-3369-9DAA-D432-CF39EF1224D0}"/>
+              </a:ext>
+            </a:extLst>
+          </p:cNvPr>
+          <p:cNvSpPr txBox="1"/>
+          <p:nvPr/>
+        </p:nvSpPr>
+        <p:spPr>
+          <a:xfrm>
+            <a:off x="7322344" y="910613"/>
+            <a:ext cx="347472" cy="369332"/>
+          </a:xfrm>
+          <a:prstGeom prst="rect">
+            <a:avLst/>
+          </a:prstGeom>
+          <a:noFill/>
+        </p:spPr>
+        <p:txBody>
+          <a:bodyPr wrap="square" rtlCol="0">
+            <a:spAutoFit/>
+          </a:bodyPr>
+          <a:lstStyle/>
+          <a:p>
+            <a:r>
+              <a:rPr lang="en-SG" dirty="0"/>
+              <a:t>…</a:t>
+            </a:r>
+          </a:p>
+        </p:txBody>
+      </p:sp>
+      <p:sp>
+        <p:nvSpPr>
+          <p:cNvPr id="11" name="Rectangle 10">
+            <a:extLst>
+              <a:ext uri="{FF2B5EF4-FFF2-40B4-BE49-F238E27FC236}">
+                <a16:creationId xmlns:a16="http://schemas.microsoft.com/office/drawing/2014/main" id="{FA750F18-FE39-5E1D-C734-D52E601AC876}"/>
+              </a:ext>
+            </a:extLst>
+          </p:cNvPr>
+          <p:cNvSpPr/>
+          <p:nvPr/>
+        </p:nvSpPr>
+        <p:spPr>
+          <a:xfrm>
+            <a:off x="4543529" y="1436078"/>
+            <a:ext cx="818105" cy="316524"/>
+          </a:xfrm>
+          <a:prstGeom prst="rect">
+            <a:avLst/>
+          </a:prstGeom>
+          <a:solidFill>
+            <a:schemeClr val="accent6">
+              <a:lumMod val="75000"/>
+            </a:schemeClr>
+          </a:solidFill>
+        </p:spPr>
+        <p:style>
+          <a:lnRef idx="2">
+            <a:schemeClr val="accent1">
+              <a:shade val="50000"/>
+            </a:schemeClr>
+          </a:lnRef>
+          <a:fillRef idx="1">
+            <a:schemeClr val="accent1"/>
+          </a:fillRef>
+          <a:effectRef idx="0">
+            <a:schemeClr val="accent1"/>
+          </a:effectRef>
+          <a:fontRef idx="minor">
+            <a:schemeClr val="lt1"/>
+          </a:fontRef>
+        </p:style>
+        <p:txBody>
+          <a:bodyPr rtlCol="0" anchor="ctr"/>
+          <a:lstStyle/>
+          <a:p>
+            <a:pPr algn="ctr"/>
+            <a:r>
+              <a:rPr lang="en-US" sz="1400" dirty="0"/>
+              <a:t>http curl</a:t>
+            </a:r>
+            <a:endParaRPr lang="en-SG" sz="1400" dirty="0"/>
+          </a:p>
+        </p:txBody>
+      </p:sp>
+      <p:sp>
+        <p:nvSpPr>
+          <p:cNvPr id="12" name="Rectangle 11">
+            <a:extLst>
+              <a:ext uri="{FF2B5EF4-FFF2-40B4-BE49-F238E27FC236}">
+                <a16:creationId xmlns:a16="http://schemas.microsoft.com/office/drawing/2014/main" id="{6F06B7D2-DEF8-16BB-1E15-8FEF8B735E1E}"/>
+              </a:ext>
+            </a:extLst>
+          </p:cNvPr>
+          <p:cNvSpPr/>
+          <p:nvPr/>
+        </p:nvSpPr>
+        <p:spPr>
+          <a:xfrm>
+            <a:off x="5492678" y="1436078"/>
+            <a:ext cx="973856" cy="316524"/>
+          </a:xfrm>
+          <a:prstGeom prst="rect">
+            <a:avLst/>
+          </a:prstGeom>
+          <a:solidFill>
+            <a:schemeClr val="accent6">
+              <a:lumMod val="75000"/>
+            </a:schemeClr>
+          </a:solidFill>
+        </p:spPr>
+        <p:style>
+          <a:lnRef idx="2">
+            <a:schemeClr val="accent1">
+              <a:shade val="50000"/>
+            </a:schemeClr>
+          </a:lnRef>
+          <a:fillRef idx="1">
+            <a:schemeClr val="accent1"/>
+          </a:fillRef>
+          <a:effectRef idx="0">
+            <a:schemeClr val="accent1"/>
+          </a:effectRef>
+          <a:fontRef idx="minor">
+            <a:schemeClr val="lt1"/>
+          </a:fontRef>
+        </p:style>
+        <p:txBody>
+          <a:bodyPr rtlCol="0" anchor="ctr"/>
+          <a:lstStyle/>
+          <a:p>
+            <a:pPr algn="ctr"/>
+            <a:r>
+              <a:rPr lang="en-US" sz="1400" dirty="0"/>
+              <a:t>https curl</a:t>
+            </a:r>
+            <a:endParaRPr lang="en-SG" sz="1400" dirty="0"/>
+          </a:p>
+        </p:txBody>
+      </p:sp>
+      <p:sp>
+        <p:nvSpPr>
+          <p:cNvPr id="13" name="Rectangle 12">
+            <a:extLst>
+              <a:ext uri="{FF2B5EF4-FFF2-40B4-BE49-F238E27FC236}">
+                <a16:creationId xmlns:a16="http://schemas.microsoft.com/office/drawing/2014/main" id="{93B5A5E1-7BB4-D87D-AC1A-48E6CB3ED30C}"/>
+              </a:ext>
+            </a:extLst>
+          </p:cNvPr>
+          <p:cNvSpPr/>
+          <p:nvPr/>
+        </p:nvSpPr>
+        <p:spPr>
+          <a:xfrm>
+            <a:off x="6845652" y="1411807"/>
+            <a:ext cx="571919" cy="316524"/>
+          </a:xfrm>
+          <a:prstGeom prst="rect">
+            <a:avLst/>
+          </a:prstGeom>
+          <a:solidFill>
+            <a:schemeClr val="accent6">
+              <a:lumMod val="75000"/>
+            </a:schemeClr>
+          </a:solidFill>
+        </p:spPr>
+        <p:style>
+          <a:lnRef idx="2">
+            <a:schemeClr val="accent1">
+              <a:shade val="50000"/>
+            </a:schemeClr>
+          </a:lnRef>
+          <a:fillRef idx="1">
+            <a:schemeClr val="accent1"/>
+          </a:fillRef>
+          <a:effectRef idx="0">
+            <a:schemeClr val="accent1"/>
+          </a:effectRef>
+          <a:fontRef idx="minor">
+            <a:schemeClr val="lt1"/>
+          </a:fontRef>
+        </p:style>
+        <p:txBody>
+          <a:bodyPr rtlCol="0" anchor="ctr"/>
+          <a:lstStyle/>
+          <a:p>
+            <a:pPr algn="ctr"/>
+            <a:r>
+              <a:rPr lang="en-US" sz="1400" dirty="0" err="1"/>
+              <a:t>ssh</a:t>
+            </a:r>
+            <a:endParaRPr lang="en-SG" sz="1400" dirty="0"/>
+          </a:p>
+        </p:txBody>
+      </p:sp>
+      <p:sp>
+        <p:nvSpPr>
+          <p:cNvPr id="14" name="TextBox 13">
+            <a:extLst>
+              <a:ext uri="{FF2B5EF4-FFF2-40B4-BE49-F238E27FC236}">
+                <a16:creationId xmlns:a16="http://schemas.microsoft.com/office/drawing/2014/main" id="{296EEF9B-853D-F9BE-436C-246B4DF2E639}"/>
+              </a:ext>
+            </a:extLst>
+          </p:cNvPr>
+          <p:cNvSpPr txBox="1"/>
+          <p:nvPr/>
+        </p:nvSpPr>
+        <p:spPr>
+          <a:xfrm>
+            <a:off x="6498180" y="1433121"/>
+            <a:ext cx="347472" cy="369332"/>
+          </a:xfrm>
+          <a:prstGeom prst="rect">
+            <a:avLst/>
+          </a:prstGeom>
+          <a:noFill/>
+        </p:spPr>
+        <p:txBody>
+          <a:bodyPr wrap="square" rtlCol="0">
+            <a:spAutoFit/>
+          </a:bodyPr>
+          <a:lstStyle/>
+          <a:p>
+            <a:r>
+              <a:rPr lang="en-SG" dirty="0"/>
+              <a:t>…</a:t>
+            </a:r>
+          </a:p>
+        </p:txBody>
+      </p:sp>
+      <p:cxnSp>
+        <p:nvCxnSpPr>
+          <p:cNvPr id="16" name="Straight Arrow Connector 15">
+            <a:extLst>
+              <a:ext uri="{FF2B5EF4-FFF2-40B4-BE49-F238E27FC236}">
+                <a16:creationId xmlns:a16="http://schemas.microsoft.com/office/drawing/2014/main" id="{6DB2076E-46A1-59A8-1E54-4E355DC96593}"/>
+              </a:ext>
+            </a:extLst>
+          </p:cNvPr>
+          <p:cNvCxnSpPr>
+            <a:stCxn id="6" idx="2"/>
+          </p:cNvCxnSpPr>
+          <p:nvPr/>
+        </p:nvCxnSpPr>
+        <p:spPr>
+          <a:xfrm flipH="1">
+            <a:off x="5180762" y="1195756"/>
+            <a:ext cx="1" cy="1306286"/>
+          </a:xfrm>
+          <a:prstGeom prst="straightConnector1">
+            <a:avLst/>
+          </a:prstGeom>
+          <a:ln>
+            <a:tailEnd type="triangle"/>
+          </a:ln>
+        </p:spPr>
+        <p:style>
+          <a:lnRef idx="1">
+            <a:schemeClr val="accent1"/>
+          </a:lnRef>
+          <a:fillRef idx="0">
+            <a:schemeClr val="accent1"/>
+          </a:fillRef>
+          <a:effectRef idx="0">
+            <a:schemeClr val="accent1"/>
+          </a:effectRef>
+          <a:fontRef idx="minor">
+            <a:schemeClr val="tx1"/>
+          </a:fontRef>
+        </p:style>
+      </p:cxnSp>
+      <p:cxnSp>
+        <p:nvCxnSpPr>
+          <p:cNvPr id="18" name="Straight Arrow Connector 17">
+            <a:extLst>
+              <a:ext uri="{FF2B5EF4-FFF2-40B4-BE49-F238E27FC236}">
+                <a16:creationId xmlns:a16="http://schemas.microsoft.com/office/drawing/2014/main" id="{A13B95B4-64CF-0B6C-A5D9-D072B3A1457A}"/>
+              </a:ext>
+            </a:extLst>
+          </p:cNvPr>
+          <p:cNvCxnSpPr/>
+          <p:nvPr/>
+        </p:nvCxnSpPr>
+        <p:spPr>
+          <a:xfrm flipH="1">
+            <a:off x="5492678" y="1195756"/>
+            <a:ext cx="772887" cy="1306286"/>
+          </a:xfrm>
+          <a:prstGeom prst="straightConnector1">
+            <a:avLst/>
+          </a:prstGeom>
+          <a:ln>
+            <a:tailEnd type="triangle"/>
+          </a:ln>
+        </p:spPr>
+        <p:style>
+          <a:lnRef idx="1">
+            <a:schemeClr val="accent1"/>
+          </a:lnRef>
+          <a:fillRef idx="0">
+            <a:schemeClr val="accent1"/>
+          </a:fillRef>
+          <a:effectRef idx="0">
+            <a:schemeClr val="accent1"/>
+          </a:effectRef>
+          <a:fontRef idx="minor">
+            <a:schemeClr val="tx1"/>
+          </a:fontRef>
+        </p:style>
+      </p:cxnSp>
+      <p:cxnSp>
+        <p:nvCxnSpPr>
+          <p:cNvPr id="20" name="Straight Arrow Connector 19">
+            <a:extLst>
+              <a:ext uri="{FF2B5EF4-FFF2-40B4-BE49-F238E27FC236}">
+                <a16:creationId xmlns:a16="http://schemas.microsoft.com/office/drawing/2014/main" id="{D7867838-E64E-EA5C-BA62-25C070F28F46}"/>
+              </a:ext>
+            </a:extLst>
+          </p:cNvPr>
+          <p:cNvCxnSpPr>
+            <a:stCxn id="9" idx="2"/>
+          </p:cNvCxnSpPr>
+          <p:nvPr/>
+        </p:nvCxnSpPr>
+        <p:spPr>
+          <a:xfrm flipH="1">
+            <a:off x="5879121" y="1195756"/>
+            <a:ext cx="2152462" cy="1286190"/>
+          </a:xfrm>
+          <a:prstGeom prst="straightConnector1">
+            <a:avLst/>
+          </a:prstGeom>
+          <a:ln>
+            <a:tailEnd type="triangle"/>
+          </a:ln>
+        </p:spPr>
+        <p:style>
+          <a:lnRef idx="1">
+            <a:schemeClr val="accent1"/>
+          </a:lnRef>
+          <a:fillRef idx="0">
+            <a:schemeClr val="accent1"/>
+          </a:fillRef>
+          <a:effectRef idx="0">
+            <a:schemeClr val="accent1"/>
+          </a:effectRef>
+          <a:fontRef idx="minor">
+            <a:schemeClr val="tx1"/>
+          </a:fontRef>
+        </p:style>
+      </p:cxnSp>
+      <p:sp>
+        <p:nvSpPr>
+          <p:cNvPr id="21" name="Rectangle 20">
+            <a:extLst>
+              <a:ext uri="{FF2B5EF4-FFF2-40B4-BE49-F238E27FC236}">
+                <a16:creationId xmlns:a16="http://schemas.microsoft.com/office/drawing/2014/main" id="{D0A637ED-B5A5-B303-A4AE-2A4803520D74}"/>
+              </a:ext>
+            </a:extLst>
+          </p:cNvPr>
+          <p:cNvSpPr/>
+          <p:nvPr/>
+        </p:nvSpPr>
+        <p:spPr>
+          <a:xfrm>
+            <a:off x="4771709" y="2547260"/>
+            <a:ext cx="2032005" cy="316524"/>
+          </a:xfrm>
+          <a:prstGeom prst="rect">
+            <a:avLst/>
+          </a:prstGeom>
+        </p:spPr>
+        <p:style>
+          <a:lnRef idx="2">
+            <a:schemeClr val="accent1">
+              <a:shade val="50000"/>
+            </a:schemeClr>
+          </a:lnRef>
+          <a:fillRef idx="1">
+            <a:schemeClr val="accent1"/>
+          </a:fillRef>
+          <a:effectRef idx="0">
+            <a:schemeClr val="accent1"/>
+          </a:effectRef>
+          <a:fontRef idx="minor">
+            <a:schemeClr val="lt1"/>
+          </a:fontRef>
+        </p:style>
+        <p:txBody>
+          <a:bodyPr rtlCol="0" anchor="ctr"/>
+          <a:lstStyle/>
+          <a:p>
+            <a:pPr algn="ctr"/>
+            <a:r>
+              <a:rPr lang="en-US" sz="1400" dirty="0"/>
+              <a:t>NTP service probe action</a:t>
+            </a:r>
+            <a:endParaRPr lang="en-SG" sz="1400" dirty="0"/>
+          </a:p>
+        </p:txBody>
+      </p:sp>
+      <p:cxnSp>
+        <p:nvCxnSpPr>
+          <p:cNvPr id="23" name="Straight Arrow Connector 22">
+            <a:extLst>
+              <a:ext uri="{FF2B5EF4-FFF2-40B4-BE49-F238E27FC236}">
+                <a16:creationId xmlns:a16="http://schemas.microsoft.com/office/drawing/2014/main" id="{17489C62-C3B7-9328-DFD7-90560C2A4C12}"/>
+              </a:ext>
+            </a:extLst>
+          </p:cNvPr>
+          <p:cNvCxnSpPr/>
+          <p:nvPr/>
+        </p:nvCxnSpPr>
+        <p:spPr>
+          <a:xfrm>
+            <a:off x="4672484" y="1752602"/>
+            <a:ext cx="0" cy="1623646"/>
+          </a:xfrm>
+          <a:prstGeom prst="straightConnector1">
+            <a:avLst/>
+          </a:prstGeom>
+          <a:ln>
+            <a:tailEnd type="triangle"/>
+          </a:ln>
+        </p:spPr>
+        <p:style>
+          <a:lnRef idx="1">
+            <a:schemeClr val="accent1"/>
+          </a:lnRef>
+          <a:fillRef idx="0">
+            <a:schemeClr val="accent1"/>
+          </a:fillRef>
+          <a:effectRef idx="0">
+            <a:schemeClr val="accent1"/>
+          </a:effectRef>
+          <a:fontRef idx="minor">
+            <a:schemeClr val="tx1"/>
+          </a:fontRef>
+        </p:style>
+      </p:cxnSp>
+      <p:cxnSp>
+        <p:nvCxnSpPr>
+          <p:cNvPr id="25" name="Straight Arrow Connector 24">
+            <a:extLst>
+              <a:ext uri="{FF2B5EF4-FFF2-40B4-BE49-F238E27FC236}">
+                <a16:creationId xmlns:a16="http://schemas.microsoft.com/office/drawing/2014/main" id="{6245B563-BE69-8620-A05E-B6260D12991C}"/>
+              </a:ext>
+            </a:extLst>
+          </p:cNvPr>
+          <p:cNvCxnSpPr/>
+          <p:nvPr/>
+        </p:nvCxnSpPr>
+        <p:spPr>
+          <a:xfrm flipH="1">
+            <a:off x="5361634" y="1195756"/>
+            <a:ext cx="903931" cy="2080009"/>
+          </a:xfrm>
+          <a:prstGeom prst="straightConnector1">
+            <a:avLst/>
+          </a:prstGeom>
+          <a:ln>
+            <a:tailEnd type="triangle"/>
+          </a:ln>
+        </p:spPr>
+        <p:style>
+          <a:lnRef idx="1">
+            <a:schemeClr val="accent1"/>
+          </a:lnRef>
+          <a:fillRef idx="0">
+            <a:schemeClr val="accent1"/>
+          </a:fillRef>
+          <a:effectRef idx="0">
+            <a:schemeClr val="accent1"/>
+          </a:effectRef>
+          <a:fontRef idx="minor">
+            <a:schemeClr val="tx1"/>
+          </a:fontRef>
+        </p:style>
+      </p:cxnSp>
+      <p:cxnSp>
+        <p:nvCxnSpPr>
+          <p:cNvPr id="26" name="Straight Arrow Connector 25">
+            <a:extLst>
+              <a:ext uri="{FF2B5EF4-FFF2-40B4-BE49-F238E27FC236}">
+                <a16:creationId xmlns:a16="http://schemas.microsoft.com/office/drawing/2014/main" id="{C7B0F537-2124-BF52-B676-DC0295123C93}"/>
+              </a:ext>
+            </a:extLst>
+          </p:cNvPr>
+          <p:cNvCxnSpPr>
+            <a:cxnSpLocks/>
+          </p:cNvCxnSpPr>
+          <p:nvPr/>
+        </p:nvCxnSpPr>
+        <p:spPr>
+          <a:xfrm flipH="1">
+            <a:off x="6249039" y="1195755"/>
+            <a:ext cx="1814190" cy="2180493"/>
+          </a:xfrm>
+          <a:prstGeom prst="straightConnector1">
+            <a:avLst/>
+          </a:prstGeom>
+          <a:ln>
+            <a:tailEnd type="triangle"/>
+          </a:ln>
+        </p:spPr>
+        <p:style>
+          <a:lnRef idx="1">
+            <a:schemeClr val="accent1"/>
+          </a:lnRef>
+          <a:fillRef idx="0">
+            <a:schemeClr val="accent1"/>
+          </a:fillRef>
+          <a:effectRef idx="0">
+            <a:schemeClr val="accent1"/>
+          </a:effectRef>
+          <a:fontRef idx="minor">
+            <a:schemeClr val="tx1"/>
+          </a:fontRef>
+        </p:style>
+      </p:cxnSp>
+      <p:sp>
+        <p:nvSpPr>
+          <p:cNvPr id="28" name="Rectangle 27">
+            <a:extLst>
+              <a:ext uri="{FF2B5EF4-FFF2-40B4-BE49-F238E27FC236}">
+                <a16:creationId xmlns:a16="http://schemas.microsoft.com/office/drawing/2014/main" id="{7DBFF9A7-A29A-1B98-E506-35E3323417D1}"/>
+              </a:ext>
+            </a:extLst>
+          </p:cNvPr>
+          <p:cNvSpPr/>
+          <p:nvPr/>
+        </p:nvSpPr>
+        <p:spPr>
+          <a:xfrm>
+            <a:off x="4629443" y="3417671"/>
+            <a:ext cx="2344112" cy="316524"/>
+          </a:xfrm>
+          <a:prstGeom prst="rect">
+            <a:avLst/>
+          </a:prstGeom>
+        </p:spPr>
+        <p:style>
+          <a:lnRef idx="2">
+            <a:schemeClr val="accent1">
+              <a:shade val="50000"/>
+            </a:schemeClr>
+          </a:lnRef>
+          <a:fillRef idx="1">
+            <a:schemeClr val="accent1"/>
+          </a:fillRef>
+          <a:effectRef idx="0">
+            <a:schemeClr val="accent1"/>
+          </a:effectRef>
+          <a:fontRef idx="minor">
+            <a:schemeClr val="lt1"/>
+          </a:fontRef>
+        </p:style>
+        <p:txBody>
+          <a:bodyPr rtlCol="0" anchor="ctr"/>
+          <a:lstStyle/>
+          <a:p>
+            <a:pPr algn="ctr"/>
+            <a:r>
+              <a:rPr lang="en-US" sz="1400" dirty="0"/>
+              <a:t>Web service probe action</a:t>
+            </a:r>
+            <a:endParaRPr lang="en-SG" sz="1400" dirty="0"/>
+          </a:p>
+        </p:txBody>
+      </p:sp>
+      <p:sp>
+        <p:nvSpPr>
+          <p:cNvPr id="29" name="TextBox 28">
+            <a:extLst>
+              <a:ext uri="{FF2B5EF4-FFF2-40B4-BE49-F238E27FC236}">
+                <a16:creationId xmlns:a16="http://schemas.microsoft.com/office/drawing/2014/main" id="{79443446-6CE7-9615-6C25-426C6D12BFBE}"/>
+              </a:ext>
+            </a:extLst>
+          </p:cNvPr>
+          <p:cNvSpPr txBox="1"/>
+          <p:nvPr/>
+        </p:nvSpPr>
+        <p:spPr>
+          <a:xfrm>
+            <a:off x="4466171" y="544788"/>
+            <a:ext cx="2724999" cy="276999"/>
+          </a:xfrm>
+          <a:prstGeom prst="rect">
+            <a:avLst/>
+          </a:prstGeom>
+          <a:noFill/>
+        </p:spPr>
+        <p:txBody>
+          <a:bodyPr wrap="square" rtlCol="0">
+            <a:spAutoFit/>
+          </a:bodyPr>
+          <a:lstStyle/>
+          <a:p>
+            <a:r>
+              <a:rPr lang="en-US" sz="1200" b="1" dirty="0"/>
+              <a:t>Network service Probe function repo</a:t>
+            </a:r>
+            <a:endParaRPr lang="en-SG" sz="1200" b="1" dirty="0"/>
+          </a:p>
+        </p:txBody>
+      </p:sp>
+      <p:sp>
+        <p:nvSpPr>
+          <p:cNvPr id="30" name="Rectangle 29">
+            <a:extLst>
+              <a:ext uri="{FF2B5EF4-FFF2-40B4-BE49-F238E27FC236}">
+                <a16:creationId xmlns:a16="http://schemas.microsoft.com/office/drawing/2014/main" id="{436454B0-8729-3820-DD08-CD7D47D2E994}"/>
+              </a:ext>
+            </a:extLst>
+          </p:cNvPr>
+          <p:cNvSpPr/>
+          <p:nvPr/>
+        </p:nvSpPr>
+        <p:spPr>
+          <a:xfrm>
+            <a:off x="8858701" y="594990"/>
+            <a:ext cx="3089065" cy="1306286"/>
+          </a:xfrm>
+          <a:prstGeom prst="rect">
+            <a:avLst/>
+          </a:prstGeom>
+        </p:spPr>
+        <p:style>
+          <a:lnRef idx="2">
+            <a:schemeClr val="accent6"/>
+          </a:lnRef>
+          <a:fillRef idx="1">
+            <a:schemeClr val="lt1"/>
+          </a:fillRef>
+          <a:effectRef idx="0">
+            <a:schemeClr val="accent6"/>
+          </a:effectRef>
+          <a:fontRef idx="minor">
+            <a:schemeClr val="dk1"/>
+          </a:fontRef>
+        </p:style>
+        <p:txBody>
+          <a:bodyPr rtlCol="0" anchor="ctr"/>
+          <a:lstStyle/>
+          <a:p>
+            <a:pPr algn="ctr"/>
+            <a:endParaRPr lang="en-SG"/>
+          </a:p>
+        </p:txBody>
+      </p:sp>
+      <p:sp>
+        <p:nvSpPr>
+          <p:cNvPr id="31" name="TextBox 30">
+            <a:extLst>
+              <a:ext uri="{FF2B5EF4-FFF2-40B4-BE49-F238E27FC236}">
+                <a16:creationId xmlns:a16="http://schemas.microsoft.com/office/drawing/2014/main" id="{D9EB95F3-F6EB-7FFA-A7E1-8B6DCA678B8D}"/>
+              </a:ext>
+            </a:extLst>
+          </p:cNvPr>
+          <p:cNvSpPr txBox="1"/>
+          <p:nvPr/>
+        </p:nvSpPr>
+        <p:spPr>
+          <a:xfrm>
+            <a:off x="8948860" y="544788"/>
+            <a:ext cx="2337544" cy="276999"/>
+          </a:xfrm>
+          <a:prstGeom prst="rect">
+            <a:avLst/>
+          </a:prstGeom>
+          <a:noFill/>
+        </p:spPr>
+        <p:txBody>
+          <a:bodyPr wrap="square" rtlCol="0">
+            <a:spAutoFit/>
+          </a:bodyPr>
+          <a:lstStyle/>
+          <a:p>
+            <a:r>
+              <a:rPr lang="en-US" sz="1200" b="1" dirty="0"/>
+              <a:t>Local service Probe function repo </a:t>
+            </a:r>
+            <a:endParaRPr lang="en-SG" sz="1200" b="1" dirty="0"/>
+          </a:p>
+        </p:txBody>
+      </p:sp>
+      <p:sp>
+        <p:nvSpPr>
+          <p:cNvPr id="32" name="Rectangle 31">
+            <a:extLst>
+              <a:ext uri="{FF2B5EF4-FFF2-40B4-BE49-F238E27FC236}">
+                <a16:creationId xmlns:a16="http://schemas.microsoft.com/office/drawing/2014/main" id="{95C6D793-B671-971F-8930-E16204BFFC1A}"/>
+              </a:ext>
+            </a:extLst>
+          </p:cNvPr>
+          <p:cNvSpPr/>
+          <p:nvPr/>
+        </p:nvSpPr>
+        <p:spPr>
+          <a:xfrm>
+            <a:off x="9121282" y="882359"/>
+            <a:ext cx="571919" cy="316524"/>
+          </a:xfrm>
+          <a:prstGeom prst="rect">
+            <a:avLst/>
+          </a:prstGeom>
+          <a:solidFill>
+            <a:schemeClr val="accent6">
+              <a:lumMod val="75000"/>
+            </a:schemeClr>
+          </a:solidFill>
+        </p:spPr>
+        <p:style>
+          <a:lnRef idx="2">
+            <a:schemeClr val="accent1">
+              <a:shade val="50000"/>
+            </a:schemeClr>
+          </a:lnRef>
+          <a:fillRef idx="1">
+            <a:schemeClr val="accent1"/>
+          </a:fillRef>
+          <a:effectRef idx="0">
+            <a:schemeClr val="accent1"/>
+          </a:effectRef>
+          <a:fontRef idx="minor">
+            <a:schemeClr val="lt1"/>
+          </a:fontRef>
+        </p:style>
+        <p:txBody>
+          <a:bodyPr rtlCol="0" anchor="ctr"/>
+          <a:lstStyle/>
+          <a:p>
+            <a:pPr algn="ctr"/>
+            <a:r>
+              <a:rPr lang="en-US" sz="1400" dirty="0"/>
+              <a:t>CPU</a:t>
+            </a:r>
+            <a:endParaRPr lang="en-SG" sz="1400" dirty="0"/>
+          </a:p>
+        </p:txBody>
+      </p:sp>
+      <p:sp>
+        <p:nvSpPr>
+          <p:cNvPr id="33" name="Rectangle 32">
+            <a:extLst>
+              <a:ext uri="{FF2B5EF4-FFF2-40B4-BE49-F238E27FC236}">
+                <a16:creationId xmlns:a16="http://schemas.microsoft.com/office/drawing/2014/main" id="{F6DF0705-65C1-B8D1-0F5D-D2A2CB265B22}"/>
+              </a:ext>
+            </a:extLst>
+          </p:cNvPr>
+          <p:cNvSpPr/>
+          <p:nvPr/>
+        </p:nvSpPr>
+        <p:spPr>
+          <a:xfrm>
+            <a:off x="9865623" y="882359"/>
+            <a:ext cx="571919" cy="316524"/>
+          </a:xfrm>
+          <a:prstGeom prst="rect">
+            <a:avLst/>
+          </a:prstGeom>
+          <a:solidFill>
+            <a:schemeClr val="accent6">
+              <a:lumMod val="75000"/>
+            </a:schemeClr>
+          </a:solidFill>
+        </p:spPr>
+        <p:style>
+          <a:lnRef idx="2">
+            <a:schemeClr val="accent1">
+              <a:shade val="50000"/>
+            </a:schemeClr>
+          </a:lnRef>
+          <a:fillRef idx="1">
+            <a:schemeClr val="accent1"/>
+          </a:fillRef>
+          <a:effectRef idx="0">
+            <a:schemeClr val="accent1"/>
+          </a:effectRef>
+          <a:fontRef idx="minor">
+            <a:schemeClr val="lt1"/>
+          </a:fontRef>
+        </p:style>
+        <p:txBody>
+          <a:bodyPr rtlCol="0" anchor="ctr"/>
+          <a:lstStyle/>
+          <a:p>
+            <a:pPr algn="ctr"/>
+            <a:r>
+              <a:rPr lang="en-US" sz="1400" dirty="0"/>
+              <a:t>RAM</a:t>
+            </a:r>
+            <a:endParaRPr lang="en-SG" sz="1400" dirty="0"/>
+          </a:p>
+        </p:txBody>
+      </p:sp>
+      <p:sp>
+        <p:nvSpPr>
+          <p:cNvPr id="34" name="Rectangle 33">
+            <a:extLst>
+              <a:ext uri="{FF2B5EF4-FFF2-40B4-BE49-F238E27FC236}">
+                <a16:creationId xmlns:a16="http://schemas.microsoft.com/office/drawing/2014/main" id="{6D169258-68CD-5701-E244-2D790A33513C}"/>
+              </a:ext>
+            </a:extLst>
+          </p:cNvPr>
+          <p:cNvSpPr/>
+          <p:nvPr/>
+        </p:nvSpPr>
+        <p:spPr>
+          <a:xfrm>
+            <a:off x="10583312" y="875630"/>
+            <a:ext cx="571919" cy="316524"/>
+          </a:xfrm>
+          <a:prstGeom prst="rect">
+            <a:avLst/>
+          </a:prstGeom>
+          <a:solidFill>
+            <a:schemeClr val="accent6">
+              <a:lumMod val="75000"/>
+            </a:schemeClr>
+          </a:solidFill>
+        </p:spPr>
+        <p:style>
+          <a:lnRef idx="2">
+            <a:schemeClr val="accent1">
+              <a:shade val="50000"/>
+            </a:schemeClr>
+          </a:lnRef>
+          <a:fillRef idx="1">
+            <a:schemeClr val="accent1"/>
+          </a:fillRef>
+          <a:effectRef idx="0">
+            <a:schemeClr val="accent1"/>
+          </a:effectRef>
+          <a:fontRef idx="minor">
+            <a:schemeClr val="lt1"/>
+          </a:fontRef>
+        </p:style>
+        <p:txBody>
+          <a:bodyPr rtlCol="0" anchor="ctr"/>
+          <a:lstStyle/>
+          <a:p>
+            <a:pPr algn="ctr"/>
+            <a:r>
+              <a:rPr lang="en-US" sz="1400" dirty="0"/>
+              <a:t>File</a:t>
+            </a:r>
+            <a:endParaRPr lang="en-SG" sz="1400" dirty="0"/>
+          </a:p>
+        </p:txBody>
+      </p:sp>
+      <p:sp>
+        <p:nvSpPr>
+          <p:cNvPr id="35" name="Rectangle 34">
+            <a:extLst>
+              <a:ext uri="{FF2B5EF4-FFF2-40B4-BE49-F238E27FC236}">
+                <a16:creationId xmlns:a16="http://schemas.microsoft.com/office/drawing/2014/main" id="{6063466B-0AAF-B8B7-79F6-3482841443C1}"/>
+              </a:ext>
+            </a:extLst>
+          </p:cNvPr>
+          <p:cNvSpPr/>
+          <p:nvPr/>
+        </p:nvSpPr>
+        <p:spPr>
+          <a:xfrm>
+            <a:off x="11286404" y="882359"/>
+            <a:ext cx="571919" cy="316524"/>
+          </a:xfrm>
+          <a:prstGeom prst="rect">
+            <a:avLst/>
+          </a:prstGeom>
+          <a:solidFill>
+            <a:schemeClr val="accent6">
+              <a:lumMod val="75000"/>
+            </a:schemeClr>
+          </a:solidFill>
+        </p:spPr>
+        <p:style>
+          <a:lnRef idx="2">
+            <a:schemeClr val="accent1">
+              <a:shade val="50000"/>
+            </a:schemeClr>
+          </a:lnRef>
+          <a:fillRef idx="1">
+            <a:schemeClr val="accent1"/>
+          </a:fillRef>
+          <a:effectRef idx="0">
+            <a:schemeClr val="accent1"/>
+          </a:effectRef>
+          <a:fontRef idx="minor">
+            <a:schemeClr val="lt1"/>
+          </a:fontRef>
+        </p:style>
+        <p:txBody>
+          <a:bodyPr rtlCol="0" anchor="ctr"/>
+          <a:lstStyle/>
+          <a:p>
+            <a:pPr algn="ctr"/>
+            <a:r>
+              <a:rPr lang="en-US" sz="1400" dirty="0"/>
+              <a:t>File</a:t>
+            </a:r>
+            <a:endParaRPr lang="en-SG" sz="1400" dirty="0"/>
+          </a:p>
+        </p:txBody>
+      </p:sp>
+      <p:sp>
+        <p:nvSpPr>
+          <p:cNvPr id="36" name="Rectangle 35">
+            <a:extLst>
+              <a:ext uri="{FF2B5EF4-FFF2-40B4-BE49-F238E27FC236}">
+                <a16:creationId xmlns:a16="http://schemas.microsoft.com/office/drawing/2014/main" id="{BBEC0305-742E-5E92-5B60-64D33EBE8CA7}"/>
+              </a:ext>
+            </a:extLst>
+          </p:cNvPr>
+          <p:cNvSpPr/>
+          <p:nvPr/>
+        </p:nvSpPr>
+        <p:spPr>
+          <a:xfrm>
+            <a:off x="9051827" y="1380702"/>
+            <a:ext cx="896785" cy="316524"/>
+          </a:xfrm>
+          <a:prstGeom prst="rect">
+            <a:avLst/>
+          </a:prstGeom>
+          <a:solidFill>
+            <a:schemeClr val="accent6">
+              <a:lumMod val="75000"/>
+            </a:schemeClr>
+          </a:solidFill>
+        </p:spPr>
+        <p:style>
+          <a:lnRef idx="2">
+            <a:schemeClr val="accent1">
+              <a:shade val="50000"/>
+            </a:schemeClr>
+          </a:lnRef>
+          <a:fillRef idx="1">
+            <a:schemeClr val="accent1"/>
+          </a:fillRef>
+          <a:effectRef idx="0">
+            <a:schemeClr val="accent1"/>
+          </a:effectRef>
+          <a:fontRef idx="minor">
+            <a:schemeClr val="lt1"/>
+          </a:fontRef>
+        </p:style>
+        <p:txBody>
+          <a:bodyPr rtlCol="0" anchor="ctr"/>
+          <a:lstStyle/>
+          <a:p>
+            <a:pPr algn="ctr"/>
+            <a:r>
+              <a:rPr lang="en-US" sz="1400" dirty="0"/>
+              <a:t>Processes </a:t>
+            </a:r>
+            <a:endParaRPr lang="en-SG" sz="1400" dirty="0"/>
+          </a:p>
+        </p:txBody>
+      </p:sp>
+      <p:sp>
+        <p:nvSpPr>
+          <p:cNvPr id="37" name="Rectangle 36">
+            <a:extLst>
+              <a:ext uri="{FF2B5EF4-FFF2-40B4-BE49-F238E27FC236}">
+                <a16:creationId xmlns:a16="http://schemas.microsoft.com/office/drawing/2014/main" id="{191B9AD0-4DAD-904E-7250-F7919C29401A}"/>
+              </a:ext>
+            </a:extLst>
+          </p:cNvPr>
+          <p:cNvSpPr/>
+          <p:nvPr/>
+        </p:nvSpPr>
+        <p:spPr>
+          <a:xfrm>
+            <a:off x="10110431" y="1380702"/>
+            <a:ext cx="673637" cy="316524"/>
+          </a:xfrm>
+          <a:prstGeom prst="rect">
+            <a:avLst/>
+          </a:prstGeom>
+          <a:solidFill>
+            <a:schemeClr val="accent6">
+              <a:lumMod val="75000"/>
+            </a:schemeClr>
+          </a:solidFill>
+        </p:spPr>
+        <p:style>
+          <a:lnRef idx="2">
+            <a:schemeClr val="accent1">
+              <a:shade val="50000"/>
+            </a:schemeClr>
+          </a:lnRef>
+          <a:fillRef idx="1">
+            <a:schemeClr val="accent1"/>
+          </a:fillRef>
+          <a:effectRef idx="0">
+            <a:schemeClr val="accent1"/>
+          </a:effectRef>
+          <a:fontRef idx="minor">
+            <a:schemeClr val="lt1"/>
+          </a:fontRef>
+        </p:style>
+        <p:txBody>
+          <a:bodyPr rtlCol="0" anchor="ctr"/>
+          <a:lstStyle/>
+          <a:p>
+            <a:pPr algn="ctr"/>
+            <a:r>
+              <a:rPr lang="en-US" sz="1400" dirty="0"/>
+              <a:t>User  </a:t>
+            </a:r>
+            <a:endParaRPr lang="en-SG" sz="1400" dirty="0"/>
+          </a:p>
+        </p:txBody>
+      </p:sp>
+      <p:sp>
+        <p:nvSpPr>
+          <p:cNvPr id="38" name="Rectangle 37">
+            <a:extLst>
+              <a:ext uri="{FF2B5EF4-FFF2-40B4-BE49-F238E27FC236}">
+                <a16:creationId xmlns:a16="http://schemas.microsoft.com/office/drawing/2014/main" id="{603CAD76-F6C0-D0A8-1852-1FBD636387D6}"/>
+              </a:ext>
+            </a:extLst>
+          </p:cNvPr>
+          <p:cNvSpPr/>
+          <p:nvPr/>
+        </p:nvSpPr>
+        <p:spPr>
+          <a:xfrm>
+            <a:off x="10993184" y="1380702"/>
+            <a:ext cx="851753" cy="339354"/>
+          </a:xfrm>
+          <a:prstGeom prst="rect">
+            <a:avLst/>
+          </a:prstGeom>
+          <a:solidFill>
+            <a:schemeClr val="accent6">
+              <a:lumMod val="75000"/>
+            </a:schemeClr>
+          </a:solidFill>
+        </p:spPr>
+        <p:style>
+          <a:lnRef idx="2">
+            <a:schemeClr val="accent1">
+              <a:shade val="50000"/>
+            </a:schemeClr>
+          </a:lnRef>
+          <a:fillRef idx="1">
+            <a:schemeClr val="accent1"/>
+          </a:fillRef>
+          <a:effectRef idx="0">
+            <a:schemeClr val="accent1"/>
+          </a:effectRef>
+          <a:fontRef idx="minor">
+            <a:schemeClr val="lt1"/>
+          </a:fontRef>
+        </p:style>
+        <p:txBody>
+          <a:bodyPr rtlCol="0" anchor="ctr"/>
+          <a:lstStyle/>
+          <a:p>
+            <a:pPr algn="ctr"/>
+            <a:r>
+              <a:rPr lang="en-US" sz="1400" dirty="0"/>
+              <a:t>System time   </a:t>
+            </a:r>
+            <a:endParaRPr lang="en-SG" sz="1400" dirty="0"/>
+          </a:p>
+        </p:txBody>
+      </p:sp>
+      <p:sp>
+        <p:nvSpPr>
+          <p:cNvPr id="40" name="TextBox 39">
+            <a:extLst>
+              <a:ext uri="{FF2B5EF4-FFF2-40B4-BE49-F238E27FC236}">
+                <a16:creationId xmlns:a16="http://schemas.microsoft.com/office/drawing/2014/main" id="{2CC3D678-E612-52D0-415E-B18622FF1207}"/>
+              </a:ext>
+            </a:extLst>
+          </p:cNvPr>
+          <p:cNvSpPr txBox="1"/>
+          <p:nvPr/>
+        </p:nvSpPr>
+        <p:spPr>
+          <a:xfrm>
+            <a:off x="5534866" y="3588939"/>
+            <a:ext cx="347472" cy="369332"/>
+          </a:xfrm>
+          <a:prstGeom prst="rect">
+            <a:avLst/>
+          </a:prstGeom>
+          <a:noFill/>
+        </p:spPr>
+        <p:txBody>
+          <a:bodyPr wrap="square" rtlCol="0">
+            <a:spAutoFit/>
+          </a:bodyPr>
+          <a:lstStyle/>
+          <a:p>
+            <a:r>
+              <a:rPr lang="en-SG" dirty="0"/>
+              <a:t>…</a:t>
+            </a:r>
+          </a:p>
+        </p:txBody>
+      </p:sp>
+      <p:sp>
+        <p:nvSpPr>
+          <p:cNvPr id="41" name="Rectangle 40">
+            <a:extLst>
+              <a:ext uri="{FF2B5EF4-FFF2-40B4-BE49-F238E27FC236}">
+                <a16:creationId xmlns:a16="http://schemas.microsoft.com/office/drawing/2014/main" id="{2BCBEA27-944D-1CEE-722A-CA3F2CB3C34D}"/>
+              </a:ext>
+            </a:extLst>
+          </p:cNvPr>
+          <p:cNvSpPr/>
+          <p:nvPr/>
+        </p:nvSpPr>
+        <p:spPr>
+          <a:xfrm>
+            <a:off x="4641543" y="4131214"/>
+            <a:ext cx="2344112" cy="316524"/>
+          </a:xfrm>
+          <a:prstGeom prst="rect">
+            <a:avLst/>
+          </a:prstGeom>
+        </p:spPr>
+        <p:style>
+          <a:lnRef idx="2">
+            <a:schemeClr val="accent1">
+              <a:shade val="50000"/>
+            </a:schemeClr>
+          </a:lnRef>
+          <a:fillRef idx="1">
+            <a:schemeClr val="accent1"/>
+          </a:fillRef>
+          <a:effectRef idx="0">
+            <a:schemeClr val="accent1"/>
+          </a:effectRef>
+          <a:fontRef idx="minor">
+            <a:schemeClr val="lt1"/>
+          </a:fontRef>
+        </p:style>
+        <p:txBody>
+          <a:bodyPr rtlCol="0" anchor="ctr"/>
+          <a:lstStyle/>
+          <a:p>
+            <a:pPr algn="ctr"/>
+            <a:r>
+              <a:rPr lang="en-US" sz="1400" dirty="0"/>
+              <a:t>Email service probe action</a:t>
+            </a:r>
+            <a:endParaRPr lang="en-SG" sz="1400" dirty="0"/>
+          </a:p>
+        </p:txBody>
+      </p:sp>
+      <p:sp>
+        <p:nvSpPr>
+          <p:cNvPr id="42" name="Rectangle 41">
+            <a:extLst>
+              <a:ext uri="{FF2B5EF4-FFF2-40B4-BE49-F238E27FC236}">
+                <a16:creationId xmlns:a16="http://schemas.microsoft.com/office/drawing/2014/main" id="{DDD5E9F4-D16D-B33A-DD26-E2E00B854C00}"/>
+              </a:ext>
+            </a:extLst>
+          </p:cNvPr>
+          <p:cNvSpPr/>
+          <p:nvPr/>
+        </p:nvSpPr>
+        <p:spPr>
+          <a:xfrm>
+            <a:off x="7622312" y="1421233"/>
+            <a:ext cx="788389" cy="316524"/>
+          </a:xfrm>
+          <a:prstGeom prst="rect">
+            <a:avLst/>
+          </a:prstGeom>
+          <a:solidFill>
+            <a:schemeClr val="accent6">
+              <a:lumMod val="75000"/>
+            </a:schemeClr>
+          </a:solidFill>
+        </p:spPr>
+        <p:style>
+          <a:lnRef idx="2">
+            <a:schemeClr val="accent1">
+              <a:shade val="50000"/>
+            </a:schemeClr>
+          </a:lnRef>
+          <a:fillRef idx="1">
+            <a:schemeClr val="accent1"/>
+          </a:fillRef>
+          <a:effectRef idx="0">
+            <a:schemeClr val="accent1"/>
+          </a:effectRef>
+          <a:fontRef idx="minor">
+            <a:schemeClr val="lt1"/>
+          </a:fontRef>
+        </p:style>
+        <p:txBody>
+          <a:bodyPr rtlCol="0" anchor="ctr"/>
+          <a:lstStyle/>
+          <a:p>
+            <a:pPr algn="ctr"/>
+            <a:r>
+              <a:rPr lang="en-US" sz="1400" dirty="0"/>
+              <a:t>SMTP</a:t>
+            </a:r>
+            <a:endParaRPr lang="en-SG" sz="1400" dirty="0"/>
+          </a:p>
+        </p:txBody>
+      </p:sp>
+      <p:cxnSp>
+        <p:nvCxnSpPr>
+          <p:cNvPr id="45" name="Straight Arrow Connector 44">
+            <a:extLst>
+              <a:ext uri="{FF2B5EF4-FFF2-40B4-BE49-F238E27FC236}">
+                <a16:creationId xmlns:a16="http://schemas.microsoft.com/office/drawing/2014/main" id="{FB0A7C23-87DA-69A4-694F-581C7BA06FF0}"/>
+              </a:ext>
+            </a:extLst>
+          </p:cNvPr>
+          <p:cNvCxnSpPr/>
+          <p:nvPr/>
+        </p:nvCxnSpPr>
+        <p:spPr>
+          <a:xfrm flipH="1">
+            <a:off x="6803714" y="1752602"/>
+            <a:ext cx="1227869" cy="2378612"/>
+          </a:xfrm>
+          <a:prstGeom prst="straightConnector1">
+            <a:avLst/>
+          </a:prstGeom>
+          <a:ln>
+            <a:tailEnd type="triangle"/>
+          </a:ln>
+        </p:spPr>
+        <p:style>
+          <a:lnRef idx="1">
+            <a:schemeClr val="accent1"/>
+          </a:lnRef>
+          <a:fillRef idx="0">
+            <a:schemeClr val="accent1"/>
+          </a:fillRef>
+          <a:effectRef idx="0">
+            <a:schemeClr val="accent1"/>
+          </a:effectRef>
+          <a:fontRef idx="minor">
+            <a:schemeClr val="tx1"/>
+          </a:fontRef>
+        </p:style>
+      </p:cxnSp>
+      <p:cxnSp>
+        <p:nvCxnSpPr>
+          <p:cNvPr id="46" name="Straight Arrow Connector 45">
+            <a:extLst>
+              <a:ext uri="{FF2B5EF4-FFF2-40B4-BE49-F238E27FC236}">
+                <a16:creationId xmlns:a16="http://schemas.microsoft.com/office/drawing/2014/main" id="{B3C986BD-54AB-D32D-BBB9-BE89EA7C9215}"/>
+              </a:ext>
+            </a:extLst>
+          </p:cNvPr>
+          <p:cNvCxnSpPr>
+            <a:cxnSpLocks/>
+            <a:stCxn id="13" idx="2"/>
+          </p:cNvCxnSpPr>
+          <p:nvPr/>
+        </p:nvCxnSpPr>
+        <p:spPr>
+          <a:xfrm flipH="1">
+            <a:off x="6597578" y="1728331"/>
+            <a:ext cx="534034" cy="2378612"/>
+          </a:xfrm>
+          <a:prstGeom prst="straightConnector1">
+            <a:avLst/>
+          </a:prstGeom>
+          <a:ln>
+            <a:tailEnd type="triangle"/>
+          </a:ln>
+        </p:spPr>
+        <p:style>
+          <a:lnRef idx="1">
+            <a:schemeClr val="accent1"/>
+          </a:lnRef>
+          <a:fillRef idx="0">
+            <a:schemeClr val="accent1"/>
+          </a:fillRef>
+          <a:effectRef idx="0">
+            <a:schemeClr val="accent1"/>
+          </a:effectRef>
+          <a:fontRef idx="minor">
+            <a:schemeClr val="tx1"/>
+          </a:fontRef>
+        </p:style>
+      </p:cxnSp>
+      <p:cxnSp>
+        <p:nvCxnSpPr>
+          <p:cNvPr id="49" name="Straight Arrow Connector 48">
+            <a:extLst>
+              <a:ext uri="{FF2B5EF4-FFF2-40B4-BE49-F238E27FC236}">
+                <a16:creationId xmlns:a16="http://schemas.microsoft.com/office/drawing/2014/main" id="{5E7B1DB6-B03F-286E-D611-59D75808F434}"/>
+              </a:ext>
+            </a:extLst>
+          </p:cNvPr>
+          <p:cNvCxnSpPr>
+            <a:cxnSpLocks/>
+            <a:stCxn id="12" idx="2"/>
+          </p:cNvCxnSpPr>
+          <p:nvPr/>
+        </p:nvCxnSpPr>
+        <p:spPr>
+          <a:xfrm flipH="1">
+            <a:off x="5833448" y="1752602"/>
+            <a:ext cx="146158" cy="2354341"/>
+          </a:xfrm>
+          <a:prstGeom prst="straightConnector1">
+            <a:avLst/>
+          </a:prstGeom>
+          <a:ln>
+            <a:tailEnd type="triangle"/>
+          </a:ln>
+        </p:spPr>
+        <p:style>
+          <a:lnRef idx="1">
+            <a:schemeClr val="accent1"/>
+          </a:lnRef>
+          <a:fillRef idx="0">
+            <a:schemeClr val="accent1"/>
+          </a:fillRef>
+          <a:effectRef idx="0">
+            <a:schemeClr val="accent1"/>
+          </a:effectRef>
+          <a:fontRef idx="minor">
+            <a:schemeClr val="tx1"/>
+          </a:fontRef>
+        </p:style>
+      </p:cxnSp>
+      <p:sp>
+        <p:nvSpPr>
+          <p:cNvPr id="52" name="TextBox 51">
+            <a:extLst>
+              <a:ext uri="{FF2B5EF4-FFF2-40B4-BE49-F238E27FC236}">
+                <a16:creationId xmlns:a16="http://schemas.microsoft.com/office/drawing/2014/main" id="{3678D1AD-6AC1-13F6-A87C-4F7B780E370D}"/>
+              </a:ext>
+            </a:extLst>
+          </p:cNvPr>
+          <p:cNvSpPr txBox="1"/>
+          <p:nvPr/>
+        </p:nvSpPr>
+        <p:spPr>
+          <a:xfrm>
+            <a:off x="3244571" y="2967990"/>
+            <a:ext cx="908957" cy="307777"/>
+          </a:xfrm>
+          <a:prstGeom prst="rect">
+            <a:avLst/>
+          </a:prstGeom>
+          <a:noFill/>
+          <a:ln>
+            <a:solidFill>
+              <a:schemeClr val="tx1"/>
+            </a:solidFill>
+          </a:ln>
+        </p:spPr>
+        <p:txBody>
+          <a:bodyPr wrap="square" rtlCol="0">
+            <a:spAutoFit/>
+          </a:bodyPr>
+          <a:lstStyle/>
+          <a:p>
+            <a:r>
+              <a:rPr lang="en-US" sz="1400" dirty="0"/>
+              <a:t>Target IP</a:t>
+            </a:r>
+            <a:endParaRPr lang="en-SG" sz="1400" dirty="0"/>
+          </a:p>
+        </p:txBody>
+      </p:sp>
+      <p:sp>
+        <p:nvSpPr>
+          <p:cNvPr id="53" name="TextBox 52">
+            <a:extLst>
+              <a:ext uri="{FF2B5EF4-FFF2-40B4-BE49-F238E27FC236}">
+                <a16:creationId xmlns:a16="http://schemas.microsoft.com/office/drawing/2014/main" id="{F9E899E3-2B5E-ECE0-D37C-D0649296BFE2}"/>
+              </a:ext>
+            </a:extLst>
+          </p:cNvPr>
+          <p:cNvSpPr txBox="1"/>
+          <p:nvPr/>
+        </p:nvSpPr>
+        <p:spPr>
+          <a:xfrm>
+            <a:off x="3218951" y="3435051"/>
+            <a:ext cx="1247219" cy="523220"/>
+          </a:xfrm>
+          <a:prstGeom prst="rect">
+            <a:avLst/>
+          </a:prstGeom>
+          <a:noFill/>
+          <a:ln>
+            <a:solidFill>
+              <a:schemeClr val="tx1"/>
+            </a:solidFill>
+          </a:ln>
+        </p:spPr>
+        <p:txBody>
+          <a:bodyPr wrap="square" rtlCol="0">
+            <a:spAutoFit/>
+          </a:bodyPr>
+          <a:lstStyle/>
+          <a:p>
+            <a:r>
+              <a:rPr lang="en-US" sz="1400" dirty="0"/>
+              <a:t>Prober config profile</a:t>
+            </a:r>
+            <a:endParaRPr lang="en-SG" sz="1400" dirty="0"/>
+          </a:p>
+        </p:txBody>
+      </p:sp>
+      <p:sp>
+        <p:nvSpPr>
+          <p:cNvPr id="54" name="TextBox 53">
+            <a:extLst>
+              <a:ext uri="{FF2B5EF4-FFF2-40B4-BE49-F238E27FC236}">
+                <a16:creationId xmlns:a16="http://schemas.microsoft.com/office/drawing/2014/main" id="{7AD9E224-6DF1-A01C-E9AF-10D675DAC6FE}"/>
+              </a:ext>
+            </a:extLst>
+          </p:cNvPr>
+          <p:cNvSpPr txBox="1"/>
+          <p:nvPr/>
+        </p:nvSpPr>
+        <p:spPr>
+          <a:xfrm>
+            <a:off x="3088533" y="2235760"/>
+            <a:ext cx="978483" cy="523220"/>
+          </a:xfrm>
+          <a:prstGeom prst="rect">
+            <a:avLst/>
+          </a:prstGeom>
+          <a:noFill/>
+        </p:spPr>
+        <p:txBody>
+          <a:bodyPr wrap="square" rtlCol="0">
+            <a:spAutoFit/>
+          </a:bodyPr>
+          <a:lstStyle/>
+          <a:p>
+            <a:r>
+              <a:rPr lang="en-US" sz="1400" b="1" dirty="0"/>
+              <a:t>Network Prober</a:t>
+            </a:r>
+            <a:r>
+              <a:rPr lang="en-US" sz="1400" dirty="0"/>
+              <a:t> </a:t>
+            </a:r>
+            <a:endParaRPr lang="en-SG" sz="1400" dirty="0"/>
+          </a:p>
+        </p:txBody>
+      </p:sp>
+      <p:sp>
+        <p:nvSpPr>
+          <p:cNvPr id="55" name="Arrow: Right 54">
+            <a:extLst>
+              <a:ext uri="{FF2B5EF4-FFF2-40B4-BE49-F238E27FC236}">
+                <a16:creationId xmlns:a16="http://schemas.microsoft.com/office/drawing/2014/main" id="{52FE5EA9-8A51-A854-F11F-8BEFB98E2672}"/>
+              </a:ext>
+            </a:extLst>
+          </p:cNvPr>
+          <p:cNvSpPr/>
+          <p:nvPr/>
+        </p:nvSpPr>
+        <p:spPr>
+          <a:xfrm>
+            <a:off x="7496080" y="3275765"/>
+            <a:ext cx="2222390" cy="159286"/>
+          </a:xfrm>
+          <a:prstGeom prst="rightArrow">
+            <a:avLst/>
+          </a:prstGeom>
+        </p:spPr>
+        <p:style>
+          <a:lnRef idx="2">
+            <a:schemeClr val="accent1">
+              <a:shade val="50000"/>
+            </a:schemeClr>
+          </a:lnRef>
+          <a:fillRef idx="1">
+            <a:schemeClr val="accent1"/>
+          </a:fillRef>
+          <a:effectRef idx="0">
+            <a:schemeClr val="accent1"/>
+          </a:effectRef>
+          <a:fontRef idx="minor">
+            <a:schemeClr val="lt1"/>
+          </a:fontRef>
+        </p:style>
+        <p:txBody>
+          <a:bodyPr rtlCol="0" anchor="ctr"/>
+          <a:lstStyle/>
+          <a:p>
+            <a:pPr algn="ctr"/>
+            <a:endParaRPr lang="en-SG"/>
+          </a:p>
+        </p:txBody>
+      </p:sp>
+      <p:sp>
+        <p:nvSpPr>
+          <p:cNvPr id="56" name="Rectangle 55">
+            <a:extLst>
+              <a:ext uri="{FF2B5EF4-FFF2-40B4-BE49-F238E27FC236}">
+                <a16:creationId xmlns:a16="http://schemas.microsoft.com/office/drawing/2014/main" id="{9F2E183C-4E34-F5B7-6A40-A8F41421FF0B}"/>
+              </a:ext>
+            </a:extLst>
+          </p:cNvPr>
+          <p:cNvSpPr/>
+          <p:nvPr/>
+        </p:nvSpPr>
+        <p:spPr>
+          <a:xfrm>
+            <a:off x="3088533" y="4944662"/>
+            <a:ext cx="4365578" cy="354118"/>
+          </a:xfrm>
+          <a:prstGeom prst="rect">
+            <a:avLst/>
+          </a:prstGeom>
+          <a:ln w="28575">
+            <a:solidFill>
+              <a:srgbClr val="0070C0"/>
+            </a:solidFill>
+            <a:prstDash val="sysDot"/>
+          </a:ln>
+        </p:spPr>
+        <p:style>
+          <a:lnRef idx="2">
+            <a:schemeClr val="accent6"/>
+          </a:lnRef>
+          <a:fillRef idx="1">
+            <a:schemeClr val="lt1"/>
+          </a:fillRef>
+          <a:effectRef idx="0">
+            <a:schemeClr val="accent6"/>
+          </a:effectRef>
+          <a:fontRef idx="minor">
+            <a:schemeClr val="dk1"/>
+          </a:fontRef>
+        </p:style>
+        <p:txBody>
+          <a:bodyPr rtlCol="0" anchor="ctr"/>
+          <a:lstStyle/>
+          <a:p>
+            <a:pPr algn="ctr"/>
+            <a:endParaRPr lang="en-SG" dirty="0"/>
+          </a:p>
+        </p:txBody>
+      </p:sp>
+      <p:sp>
+        <p:nvSpPr>
+          <p:cNvPr id="57" name="TextBox 56">
+            <a:extLst>
+              <a:ext uri="{FF2B5EF4-FFF2-40B4-BE49-F238E27FC236}">
+                <a16:creationId xmlns:a16="http://schemas.microsoft.com/office/drawing/2014/main" id="{076871B3-1338-5771-2EF5-D23BCA2372C1}"/>
+              </a:ext>
+            </a:extLst>
+          </p:cNvPr>
+          <p:cNvSpPr txBox="1"/>
+          <p:nvPr/>
+        </p:nvSpPr>
+        <p:spPr>
+          <a:xfrm>
+            <a:off x="5187394" y="4525944"/>
+            <a:ext cx="347472" cy="369332"/>
+          </a:xfrm>
+          <a:prstGeom prst="rect">
+            <a:avLst/>
+          </a:prstGeom>
+          <a:noFill/>
+        </p:spPr>
+        <p:txBody>
+          <a:bodyPr wrap="square" rtlCol="0">
+            <a:spAutoFit/>
+          </a:bodyPr>
+          <a:lstStyle/>
+          <a:p>
+            <a:r>
+              <a:rPr lang="en-SG" dirty="0"/>
+              <a:t>…</a:t>
+            </a:r>
+          </a:p>
+        </p:txBody>
+      </p:sp>
+      <p:sp>
+        <p:nvSpPr>
+          <p:cNvPr id="58" name="TextBox 57">
+            <a:extLst>
+              <a:ext uri="{FF2B5EF4-FFF2-40B4-BE49-F238E27FC236}">
+                <a16:creationId xmlns:a16="http://schemas.microsoft.com/office/drawing/2014/main" id="{0B7CC534-6C0B-F50A-AEE5-F81E952E95D5}"/>
+              </a:ext>
+            </a:extLst>
+          </p:cNvPr>
+          <p:cNvSpPr txBox="1"/>
+          <p:nvPr/>
+        </p:nvSpPr>
+        <p:spPr>
+          <a:xfrm>
+            <a:off x="3091446" y="4952444"/>
+            <a:ext cx="1771956" cy="307777"/>
+          </a:xfrm>
+          <a:prstGeom prst="rect">
+            <a:avLst/>
+          </a:prstGeom>
+          <a:noFill/>
+        </p:spPr>
+        <p:txBody>
+          <a:bodyPr wrap="square" rtlCol="0">
+            <a:spAutoFit/>
+          </a:bodyPr>
+          <a:lstStyle/>
+          <a:p>
+            <a:r>
+              <a:rPr lang="en-US" sz="1400" b="1" dirty="0"/>
+              <a:t>Network Probers</a:t>
+            </a:r>
+            <a:r>
+              <a:rPr lang="en-US" sz="1400" dirty="0"/>
+              <a:t> </a:t>
+            </a:r>
+            <a:endParaRPr lang="en-SG" sz="1400" dirty="0"/>
+          </a:p>
+        </p:txBody>
+      </p:sp>
+      <p:sp>
+        <p:nvSpPr>
+          <p:cNvPr id="59" name="Arrow: Right 58">
+            <a:extLst>
+              <a:ext uri="{FF2B5EF4-FFF2-40B4-BE49-F238E27FC236}">
+                <a16:creationId xmlns:a16="http://schemas.microsoft.com/office/drawing/2014/main" id="{E06BCA21-745E-A088-AEA0-26EAB835CC68}"/>
+              </a:ext>
+            </a:extLst>
+          </p:cNvPr>
+          <p:cNvSpPr/>
+          <p:nvPr/>
+        </p:nvSpPr>
+        <p:spPr>
+          <a:xfrm>
+            <a:off x="7517923" y="5019154"/>
+            <a:ext cx="2200547" cy="159286"/>
+          </a:xfrm>
+          <a:prstGeom prst="rightArrow">
+            <a:avLst/>
+          </a:prstGeom>
+        </p:spPr>
+        <p:style>
+          <a:lnRef idx="2">
+            <a:schemeClr val="accent1">
+              <a:shade val="50000"/>
+            </a:schemeClr>
+          </a:lnRef>
+          <a:fillRef idx="1">
+            <a:schemeClr val="accent1"/>
+          </a:fillRef>
+          <a:effectRef idx="0">
+            <a:schemeClr val="accent1"/>
+          </a:effectRef>
+          <a:fontRef idx="minor">
+            <a:schemeClr val="lt1"/>
+          </a:fontRef>
+        </p:style>
+        <p:txBody>
+          <a:bodyPr rtlCol="0" anchor="ctr"/>
+          <a:lstStyle/>
+          <a:p>
+            <a:pPr algn="ctr"/>
+            <a:endParaRPr lang="en-SG"/>
+          </a:p>
+        </p:txBody>
+      </p:sp>
+      <p:sp>
+        <p:nvSpPr>
+          <p:cNvPr id="60" name="Arrow: Right 59">
+            <a:extLst>
+              <a:ext uri="{FF2B5EF4-FFF2-40B4-BE49-F238E27FC236}">
+                <a16:creationId xmlns:a16="http://schemas.microsoft.com/office/drawing/2014/main" id="{BECD5DD0-2D31-F6E3-1063-4C9EE0A07792}"/>
+              </a:ext>
+            </a:extLst>
+          </p:cNvPr>
+          <p:cNvSpPr/>
+          <p:nvPr/>
+        </p:nvSpPr>
+        <p:spPr>
+          <a:xfrm>
+            <a:off x="7496080" y="4949140"/>
+            <a:ext cx="1987686" cy="159286"/>
+          </a:xfrm>
+          <a:prstGeom prst="rightArrow">
+            <a:avLst/>
+          </a:prstGeom>
+        </p:spPr>
+        <p:style>
+          <a:lnRef idx="2">
+            <a:schemeClr val="accent1">
+              <a:shade val="50000"/>
+            </a:schemeClr>
+          </a:lnRef>
+          <a:fillRef idx="1">
+            <a:schemeClr val="accent1"/>
+          </a:fillRef>
+          <a:effectRef idx="0">
+            <a:schemeClr val="accent1"/>
+          </a:effectRef>
+          <a:fontRef idx="minor">
+            <a:schemeClr val="lt1"/>
+          </a:fontRef>
+        </p:style>
+        <p:txBody>
+          <a:bodyPr rtlCol="0" anchor="ctr"/>
+          <a:lstStyle/>
+          <a:p>
+            <a:pPr algn="ctr"/>
+            <a:endParaRPr lang="en-SG"/>
+          </a:p>
+        </p:txBody>
+      </p:sp>
+      <p:pic>
+        <p:nvPicPr>
+          <p:cNvPr id="61" name="Picture 60">
+            <a:extLst>
+              <a:ext uri="{FF2B5EF4-FFF2-40B4-BE49-F238E27FC236}">
+                <a16:creationId xmlns:a16="http://schemas.microsoft.com/office/drawing/2014/main" id="{94BF1788-9B52-EB57-1795-844AB8A603DC}"/>
+              </a:ext>
+            </a:extLst>
+          </p:cNvPr>
+          <p:cNvPicPr>
+            <a:picLocks noChangeAspect="1"/>
+          </p:cNvPicPr>
+          <p:nvPr/>
+        </p:nvPicPr>
+        <p:blipFill>
+          <a:blip r:embed="rId2"/>
+          <a:stretch>
+            <a:fillRect/>
+          </a:stretch>
+        </p:blipFill>
+        <p:spPr>
+          <a:xfrm>
+            <a:off x="9817628" y="3125357"/>
+            <a:ext cx="585606" cy="428417"/>
+          </a:xfrm>
+          <a:prstGeom prst="rect">
+            <a:avLst/>
+          </a:prstGeom>
+          <a:ln w="3175">
+            <a:solidFill>
+              <a:schemeClr val="tx1"/>
+            </a:solidFill>
+          </a:ln>
+        </p:spPr>
+      </p:pic>
+      <p:pic>
+        <p:nvPicPr>
+          <p:cNvPr id="62" name="Picture 61">
+            <a:extLst>
+              <a:ext uri="{FF2B5EF4-FFF2-40B4-BE49-F238E27FC236}">
+                <a16:creationId xmlns:a16="http://schemas.microsoft.com/office/drawing/2014/main" id="{68C7BFC3-8536-DDFE-D598-A15EB73240DD}"/>
+              </a:ext>
+            </a:extLst>
+          </p:cNvPr>
+          <p:cNvPicPr>
+            <a:picLocks noChangeAspect="1"/>
+          </p:cNvPicPr>
+          <p:nvPr/>
+        </p:nvPicPr>
+        <p:blipFill>
+          <a:blip r:embed="rId2"/>
+          <a:stretch>
+            <a:fillRect/>
+          </a:stretch>
+        </p:blipFill>
+        <p:spPr>
+          <a:xfrm>
+            <a:off x="9865623" y="4834208"/>
+            <a:ext cx="585606" cy="428417"/>
+          </a:xfrm>
+          <a:prstGeom prst="rect">
+            <a:avLst/>
+          </a:prstGeom>
+          <a:ln w="3175">
+            <a:solidFill>
+              <a:schemeClr val="tx1"/>
+            </a:solidFill>
+          </a:ln>
+        </p:spPr>
+      </p:pic>
+      <p:sp>
+        <p:nvSpPr>
+          <p:cNvPr id="63" name="Rectangle 62">
+            <a:extLst>
+              <a:ext uri="{FF2B5EF4-FFF2-40B4-BE49-F238E27FC236}">
+                <a16:creationId xmlns:a16="http://schemas.microsoft.com/office/drawing/2014/main" id="{F21CE164-8006-C42F-6280-E32569831164}"/>
+              </a:ext>
+            </a:extLst>
+          </p:cNvPr>
+          <p:cNvSpPr/>
+          <p:nvPr/>
+        </p:nvSpPr>
+        <p:spPr>
+          <a:xfrm>
+            <a:off x="3099574" y="5499610"/>
+            <a:ext cx="4365578" cy="317380"/>
+          </a:xfrm>
+          <a:prstGeom prst="rect">
+            <a:avLst/>
+          </a:prstGeom>
+          <a:ln w="28575">
+            <a:solidFill>
+              <a:schemeClr val="accent6">
+                <a:lumMod val="75000"/>
+              </a:schemeClr>
+            </a:solidFill>
+            <a:prstDash val="sysDot"/>
+          </a:ln>
+        </p:spPr>
+        <p:style>
+          <a:lnRef idx="2">
+            <a:schemeClr val="accent6"/>
+          </a:lnRef>
+          <a:fillRef idx="1">
+            <a:schemeClr val="lt1"/>
+          </a:fillRef>
+          <a:effectRef idx="0">
+            <a:schemeClr val="accent6"/>
+          </a:effectRef>
+          <a:fontRef idx="minor">
+            <a:schemeClr val="dk1"/>
+          </a:fontRef>
+        </p:style>
+        <p:txBody>
+          <a:bodyPr rtlCol="0" anchor="ctr"/>
+          <a:lstStyle/>
+          <a:p>
+            <a:pPr algn="ctr"/>
+            <a:endParaRPr lang="en-SG" dirty="0"/>
+          </a:p>
+        </p:txBody>
+      </p:sp>
+      <p:sp>
+        <p:nvSpPr>
+          <p:cNvPr id="64" name="TextBox 63">
+            <a:extLst>
+              <a:ext uri="{FF2B5EF4-FFF2-40B4-BE49-F238E27FC236}">
+                <a16:creationId xmlns:a16="http://schemas.microsoft.com/office/drawing/2014/main" id="{AA040866-DBBB-1EE9-EC47-3D60296DA27C}"/>
+              </a:ext>
+            </a:extLst>
+          </p:cNvPr>
+          <p:cNvSpPr txBox="1"/>
+          <p:nvPr/>
+        </p:nvSpPr>
+        <p:spPr>
+          <a:xfrm>
+            <a:off x="3099574" y="5500845"/>
+            <a:ext cx="1675694" cy="307777"/>
+          </a:xfrm>
+          <a:prstGeom prst="rect">
+            <a:avLst/>
+          </a:prstGeom>
+          <a:noFill/>
+        </p:spPr>
+        <p:txBody>
+          <a:bodyPr wrap="square" rtlCol="0">
+            <a:spAutoFit/>
+          </a:bodyPr>
+          <a:lstStyle/>
+          <a:p>
+            <a:r>
+              <a:rPr lang="en-US" sz="1400" b="1" dirty="0"/>
+              <a:t>Local Prober</a:t>
+            </a:r>
+            <a:r>
+              <a:rPr lang="en-US" sz="1400" dirty="0"/>
+              <a:t> </a:t>
+            </a:r>
+            <a:endParaRPr lang="en-SG" sz="1400" dirty="0"/>
+          </a:p>
+        </p:txBody>
+      </p:sp>
+      <p:cxnSp>
+        <p:nvCxnSpPr>
+          <p:cNvPr id="65" name="Straight Arrow Connector 64">
+            <a:extLst>
+              <a:ext uri="{FF2B5EF4-FFF2-40B4-BE49-F238E27FC236}">
+                <a16:creationId xmlns:a16="http://schemas.microsoft.com/office/drawing/2014/main" id="{5EF203BE-AE06-858C-47F6-A6D18AC62FCE}"/>
+              </a:ext>
+            </a:extLst>
+          </p:cNvPr>
+          <p:cNvCxnSpPr>
+            <a:cxnSpLocks/>
+          </p:cNvCxnSpPr>
+          <p:nvPr/>
+        </p:nvCxnSpPr>
+        <p:spPr>
+          <a:xfrm flipH="1">
+            <a:off x="6962263" y="1674478"/>
+            <a:ext cx="2365265" cy="4026956"/>
+          </a:xfrm>
+          <a:prstGeom prst="straightConnector1">
+            <a:avLst/>
+          </a:prstGeom>
+          <a:ln>
+            <a:solidFill>
+              <a:schemeClr val="accent6">
+                <a:lumMod val="75000"/>
+              </a:schemeClr>
+            </a:solidFill>
+            <a:tailEnd type="triangle"/>
+          </a:ln>
+        </p:spPr>
+        <p:style>
+          <a:lnRef idx="1">
+            <a:schemeClr val="accent1"/>
+          </a:lnRef>
+          <a:fillRef idx="0">
+            <a:schemeClr val="accent1"/>
+          </a:fillRef>
+          <a:effectRef idx="0">
+            <a:schemeClr val="accent1"/>
+          </a:effectRef>
+          <a:fontRef idx="minor">
+            <a:schemeClr val="tx1"/>
+          </a:fontRef>
+        </p:style>
+      </p:cxnSp>
+      <p:cxnSp>
+        <p:nvCxnSpPr>
+          <p:cNvPr id="67" name="Straight Arrow Connector 66">
+            <a:extLst>
+              <a:ext uri="{FF2B5EF4-FFF2-40B4-BE49-F238E27FC236}">
+                <a16:creationId xmlns:a16="http://schemas.microsoft.com/office/drawing/2014/main" id="{8373DAC7-7198-12F7-67C2-A864A4EEC9D9}"/>
+              </a:ext>
+            </a:extLst>
+          </p:cNvPr>
+          <p:cNvCxnSpPr>
+            <a:cxnSpLocks/>
+          </p:cNvCxnSpPr>
+          <p:nvPr/>
+        </p:nvCxnSpPr>
+        <p:spPr>
+          <a:xfrm flipH="1">
+            <a:off x="7181858" y="1694335"/>
+            <a:ext cx="3275837" cy="4007099"/>
+          </a:xfrm>
+          <a:prstGeom prst="straightConnector1">
+            <a:avLst/>
+          </a:prstGeom>
+          <a:ln>
+            <a:solidFill>
+              <a:schemeClr val="accent6">
+                <a:lumMod val="75000"/>
+              </a:schemeClr>
+            </a:solidFill>
+            <a:tailEnd type="triangle"/>
+          </a:ln>
+        </p:spPr>
+        <p:style>
+          <a:lnRef idx="1">
+            <a:schemeClr val="accent1"/>
+          </a:lnRef>
+          <a:fillRef idx="0">
+            <a:schemeClr val="accent1"/>
+          </a:fillRef>
+          <a:effectRef idx="0">
+            <a:schemeClr val="accent1"/>
+          </a:effectRef>
+          <a:fontRef idx="minor">
+            <a:schemeClr val="tx1"/>
+          </a:fontRef>
+        </p:style>
+      </p:cxnSp>
+      <p:sp>
+        <p:nvSpPr>
+          <p:cNvPr id="79" name="Rectangle 78">
+            <a:extLst>
+              <a:ext uri="{FF2B5EF4-FFF2-40B4-BE49-F238E27FC236}">
+                <a16:creationId xmlns:a16="http://schemas.microsoft.com/office/drawing/2014/main" id="{0B20E767-E9B1-652A-8487-940F38220C4D}"/>
+              </a:ext>
+            </a:extLst>
+          </p:cNvPr>
+          <p:cNvSpPr/>
+          <p:nvPr/>
+        </p:nvSpPr>
+        <p:spPr>
+          <a:xfrm>
+            <a:off x="1266850" y="3148646"/>
+            <a:ext cx="1446963" cy="381838"/>
+          </a:xfrm>
+          <a:prstGeom prst="rect">
+            <a:avLst/>
+          </a:prstGeom>
+        </p:spPr>
+        <p:style>
+          <a:lnRef idx="2">
+            <a:schemeClr val="accent1">
+              <a:shade val="50000"/>
+            </a:schemeClr>
+          </a:lnRef>
+          <a:fillRef idx="1">
+            <a:schemeClr val="accent1"/>
+          </a:fillRef>
+          <a:effectRef idx="0">
+            <a:schemeClr val="accent1"/>
+          </a:effectRef>
+          <a:fontRef idx="minor">
+            <a:schemeClr val="lt1"/>
+          </a:fontRef>
+        </p:style>
+        <p:txBody>
+          <a:bodyPr rtlCol="0" anchor="ctr"/>
+          <a:lstStyle/>
+          <a:p>
+            <a:pPr algn="ctr"/>
+            <a:r>
+              <a:rPr lang="en-US" sz="1400" dirty="0"/>
+              <a:t>Data manager</a:t>
+            </a:r>
+            <a:endParaRPr lang="en-SG" sz="1400" dirty="0"/>
+          </a:p>
+        </p:txBody>
+      </p:sp>
+      <p:sp>
+        <p:nvSpPr>
+          <p:cNvPr id="81" name="TextBox 80">
+            <a:extLst>
+              <a:ext uri="{FF2B5EF4-FFF2-40B4-BE49-F238E27FC236}">
+                <a16:creationId xmlns:a16="http://schemas.microsoft.com/office/drawing/2014/main" id="{9D32850A-B07C-9E0B-8FEF-21D37A711156}"/>
+              </a:ext>
+            </a:extLst>
+          </p:cNvPr>
+          <p:cNvSpPr txBox="1"/>
+          <p:nvPr/>
+        </p:nvSpPr>
+        <p:spPr>
+          <a:xfrm>
+            <a:off x="9692794" y="2808340"/>
+            <a:ext cx="939095" cy="261610"/>
+          </a:xfrm>
+          <a:prstGeom prst="rect">
+            <a:avLst/>
+          </a:prstGeom>
+          <a:noFill/>
+        </p:spPr>
+        <p:txBody>
+          <a:bodyPr wrap="square" rtlCol="0">
+            <a:spAutoFit/>
+          </a:bodyPr>
+          <a:lstStyle/>
+          <a:p>
+            <a:r>
+              <a:rPr lang="en-US" sz="1100" dirty="0"/>
+              <a:t>Target Node</a:t>
+            </a:r>
+            <a:endParaRPr lang="en-SG" sz="1100" dirty="0"/>
+          </a:p>
+        </p:txBody>
+      </p:sp>
+      <p:sp>
+        <p:nvSpPr>
+          <p:cNvPr id="82" name="TextBox 81">
+            <a:extLst>
+              <a:ext uri="{FF2B5EF4-FFF2-40B4-BE49-F238E27FC236}">
+                <a16:creationId xmlns:a16="http://schemas.microsoft.com/office/drawing/2014/main" id="{DAE6C275-6353-0212-A8FA-2EAD35A5BDB7}"/>
+              </a:ext>
+            </a:extLst>
+          </p:cNvPr>
+          <p:cNvSpPr txBox="1"/>
+          <p:nvPr/>
+        </p:nvSpPr>
+        <p:spPr>
+          <a:xfrm>
+            <a:off x="9674949" y="4517684"/>
+            <a:ext cx="939095" cy="261610"/>
+          </a:xfrm>
+          <a:prstGeom prst="rect">
+            <a:avLst/>
+          </a:prstGeom>
+          <a:noFill/>
+        </p:spPr>
+        <p:txBody>
+          <a:bodyPr wrap="square" rtlCol="0">
+            <a:spAutoFit/>
+          </a:bodyPr>
+          <a:lstStyle/>
+          <a:p>
+            <a:r>
+              <a:rPr lang="en-US" sz="1100" dirty="0"/>
+              <a:t>Target Node</a:t>
+            </a:r>
+            <a:endParaRPr lang="en-SG" sz="1100" dirty="0"/>
+          </a:p>
+        </p:txBody>
+      </p:sp>
+      <p:cxnSp>
+        <p:nvCxnSpPr>
+          <p:cNvPr id="88" name="Straight Arrow Connector 87">
+            <a:extLst>
+              <a:ext uri="{FF2B5EF4-FFF2-40B4-BE49-F238E27FC236}">
+                <a16:creationId xmlns:a16="http://schemas.microsoft.com/office/drawing/2014/main" id="{DD9BE514-3572-BAE4-E2F9-0A2466CBAC15}"/>
+              </a:ext>
+            </a:extLst>
+          </p:cNvPr>
+          <p:cNvCxnSpPr>
+            <a:stCxn id="4" idx="2"/>
+          </p:cNvCxnSpPr>
+          <p:nvPr/>
+        </p:nvCxnSpPr>
+        <p:spPr>
+          <a:xfrm flipH="1">
+            <a:off x="1990331" y="2637693"/>
+            <a:ext cx="1" cy="484185"/>
+          </a:xfrm>
+          <a:prstGeom prst="straightConnector1">
+            <a:avLst/>
+          </a:prstGeom>
+          <a:ln w="19050">
+            <a:headEnd type="triangle"/>
+            <a:tailEnd type="triangle"/>
+          </a:ln>
+        </p:spPr>
+        <p:style>
+          <a:lnRef idx="1">
+            <a:schemeClr val="accent1"/>
+          </a:lnRef>
+          <a:fillRef idx="0">
+            <a:schemeClr val="accent1"/>
+          </a:fillRef>
+          <a:effectRef idx="0">
+            <a:schemeClr val="accent1"/>
+          </a:effectRef>
+          <a:fontRef idx="minor">
+            <a:schemeClr val="tx1"/>
+          </a:fontRef>
+        </p:style>
+      </p:cxnSp>
+      <p:sp>
+        <p:nvSpPr>
+          <p:cNvPr id="89" name="Rectangle 88">
+            <a:extLst>
+              <a:ext uri="{FF2B5EF4-FFF2-40B4-BE49-F238E27FC236}">
+                <a16:creationId xmlns:a16="http://schemas.microsoft.com/office/drawing/2014/main" id="{8E3B1EF6-7EC7-DD10-A767-272BA51418E2}"/>
+              </a:ext>
+            </a:extLst>
+          </p:cNvPr>
+          <p:cNvSpPr/>
+          <p:nvPr/>
+        </p:nvSpPr>
+        <p:spPr>
+          <a:xfrm>
+            <a:off x="72336" y="572759"/>
+            <a:ext cx="1375397" cy="353867"/>
+          </a:xfrm>
+          <a:prstGeom prst="rect">
+            <a:avLst/>
+          </a:prstGeom>
+        </p:spPr>
+        <p:style>
+          <a:lnRef idx="2">
+            <a:schemeClr val="accent1">
+              <a:shade val="50000"/>
+            </a:schemeClr>
+          </a:lnRef>
+          <a:fillRef idx="1">
+            <a:schemeClr val="accent1"/>
+          </a:fillRef>
+          <a:effectRef idx="0">
+            <a:schemeClr val="accent1"/>
+          </a:effectRef>
+          <a:fontRef idx="minor">
+            <a:schemeClr val="lt1"/>
+          </a:fontRef>
+        </p:style>
+        <p:txBody>
+          <a:bodyPr rtlCol="0" anchor="ctr"/>
+          <a:lstStyle/>
+          <a:p>
+            <a:pPr algn="ctr"/>
+            <a:r>
+              <a:rPr lang="en-US" sz="1400" dirty="0"/>
+              <a:t>Prober Agent </a:t>
+            </a:r>
+            <a:endParaRPr lang="en-SG" sz="1400" dirty="0"/>
+          </a:p>
+        </p:txBody>
+      </p:sp>
+      <p:cxnSp>
+        <p:nvCxnSpPr>
+          <p:cNvPr id="94" name="Straight Arrow Connector 93">
+            <a:extLst>
+              <a:ext uri="{FF2B5EF4-FFF2-40B4-BE49-F238E27FC236}">
+                <a16:creationId xmlns:a16="http://schemas.microsoft.com/office/drawing/2014/main" id="{92DD0C0A-48EA-B920-C1C9-0DEAFBE4CA58}"/>
+              </a:ext>
+            </a:extLst>
+          </p:cNvPr>
+          <p:cNvCxnSpPr>
+            <a:cxnSpLocks/>
+            <a:endCxn id="79" idx="3"/>
+          </p:cNvCxnSpPr>
+          <p:nvPr/>
+        </p:nvCxnSpPr>
+        <p:spPr>
+          <a:xfrm flipH="1">
+            <a:off x="2713813" y="3331488"/>
+            <a:ext cx="348539" cy="8077"/>
+          </a:xfrm>
+          <a:prstGeom prst="straightConnector1">
+            <a:avLst/>
+          </a:prstGeom>
+          <a:ln w="19050">
+            <a:tailEnd type="triangle"/>
+          </a:ln>
+        </p:spPr>
+        <p:style>
+          <a:lnRef idx="1">
+            <a:schemeClr val="accent1"/>
+          </a:lnRef>
+          <a:fillRef idx="0">
+            <a:schemeClr val="accent1"/>
+          </a:fillRef>
+          <a:effectRef idx="0">
+            <a:schemeClr val="accent1"/>
+          </a:effectRef>
+          <a:fontRef idx="minor">
+            <a:schemeClr val="tx1"/>
+          </a:fontRef>
+        </p:style>
+      </p:cxnSp>
+      <p:cxnSp>
+        <p:nvCxnSpPr>
+          <p:cNvPr id="96" name="Straight Arrow Connector 95">
+            <a:extLst>
+              <a:ext uri="{FF2B5EF4-FFF2-40B4-BE49-F238E27FC236}">
+                <a16:creationId xmlns:a16="http://schemas.microsoft.com/office/drawing/2014/main" id="{F3EAE48F-A8C0-F426-6CD7-371B9122A696}"/>
+              </a:ext>
+            </a:extLst>
+          </p:cNvPr>
+          <p:cNvCxnSpPr>
+            <a:cxnSpLocks/>
+          </p:cNvCxnSpPr>
+          <p:nvPr/>
+        </p:nvCxnSpPr>
+        <p:spPr>
+          <a:xfrm flipH="1" flipV="1">
+            <a:off x="2605278" y="3619310"/>
+            <a:ext cx="457074" cy="1329830"/>
+          </a:xfrm>
+          <a:prstGeom prst="straightConnector1">
+            <a:avLst/>
+          </a:prstGeom>
+          <a:ln w="19050">
+            <a:tailEnd type="triangle"/>
+          </a:ln>
+        </p:spPr>
+        <p:style>
+          <a:lnRef idx="1">
+            <a:schemeClr val="accent1"/>
+          </a:lnRef>
+          <a:fillRef idx="0">
+            <a:schemeClr val="accent1"/>
+          </a:fillRef>
+          <a:effectRef idx="0">
+            <a:schemeClr val="accent1"/>
+          </a:effectRef>
+          <a:fontRef idx="minor">
+            <a:schemeClr val="tx1"/>
+          </a:fontRef>
+        </p:style>
+      </p:cxnSp>
+      <p:cxnSp>
+        <p:nvCxnSpPr>
+          <p:cNvPr id="98" name="Straight Arrow Connector 97">
+            <a:extLst>
+              <a:ext uri="{FF2B5EF4-FFF2-40B4-BE49-F238E27FC236}">
+                <a16:creationId xmlns:a16="http://schemas.microsoft.com/office/drawing/2014/main" id="{FCE36348-ACD4-E216-FCA4-3205DB156DC8}"/>
+              </a:ext>
+            </a:extLst>
+          </p:cNvPr>
+          <p:cNvCxnSpPr>
+            <a:cxnSpLocks/>
+          </p:cNvCxnSpPr>
+          <p:nvPr/>
+        </p:nvCxnSpPr>
+        <p:spPr>
+          <a:xfrm flipH="1" flipV="1">
+            <a:off x="2325648" y="3580724"/>
+            <a:ext cx="736704" cy="2095945"/>
+          </a:xfrm>
+          <a:prstGeom prst="straightConnector1">
+            <a:avLst/>
+          </a:prstGeom>
+          <a:ln w="19050">
+            <a:tailEnd type="triangle"/>
+          </a:ln>
+        </p:spPr>
+        <p:style>
+          <a:lnRef idx="1">
+            <a:schemeClr val="accent1"/>
+          </a:lnRef>
+          <a:fillRef idx="0">
+            <a:schemeClr val="accent1"/>
+          </a:fillRef>
+          <a:effectRef idx="0">
+            <a:schemeClr val="accent1"/>
+          </a:effectRef>
+          <a:fontRef idx="minor">
+            <a:schemeClr val="tx1"/>
+          </a:fontRef>
+        </p:style>
+      </p:cxnSp>
+      <p:sp>
+        <p:nvSpPr>
+          <p:cNvPr id="100" name="Rectangle 99">
+            <a:extLst>
+              <a:ext uri="{FF2B5EF4-FFF2-40B4-BE49-F238E27FC236}">
+                <a16:creationId xmlns:a16="http://schemas.microsoft.com/office/drawing/2014/main" id="{082B08D1-0C82-EF10-41C7-8152BD582C57}"/>
+              </a:ext>
+            </a:extLst>
+          </p:cNvPr>
+          <p:cNvSpPr/>
+          <p:nvPr/>
+        </p:nvSpPr>
+        <p:spPr>
+          <a:xfrm>
+            <a:off x="3081756" y="5964105"/>
+            <a:ext cx="4365578" cy="354118"/>
+          </a:xfrm>
+          <a:prstGeom prst="rect">
+            <a:avLst/>
+          </a:prstGeom>
+          <a:ln w="28575">
+            <a:solidFill>
+              <a:schemeClr val="tx1"/>
+            </a:solidFill>
+            <a:prstDash val="sysDot"/>
+          </a:ln>
+        </p:spPr>
+        <p:style>
+          <a:lnRef idx="2">
+            <a:schemeClr val="accent6"/>
+          </a:lnRef>
+          <a:fillRef idx="1">
+            <a:schemeClr val="lt1"/>
+          </a:fillRef>
+          <a:effectRef idx="0">
+            <a:schemeClr val="accent6"/>
+          </a:effectRef>
+          <a:fontRef idx="minor">
+            <a:schemeClr val="dk1"/>
+          </a:fontRef>
+        </p:style>
+        <p:txBody>
+          <a:bodyPr rtlCol="0" anchor="ctr"/>
+          <a:lstStyle/>
+          <a:p>
+            <a:pPr algn="ctr"/>
+            <a:endParaRPr lang="en-SG" dirty="0"/>
+          </a:p>
+        </p:txBody>
+      </p:sp>
+      <p:sp>
+        <p:nvSpPr>
+          <p:cNvPr id="101" name="TextBox 100">
+            <a:extLst>
+              <a:ext uri="{FF2B5EF4-FFF2-40B4-BE49-F238E27FC236}">
+                <a16:creationId xmlns:a16="http://schemas.microsoft.com/office/drawing/2014/main" id="{2FAE8B73-8A89-3780-7F25-BD1747D3E7D5}"/>
+              </a:ext>
+            </a:extLst>
+          </p:cNvPr>
+          <p:cNvSpPr txBox="1"/>
+          <p:nvPr/>
+        </p:nvSpPr>
+        <p:spPr>
+          <a:xfrm>
+            <a:off x="3080790" y="5986514"/>
+            <a:ext cx="1675694" cy="307777"/>
+          </a:xfrm>
+          <a:prstGeom prst="rect">
+            <a:avLst/>
+          </a:prstGeom>
+          <a:noFill/>
+        </p:spPr>
+        <p:txBody>
+          <a:bodyPr wrap="square" rtlCol="0">
+            <a:spAutoFit/>
+          </a:bodyPr>
+          <a:lstStyle/>
+          <a:p>
+            <a:r>
+              <a:rPr lang="en-US" sz="1400" b="1"/>
+              <a:t>Children Probers</a:t>
+            </a:r>
+            <a:r>
+              <a:rPr lang="en-US" sz="1400"/>
+              <a:t> </a:t>
+            </a:r>
+            <a:endParaRPr lang="en-SG" sz="1400" dirty="0"/>
+          </a:p>
+        </p:txBody>
+      </p:sp>
+      <p:sp>
+        <p:nvSpPr>
+          <p:cNvPr id="102" name="Rectangle 101">
+            <a:extLst>
+              <a:ext uri="{FF2B5EF4-FFF2-40B4-BE49-F238E27FC236}">
+                <a16:creationId xmlns:a16="http://schemas.microsoft.com/office/drawing/2014/main" id="{2CE16D98-4228-C43B-A90E-88F4829AE731}"/>
+              </a:ext>
+            </a:extLst>
+          </p:cNvPr>
+          <p:cNvSpPr/>
+          <p:nvPr/>
+        </p:nvSpPr>
+        <p:spPr>
+          <a:xfrm>
+            <a:off x="10015132" y="5541708"/>
+            <a:ext cx="1375397" cy="353867"/>
+          </a:xfrm>
+          <a:prstGeom prst="rect">
+            <a:avLst/>
+          </a:prstGeom>
+        </p:spPr>
+        <p:style>
+          <a:lnRef idx="2">
+            <a:schemeClr val="accent1">
+              <a:shade val="50000"/>
+            </a:schemeClr>
+          </a:lnRef>
+          <a:fillRef idx="1">
+            <a:schemeClr val="accent1"/>
+          </a:fillRef>
+          <a:effectRef idx="0">
+            <a:schemeClr val="accent1"/>
+          </a:effectRef>
+          <a:fontRef idx="minor">
+            <a:schemeClr val="lt1"/>
+          </a:fontRef>
+        </p:style>
+        <p:txBody>
+          <a:bodyPr rtlCol="0" anchor="ctr"/>
+          <a:lstStyle/>
+          <a:p>
+            <a:pPr algn="ctr"/>
+            <a:r>
+              <a:rPr lang="en-US" sz="1400" dirty="0"/>
+              <a:t>Prober Agent </a:t>
+            </a:r>
+            <a:endParaRPr lang="en-SG" sz="1400" dirty="0"/>
+          </a:p>
+        </p:txBody>
+      </p:sp>
+      <p:cxnSp>
+        <p:nvCxnSpPr>
+          <p:cNvPr id="107" name="Connector: Elbow 106">
+            <a:extLst>
+              <a:ext uri="{FF2B5EF4-FFF2-40B4-BE49-F238E27FC236}">
+                <a16:creationId xmlns:a16="http://schemas.microsoft.com/office/drawing/2014/main" id="{068A992E-0405-3383-BD15-287712559BDA}"/>
+              </a:ext>
+            </a:extLst>
+          </p:cNvPr>
+          <p:cNvCxnSpPr>
+            <a:stCxn id="89" idx="2"/>
+            <a:endCxn id="79" idx="1"/>
+          </p:cNvCxnSpPr>
+          <p:nvPr/>
+        </p:nvCxnSpPr>
+        <p:spPr>
+          <a:xfrm rot="16200000" flipH="1">
+            <a:off x="-193027" y="1879687"/>
+            <a:ext cx="2412939" cy="506815"/>
+          </a:xfrm>
+          <a:prstGeom prst="bentConnector2">
+            <a:avLst/>
+          </a:prstGeom>
+          <a:ln w="19050">
+            <a:tailEnd type="triangle"/>
+          </a:ln>
+        </p:spPr>
+        <p:style>
+          <a:lnRef idx="1">
+            <a:schemeClr val="accent1"/>
+          </a:lnRef>
+          <a:fillRef idx="0">
+            <a:schemeClr val="accent1"/>
+          </a:fillRef>
+          <a:effectRef idx="0">
+            <a:schemeClr val="accent1"/>
+          </a:effectRef>
+          <a:fontRef idx="minor">
+            <a:schemeClr val="tx1"/>
+          </a:fontRef>
+        </p:style>
+      </p:cxnSp>
+      <p:sp>
+        <p:nvSpPr>
+          <p:cNvPr id="111" name="Rectangle 110">
+            <a:extLst>
+              <a:ext uri="{FF2B5EF4-FFF2-40B4-BE49-F238E27FC236}">
+                <a16:creationId xmlns:a16="http://schemas.microsoft.com/office/drawing/2014/main" id="{51889168-AB71-A601-DD26-50622F27AA69}"/>
+              </a:ext>
+            </a:extLst>
+          </p:cNvPr>
+          <p:cNvSpPr/>
+          <p:nvPr/>
+        </p:nvSpPr>
+        <p:spPr>
+          <a:xfrm>
+            <a:off x="10015132" y="6141164"/>
+            <a:ext cx="1375397" cy="353867"/>
+          </a:xfrm>
+          <a:prstGeom prst="rect">
+            <a:avLst/>
+          </a:prstGeom>
+        </p:spPr>
+        <p:style>
+          <a:lnRef idx="2">
+            <a:schemeClr val="accent1">
+              <a:shade val="50000"/>
+            </a:schemeClr>
+          </a:lnRef>
+          <a:fillRef idx="1">
+            <a:schemeClr val="accent1"/>
+          </a:fillRef>
+          <a:effectRef idx="0">
+            <a:schemeClr val="accent1"/>
+          </a:effectRef>
+          <a:fontRef idx="minor">
+            <a:schemeClr val="lt1"/>
+          </a:fontRef>
+        </p:style>
+        <p:txBody>
+          <a:bodyPr rtlCol="0" anchor="ctr"/>
+          <a:lstStyle/>
+          <a:p>
+            <a:pPr algn="ctr"/>
+            <a:r>
+              <a:rPr lang="en-US" sz="1400" dirty="0"/>
+              <a:t>Prober Agent </a:t>
+            </a:r>
+            <a:endParaRPr lang="en-SG" sz="1400" dirty="0"/>
+          </a:p>
+        </p:txBody>
+      </p:sp>
+      <p:cxnSp>
+        <p:nvCxnSpPr>
+          <p:cNvPr id="114" name="Straight Arrow Connector 113">
+            <a:extLst>
+              <a:ext uri="{FF2B5EF4-FFF2-40B4-BE49-F238E27FC236}">
+                <a16:creationId xmlns:a16="http://schemas.microsoft.com/office/drawing/2014/main" id="{2AD91286-57FF-2905-34F5-E390C34536AF}"/>
+              </a:ext>
+            </a:extLst>
+          </p:cNvPr>
+          <p:cNvCxnSpPr>
+            <a:cxnSpLocks/>
+            <a:endCxn id="102" idx="1"/>
+          </p:cNvCxnSpPr>
+          <p:nvPr/>
+        </p:nvCxnSpPr>
+        <p:spPr>
+          <a:xfrm flipV="1">
+            <a:off x="7465152" y="5718642"/>
+            <a:ext cx="2549980" cy="361909"/>
+          </a:xfrm>
+          <a:prstGeom prst="straightConnector1">
+            <a:avLst/>
+          </a:prstGeom>
+          <a:ln w="19050">
+            <a:tailEnd type="triangle"/>
+          </a:ln>
+        </p:spPr>
+        <p:style>
+          <a:lnRef idx="1">
+            <a:schemeClr val="accent1"/>
+          </a:lnRef>
+          <a:fillRef idx="0">
+            <a:schemeClr val="accent1"/>
+          </a:fillRef>
+          <a:effectRef idx="0">
+            <a:schemeClr val="accent1"/>
+          </a:effectRef>
+          <a:fontRef idx="minor">
+            <a:schemeClr val="tx1"/>
+          </a:fontRef>
+        </p:style>
+      </p:cxnSp>
+      <p:cxnSp>
+        <p:nvCxnSpPr>
+          <p:cNvPr id="118" name="Straight Arrow Connector 117">
+            <a:extLst>
+              <a:ext uri="{FF2B5EF4-FFF2-40B4-BE49-F238E27FC236}">
+                <a16:creationId xmlns:a16="http://schemas.microsoft.com/office/drawing/2014/main" id="{28060197-1D10-362B-E2BE-88D5EEF7A6C1}"/>
+              </a:ext>
+            </a:extLst>
+          </p:cNvPr>
+          <p:cNvCxnSpPr>
+            <a:cxnSpLocks/>
+            <a:endCxn id="111" idx="1"/>
+          </p:cNvCxnSpPr>
+          <p:nvPr/>
+        </p:nvCxnSpPr>
+        <p:spPr>
+          <a:xfrm>
+            <a:off x="7465152" y="6196886"/>
+            <a:ext cx="2549980" cy="121212"/>
+          </a:xfrm>
+          <a:prstGeom prst="straightConnector1">
+            <a:avLst/>
+          </a:prstGeom>
+          <a:ln w="19050">
+            <a:tailEnd type="triangle"/>
+          </a:ln>
+        </p:spPr>
+        <p:style>
+          <a:lnRef idx="1">
+            <a:schemeClr val="accent1"/>
+          </a:lnRef>
+          <a:fillRef idx="0">
+            <a:schemeClr val="accent1"/>
+          </a:fillRef>
+          <a:effectRef idx="0">
+            <a:schemeClr val="accent1"/>
+          </a:effectRef>
+          <a:fontRef idx="minor">
+            <a:schemeClr val="tx1"/>
+          </a:fontRef>
+        </p:style>
+      </p:cxnSp>
+    </p:spTree>
+    <p:extLst>
+      <p:ext uri="{BB962C8B-B14F-4D97-AF65-F5344CB8AC3E}">
+        <p14:creationId xmlns:p14="http://schemas.microsoft.com/office/powerpoint/2010/main" val="48349409"/>
+      </p:ext>
+    </p:extLst>
+  </p:cSld>
+  <p:clrMapOvr>
+    <a:masterClrMapping/>
+  </p:clrMapOvr>
+</p:sld>
+</file>
+
+<file path=ppt/slides/slide3.xml><?xml version="1.0" encoding="utf-8"?>
+<p:sld xmlns:a="http://schemas.openxmlformats.org/drawingml/2006/main" xmlns:r="http://schemas.openxmlformats.org/officeDocument/2006/relationships" xmlns:p="http://schemas.openxmlformats.org/presentationml/2006/main">
+  <p:cSld>
+    <p:spTree>
+      <p:nvGrpSpPr>
+        <p:cNvPr id="1" name=""/>
+        <p:cNvGrpSpPr/>
+        <p:nvPr/>
+      </p:nvGrpSpPr>
+      <p:grpSpPr>
+        <a:xfrm>
+          <a:off x="0" y="0"/>
+          <a:ext cx="0" cy="0"/>
+          <a:chOff x="0" y="0"/>
+          <a:chExt cx="0" cy="0"/>
+        </a:xfrm>
+      </p:grpSpPr>
+      <p:sp>
+        <p:nvSpPr>
           <p:cNvPr id="126" name="矩形 9">
             <a:extLst>
               <a:ext uri="{FF2B5EF4-FFF2-40B4-BE49-F238E27FC236}">
@@ -9961,7 +10249,7 @@
 </p:sld>
 </file>
 
-<file path=ppt/slides/slide3.xml><?xml version="1.0" encoding="utf-8"?>
+<file path=ppt/slides/slide4.xml><?xml version="1.0" encoding="utf-8"?>
 <p:sld xmlns:a="http://schemas.openxmlformats.org/drawingml/2006/main" xmlns:r="http://schemas.openxmlformats.org/officeDocument/2006/relationships" xmlns:p="http://schemas.openxmlformats.org/presentationml/2006/main">
   <p:cSld>
     <p:spTree>
@@ -13086,7 +13374,7 @@
 </p:sld>
 </file>
 
-<file path=ppt/slides/slide4.xml><?xml version="1.0" encoding="utf-8"?>
+<file path=ppt/slides/slide5.xml><?xml version="1.0" encoding="utf-8"?>
 <p:sld xmlns:a="http://schemas.openxmlformats.org/drawingml/2006/main" xmlns:r="http://schemas.openxmlformats.org/officeDocument/2006/relationships" xmlns:p="http://schemas.openxmlformats.org/presentationml/2006/main">
   <p:cSld>
     <p:spTree>
